--- a/PPTs/00_App Deployment.pptx
+++ b/PPTs/00_App Deployment.pptx
@@ -5,21 +5,29 @@
     <p:sldMasterId id="2147483660" r:id="rId1"/>
   </p:sldMasterIdLst>
   <p:notesMasterIdLst>
-    <p:notesMasterId r:id="rId11"/>
+    <p:notesMasterId r:id="rId19"/>
   </p:notesMasterIdLst>
   <p:handoutMasterIdLst>
-    <p:handoutMasterId r:id="rId12"/>
+    <p:handoutMasterId r:id="rId20"/>
   </p:handoutMasterIdLst>
   <p:sldIdLst>
     <p:sldId id="256" r:id="rId2"/>
     <p:sldId id="1136" r:id="rId3"/>
     <p:sldId id="1264" r:id="rId4"/>
-    <p:sldId id="1263" r:id="rId5"/>
-    <p:sldId id="1265" r:id="rId6"/>
-    <p:sldId id="1266" r:id="rId7"/>
-    <p:sldId id="1268" r:id="rId8"/>
-    <p:sldId id="1267" r:id="rId9"/>
-    <p:sldId id="1269" r:id="rId10"/>
+    <p:sldId id="1278" r:id="rId5"/>
+    <p:sldId id="1263" r:id="rId6"/>
+    <p:sldId id="1265" r:id="rId7"/>
+    <p:sldId id="1266" r:id="rId8"/>
+    <p:sldId id="1268" r:id="rId9"/>
+    <p:sldId id="1267" r:id="rId10"/>
+    <p:sldId id="1269" r:id="rId11"/>
+    <p:sldId id="1277" r:id="rId12"/>
+    <p:sldId id="1271" r:id="rId13"/>
+    <p:sldId id="1272" r:id="rId14"/>
+    <p:sldId id="1273" r:id="rId15"/>
+    <p:sldId id="1274" r:id="rId16"/>
+    <p:sldId id="1275" r:id="rId17"/>
+    <p:sldId id="1276" r:id="rId18"/>
   </p:sldIdLst>
   <p:sldSz cx="12192000" cy="6858000"/>
   <p:notesSz cx="6858000" cy="9144000"/>
@@ -130,12 +138,20 @@
           <p14:sldIdLst>
             <p14:sldId id="1136"/>
             <p14:sldId id="1264"/>
+            <p14:sldId id="1278"/>
             <p14:sldId id="1263"/>
             <p14:sldId id="1265"/>
             <p14:sldId id="1266"/>
             <p14:sldId id="1268"/>
             <p14:sldId id="1267"/>
             <p14:sldId id="1269"/>
+            <p14:sldId id="1277"/>
+            <p14:sldId id="1271"/>
+            <p14:sldId id="1272"/>
+            <p14:sldId id="1273"/>
+            <p14:sldId id="1274"/>
+            <p14:sldId id="1275"/>
+            <p14:sldId id="1276"/>
           </p14:sldIdLst>
         </p14:section>
         <p14:section name="자세한 정보" id="{2CC34DB2-6590-42C0-AD4B-A04C6060184E}">
@@ -260,7 +276,7 @@
                 <a:latin typeface="맑은 고딕" panose="020B0503020000020004" pitchFamily="50" charset="-127"/>
                 <a:ea typeface="맑은 고딕" panose="020B0503020000020004" pitchFamily="50" charset="-127"/>
               </a:rPr>
-              <a:t>2026-08-17</a:t>
+              <a:t>2026-08-19</a:t>
             </a:fld>
             <a:endParaRPr lang="ko-KR" altLang="en-US">
               <a:latin typeface="맑은 고딕" panose="020B0503020000020004" pitchFamily="50" charset="-127"/>
@@ -446,7 +462,7 @@
           <a:p>
             <a:fld id="{43E1C3DD-4A19-441D-907C-380838DB51C4}" type="datetime1">
               <a:rPr lang="ko-KR" altLang="en-US" noProof="0" smtClean="0"/>
-              <a:t>2026-08-17</a:t>
+              <a:t>2026-08-19</a:t>
             </a:fld>
             <a:endParaRPr lang="ko-KR" altLang="en-US" noProof="0"/>
           </a:p>
@@ -826,6 +842,254 @@
 </p:notes>
 </file>
 
+<file path=ppt/notesSlides/notesSlide2.xml><?xml version="1.0" encoding="utf-8"?>
+<p:notes xmlns:a="http://schemas.openxmlformats.org/drawingml/2006/main" xmlns:r="http://schemas.openxmlformats.org/officeDocument/2006/relationships" xmlns:p="http://schemas.openxmlformats.org/presentationml/2006/main">
+  <p:cSld>
+    <p:spTree>
+      <p:nvGrpSpPr>
+        <p:cNvPr id="1" name="">
+          <a:extLst>
+            <a:ext uri="{FF2B5EF4-FFF2-40B4-BE49-F238E27FC236}">
+              <a16:creationId xmlns:a16="http://schemas.microsoft.com/office/drawing/2014/main" id="{F33F4A73-0DF4-6018-8EC1-E24C2C445A1B}"/>
+            </a:ext>
+          </a:extLst>
+        </p:cNvPr>
+        <p:cNvGrpSpPr/>
+        <p:nvPr/>
+      </p:nvGrpSpPr>
+      <p:grpSpPr>
+        <a:xfrm>
+          <a:off x="0" y="0"/>
+          <a:ext cx="0" cy="0"/>
+          <a:chOff x="0" y="0"/>
+          <a:chExt cx="0" cy="0"/>
+        </a:xfrm>
+      </p:grpSpPr>
+      <p:sp>
+        <p:nvSpPr>
+          <p:cNvPr id="2" name="슬라이드 이미지 개체 틀 1">
+            <a:extLst>
+              <a:ext uri="{FF2B5EF4-FFF2-40B4-BE49-F238E27FC236}">
+                <a16:creationId xmlns:a16="http://schemas.microsoft.com/office/drawing/2014/main" id="{D9A6BCE8-90AA-D178-6A22-9999B923009B}"/>
+              </a:ext>
+            </a:extLst>
+          </p:cNvPr>
+          <p:cNvSpPr>
+            <a:spLocks noGrp="1" noRot="1" noChangeAspect="1"/>
+          </p:cNvSpPr>
+          <p:nvPr>
+            <p:ph type="sldImg"/>
+          </p:nvPr>
+        </p:nvSpPr>
+        <p:spPr>
+          <a:xfrm>
+            <a:off x="685800" y="1143000"/>
+            <a:ext cx="5486400" cy="3086100"/>
+          </a:xfrm>
+        </p:spPr>
+      </p:sp>
+      <p:sp>
+        <p:nvSpPr>
+          <p:cNvPr id="3" name="슬라이드 노트 개체 틀 2">
+            <a:extLst>
+              <a:ext uri="{FF2B5EF4-FFF2-40B4-BE49-F238E27FC236}">
+                <a16:creationId xmlns:a16="http://schemas.microsoft.com/office/drawing/2014/main" id="{0E33456C-38C3-CF65-F3B2-46F4EC8C5666}"/>
+              </a:ext>
+            </a:extLst>
+          </p:cNvPr>
+          <p:cNvSpPr>
+            <a:spLocks noGrp="1"/>
+          </p:cNvSpPr>
+          <p:nvPr>
+            <p:ph type="body" idx="1"/>
+          </p:nvPr>
+        </p:nvSpPr>
+        <p:spPr/>
+        <p:txBody>
+          <a:bodyPr rtlCol="0"/>
+          <a:lstStyle/>
+          <a:p>
+            <a:pPr rtl="0"/>
+            <a:endParaRPr lang="ko-KR" altLang="en-US">
+              <a:latin typeface="맑은 고딕" panose="020B0503020000020004" pitchFamily="50" charset="-127"/>
+              <a:ea typeface="맑은 고딕" panose="020B0503020000020004" pitchFamily="50" charset="-127"/>
+            </a:endParaRPr>
+          </a:p>
+        </p:txBody>
+      </p:sp>
+      <p:sp>
+        <p:nvSpPr>
+          <p:cNvPr id="4" name="슬라이드 번호 개체 틀 3">
+            <a:extLst>
+              <a:ext uri="{FF2B5EF4-FFF2-40B4-BE49-F238E27FC236}">
+                <a16:creationId xmlns:a16="http://schemas.microsoft.com/office/drawing/2014/main" id="{C118726D-52B0-5BA3-FE58-E58B4A5D1274}"/>
+              </a:ext>
+            </a:extLst>
+          </p:cNvPr>
+          <p:cNvSpPr>
+            <a:spLocks noGrp="1"/>
+          </p:cNvSpPr>
+          <p:nvPr>
+            <p:ph type="sldNum" sz="quarter" idx="10"/>
+          </p:nvPr>
+        </p:nvSpPr>
+        <p:spPr/>
+        <p:txBody>
+          <a:bodyPr rtlCol="0"/>
+          <a:lstStyle/>
+          <a:p>
+            <a:pPr rtl="0"/>
+            <a:fld id="{DF61EA0F-A667-4B49-8422-0062BC55E249}" type="slidenum">
+              <a:rPr lang="en-US" altLang="ko-KR" smtClean="0">
+                <a:latin typeface="맑은 고딕" panose="020B0503020000020004" pitchFamily="50" charset="-127"/>
+                <a:ea typeface="맑은 고딕" panose="020B0503020000020004" pitchFamily="50" charset="-127"/>
+              </a:rPr>
+              <a:t>4</a:t>
+            </a:fld>
+            <a:endParaRPr lang="ko-KR" altLang="en-US">
+              <a:latin typeface="맑은 고딕" panose="020B0503020000020004" pitchFamily="50" charset="-127"/>
+              <a:ea typeface="맑은 고딕" panose="020B0503020000020004" pitchFamily="50" charset="-127"/>
+            </a:endParaRPr>
+          </a:p>
+        </p:txBody>
+      </p:sp>
+    </p:spTree>
+    <p:extLst>
+      <p:ext uri="{BB962C8B-B14F-4D97-AF65-F5344CB8AC3E}">
+        <p14:creationId xmlns:p14="http://schemas.microsoft.com/office/powerpoint/2010/main" val="1206726905"/>
+      </p:ext>
+    </p:extLst>
+  </p:cSld>
+  <p:clrMapOvr>
+    <a:masterClrMapping/>
+  </p:clrMapOvr>
+</p:notes>
+</file>
+
+<file path=ppt/notesSlides/notesSlide3.xml><?xml version="1.0" encoding="utf-8"?>
+<p:notes xmlns:a="http://schemas.openxmlformats.org/drawingml/2006/main" xmlns:r="http://schemas.openxmlformats.org/officeDocument/2006/relationships" xmlns:p="http://schemas.openxmlformats.org/presentationml/2006/main">
+  <p:cSld>
+    <p:spTree>
+      <p:nvGrpSpPr>
+        <p:cNvPr id="1" name="">
+          <a:extLst>
+            <a:ext uri="{FF2B5EF4-FFF2-40B4-BE49-F238E27FC236}">
+              <a16:creationId xmlns:a16="http://schemas.microsoft.com/office/drawing/2014/main" id="{E2C61B78-5575-88F8-0A7E-E53379AF5097}"/>
+            </a:ext>
+          </a:extLst>
+        </p:cNvPr>
+        <p:cNvGrpSpPr/>
+        <p:nvPr/>
+      </p:nvGrpSpPr>
+      <p:grpSpPr>
+        <a:xfrm>
+          <a:off x="0" y="0"/>
+          <a:ext cx="0" cy="0"/>
+          <a:chOff x="0" y="0"/>
+          <a:chExt cx="0" cy="0"/>
+        </a:xfrm>
+      </p:grpSpPr>
+      <p:sp>
+        <p:nvSpPr>
+          <p:cNvPr id="2" name="슬라이드 이미지 개체 틀 1">
+            <a:extLst>
+              <a:ext uri="{FF2B5EF4-FFF2-40B4-BE49-F238E27FC236}">
+                <a16:creationId xmlns:a16="http://schemas.microsoft.com/office/drawing/2014/main" id="{A350F36F-171E-36E5-3DAF-9968D8C25767}"/>
+              </a:ext>
+            </a:extLst>
+          </p:cNvPr>
+          <p:cNvSpPr>
+            <a:spLocks noGrp="1" noRot="1" noChangeAspect="1"/>
+          </p:cNvSpPr>
+          <p:nvPr>
+            <p:ph type="sldImg"/>
+          </p:nvPr>
+        </p:nvSpPr>
+        <p:spPr>
+          <a:xfrm>
+            <a:off x="685800" y="1143000"/>
+            <a:ext cx="5486400" cy="3086100"/>
+          </a:xfrm>
+        </p:spPr>
+      </p:sp>
+      <p:sp>
+        <p:nvSpPr>
+          <p:cNvPr id="3" name="슬라이드 노트 개체 틀 2">
+            <a:extLst>
+              <a:ext uri="{FF2B5EF4-FFF2-40B4-BE49-F238E27FC236}">
+                <a16:creationId xmlns:a16="http://schemas.microsoft.com/office/drawing/2014/main" id="{C9FFA43C-EDDB-96A5-0C73-7E04FD4144C3}"/>
+              </a:ext>
+            </a:extLst>
+          </p:cNvPr>
+          <p:cNvSpPr>
+            <a:spLocks noGrp="1"/>
+          </p:cNvSpPr>
+          <p:nvPr>
+            <p:ph type="body" idx="1"/>
+          </p:nvPr>
+        </p:nvSpPr>
+        <p:spPr/>
+        <p:txBody>
+          <a:bodyPr rtlCol="0"/>
+          <a:lstStyle/>
+          <a:p>
+            <a:pPr rtl="0"/>
+            <a:endParaRPr lang="ko-KR" altLang="en-US">
+              <a:latin typeface="맑은 고딕" panose="020B0503020000020004" pitchFamily="50" charset="-127"/>
+              <a:ea typeface="맑은 고딕" panose="020B0503020000020004" pitchFamily="50" charset="-127"/>
+            </a:endParaRPr>
+          </a:p>
+        </p:txBody>
+      </p:sp>
+      <p:sp>
+        <p:nvSpPr>
+          <p:cNvPr id="4" name="슬라이드 번호 개체 틀 3">
+            <a:extLst>
+              <a:ext uri="{FF2B5EF4-FFF2-40B4-BE49-F238E27FC236}">
+                <a16:creationId xmlns:a16="http://schemas.microsoft.com/office/drawing/2014/main" id="{C1DFA5DC-B20D-0A3E-0B35-F0C9FEE2A6A0}"/>
+              </a:ext>
+            </a:extLst>
+          </p:cNvPr>
+          <p:cNvSpPr>
+            <a:spLocks noGrp="1"/>
+          </p:cNvSpPr>
+          <p:nvPr>
+            <p:ph type="sldNum" sz="quarter" idx="10"/>
+          </p:nvPr>
+        </p:nvSpPr>
+        <p:spPr/>
+        <p:txBody>
+          <a:bodyPr rtlCol="0"/>
+          <a:lstStyle/>
+          <a:p>
+            <a:pPr rtl="0"/>
+            <a:fld id="{DF61EA0F-A667-4B49-8422-0062BC55E249}" type="slidenum">
+              <a:rPr lang="en-US" altLang="ko-KR" smtClean="0">
+                <a:latin typeface="맑은 고딕" panose="020B0503020000020004" pitchFamily="50" charset="-127"/>
+                <a:ea typeface="맑은 고딕" panose="020B0503020000020004" pitchFamily="50" charset="-127"/>
+              </a:rPr>
+              <a:t>11</a:t>
+            </a:fld>
+            <a:endParaRPr lang="ko-KR" altLang="en-US">
+              <a:latin typeface="맑은 고딕" panose="020B0503020000020004" pitchFamily="50" charset="-127"/>
+              <a:ea typeface="맑은 고딕" panose="020B0503020000020004" pitchFamily="50" charset="-127"/>
+            </a:endParaRPr>
+          </a:p>
+        </p:txBody>
+      </p:sp>
+    </p:spTree>
+    <p:extLst>
+      <p:ext uri="{BB962C8B-B14F-4D97-AF65-F5344CB8AC3E}">
+        <p14:creationId xmlns:p14="http://schemas.microsoft.com/office/powerpoint/2010/main" val="3159122008"/>
+      </p:ext>
+    </p:extLst>
+  </p:cSld>
+  <p:clrMapOvr>
+    <a:masterClrMapping/>
+  </p:clrMapOvr>
+</p:notes>
+</file>
+
 <file path=ppt/slideLayouts/slideLayout1.xml><?xml version="1.0" encoding="utf-8"?>
 <p:sldLayout xmlns:a="http://schemas.openxmlformats.org/drawingml/2006/main" xmlns:r="http://schemas.openxmlformats.org/officeDocument/2006/relationships" xmlns:p="http://schemas.openxmlformats.org/presentationml/2006/main" preserve="1" userDrawn="1">
   <p:cSld name="제목 슬라이드">
@@ -1294,7 +1558,7 @@
           <a:p>
             <a:fld id="{990475B5-67CA-4281-BDCA-DA943C3C8EB3}" type="datetime1">
               <a:rPr lang="ko-KR" altLang="en-US" noProof="0" smtClean="0"/>
-              <a:t>2026-08-17</a:t>
+              <a:t>2026-08-19</a:t>
             </a:fld>
             <a:endParaRPr lang="ko-KR" altLang="en-US" noProof="0"/>
           </a:p>
@@ -1948,7 +2212,7 @@
           <a:p>
             <a:fld id="{48A87A34-81AB-432B-8DAE-1953F412C126}" type="datetimeFigureOut">
               <a:rPr lang="en-US" smtClean="0"/>
-              <a:t>8/17/2026</a:t>
+              <a:t>8/19/2026</a:t>
             </a:fld>
             <a:endParaRPr lang="en-US" dirty="0"/>
           </a:p>
@@ -2244,7 +2508,7 @@
           <a:p>
             <a:fld id="{C655C81E-72E7-4D05-94B5-F45B321A525D}" type="datetime1">
               <a:rPr lang="ko-KR" altLang="en-US" noProof="0" smtClean="0"/>
-              <a:t>2026-08-17</a:t>
+              <a:t>2026-08-19</a:t>
             </a:fld>
             <a:endParaRPr lang="ko-KR" altLang="en-US" noProof="0" dirty="0">
               <a:latin typeface="맑은 고딕" panose="020B0503020000020004" pitchFamily="50" charset="-127"/>
@@ -3018,6 +3282,4854 @@
 </p:sld>
 </file>
 
+<file path=ppt/slides/slide10.xml><?xml version="1.0" encoding="utf-8"?>
+<p:sld xmlns:a="http://schemas.openxmlformats.org/drawingml/2006/main" xmlns:r="http://schemas.openxmlformats.org/officeDocument/2006/relationships" xmlns:p="http://schemas.openxmlformats.org/presentationml/2006/main">
+  <p:cSld>
+    <p:spTree>
+      <p:nvGrpSpPr>
+        <p:cNvPr id="1" name="">
+          <a:extLst>
+            <a:ext uri="{FF2B5EF4-FFF2-40B4-BE49-F238E27FC236}">
+              <a16:creationId xmlns:a16="http://schemas.microsoft.com/office/drawing/2014/main" id="{A48B3221-BCC2-E73E-5ECE-FC0D08A21028}"/>
+            </a:ext>
+          </a:extLst>
+        </p:cNvPr>
+        <p:cNvGrpSpPr/>
+        <p:nvPr/>
+      </p:nvGrpSpPr>
+      <p:grpSpPr>
+        <a:xfrm>
+          <a:off x="0" y="0"/>
+          <a:ext cx="0" cy="0"/>
+          <a:chOff x="0" y="0"/>
+          <a:chExt cx="0" cy="0"/>
+        </a:xfrm>
+      </p:grpSpPr>
+      <p:sp>
+        <p:nvSpPr>
+          <p:cNvPr id="3" name="제목 1">
+            <a:extLst>
+              <a:ext uri="{FF2B5EF4-FFF2-40B4-BE49-F238E27FC236}">
+                <a16:creationId xmlns:a16="http://schemas.microsoft.com/office/drawing/2014/main" id="{97E98970-B8B2-8158-00D9-5C45631744D2}"/>
+              </a:ext>
+            </a:extLst>
+          </p:cNvPr>
+          <p:cNvSpPr txBox="1">
+            <a:spLocks/>
+          </p:cNvSpPr>
+          <p:nvPr/>
+        </p:nvSpPr>
+        <p:spPr>
+          <a:xfrm>
+            <a:off x="475645" y="481983"/>
+            <a:ext cx="10353762" cy="766439"/>
+          </a:xfrm>
+          <a:prstGeom prst="rect">
+            <a:avLst/>
+          </a:prstGeom>
+        </p:spPr>
+        <p:txBody>
+          <a:bodyPr vert="horz" lIns="91440" tIns="45720" rIns="91440" bIns="45720" rtlCol="0" anchor="ctr">
+            <a:normAutofit/>
+          </a:bodyPr>
+          <a:lstStyle>
+            <a:lvl1pPr algn="ctr" defTabSz="914400" rtl="0" eaLnBrk="1" latinLnBrk="1" hangingPunct="1">
+              <a:lnSpc>
+                <a:spcPct val="90000"/>
+              </a:lnSpc>
+              <a:spcBef>
+                <a:spcPct val="0"/>
+              </a:spcBef>
+              <a:buNone/>
+              <a:defRPr sz="3200" kern="1200" cap="all" baseline="0">
+                <a:solidFill>
+                  <a:schemeClr val="tx1"/>
+                </a:solidFill>
+                <a:effectLst/>
+                <a:latin typeface="Batang" panose="02030600000101010101" pitchFamily="18" charset="-127"/>
+                <a:ea typeface="Batang" panose="02030600000101010101" pitchFamily="18" charset="-127"/>
+                <a:cs typeface="+mj-cs"/>
+              </a:defRPr>
+            </a:lvl1pPr>
+          </a:lstStyle>
+          <a:p>
+            <a:pPr algn="l"/>
+            <a:r>
+              <a:rPr lang="en-US" altLang="ko-KR" sz="2800" cap="none" dirty="0">
+                <a:solidFill>
+                  <a:schemeClr val="bg2">
+                    <a:lumMod val="25000"/>
+                  </a:schemeClr>
+                </a:solidFill>
+                <a:latin typeface="D2Coding" panose="020B0609020101020101" pitchFamily="49" charset="-127"/>
+                <a:ea typeface="D2Coding" panose="020B0609020101020101" pitchFamily="49" charset="-127"/>
+                <a:cs typeface="Segoe UI Light" panose="020B0502040204020203" pitchFamily="34" charset="0"/>
+              </a:rPr>
+              <a:t>Deployment</a:t>
+            </a:r>
+            <a:r>
+              <a:rPr lang="ko-KR" altLang="en-US" sz="2800" cap="none" dirty="0">
+                <a:solidFill>
+                  <a:schemeClr val="bg2">
+                    <a:lumMod val="25000"/>
+                  </a:schemeClr>
+                </a:solidFill>
+                <a:latin typeface="D2Coding" panose="020B0609020101020101" pitchFamily="49" charset="-127"/>
+                <a:ea typeface="D2Coding" panose="020B0609020101020101" pitchFamily="49" charset="-127"/>
+                <a:cs typeface="Segoe UI Light" panose="020B0502040204020203" pitchFamily="34" charset="0"/>
+              </a:rPr>
+              <a:t> </a:t>
+            </a:r>
+            <a:r>
+              <a:rPr lang="en-US" altLang="ko-KR" sz="2800" cap="none" dirty="0">
+                <a:solidFill>
+                  <a:schemeClr val="bg2">
+                    <a:lumMod val="25000"/>
+                  </a:schemeClr>
+                </a:solidFill>
+                <a:latin typeface="D2Coding" panose="020B0609020101020101" pitchFamily="49" charset="-127"/>
+                <a:ea typeface="D2Coding" panose="020B0609020101020101" pitchFamily="49" charset="-127"/>
+                <a:cs typeface="Segoe UI Light" panose="020B0502040204020203" pitchFamily="34" charset="0"/>
+              </a:rPr>
+              <a:t>UI(</a:t>
+            </a:r>
+            <a:r>
+              <a:rPr lang="en-US" altLang="ko-KR" sz="2800" cap="none" dirty="0" err="1">
+                <a:solidFill>
+                  <a:schemeClr val="bg2">
+                    <a:lumMod val="25000"/>
+                  </a:schemeClr>
+                </a:solidFill>
+                <a:latin typeface="D2Coding" panose="020B0609020101020101" pitchFamily="49" charset="-127"/>
+                <a:ea typeface="D2Coding" panose="020B0609020101020101" pitchFamily="49" charset="-127"/>
+                <a:cs typeface="Segoe UI Light" panose="020B0502040204020203" pitchFamily="34" charset="0"/>
+              </a:rPr>
+              <a:t>gradio</a:t>
+            </a:r>
+            <a:r>
+              <a:rPr lang="en-US" altLang="ko-KR" sz="2800" cap="none" dirty="0">
+                <a:solidFill>
+                  <a:schemeClr val="bg2">
+                    <a:lumMod val="25000"/>
+                  </a:schemeClr>
+                </a:solidFill>
+                <a:latin typeface="D2Coding" panose="020B0609020101020101" pitchFamily="49" charset="-127"/>
+                <a:ea typeface="D2Coding" panose="020B0609020101020101" pitchFamily="49" charset="-127"/>
+                <a:cs typeface="Segoe UI Light" panose="020B0502040204020203" pitchFamily="34" charset="0"/>
+              </a:rPr>
+              <a:t>)</a:t>
+            </a:r>
+            <a:endParaRPr lang="ko-KR" altLang="en-US" sz="2800" cap="none" dirty="0">
+              <a:solidFill>
+                <a:schemeClr val="bg2">
+                  <a:lumMod val="25000"/>
+                </a:schemeClr>
+              </a:solidFill>
+              <a:latin typeface="D2Coding" panose="020B0609020101020101" pitchFamily="49" charset="-127"/>
+              <a:ea typeface="D2Coding" panose="020B0609020101020101" pitchFamily="49" charset="-127"/>
+              <a:cs typeface="Segoe UI Light" panose="020B0502040204020203" pitchFamily="34" charset="0"/>
+            </a:endParaRPr>
+          </a:p>
+        </p:txBody>
+      </p:sp>
+      <p:sp>
+        <p:nvSpPr>
+          <p:cNvPr id="8" name="TextBox 7">
+            <a:extLst>
+              <a:ext uri="{FF2B5EF4-FFF2-40B4-BE49-F238E27FC236}">
+                <a16:creationId xmlns:a16="http://schemas.microsoft.com/office/drawing/2014/main" id="{543A0A8B-DCEE-4734-094C-DBA1FD8F4C84}"/>
+              </a:ext>
+            </a:extLst>
+          </p:cNvPr>
+          <p:cNvSpPr txBox="1"/>
+          <p:nvPr/>
+        </p:nvSpPr>
+        <p:spPr>
+          <a:xfrm>
+            <a:off x="744020" y="3244334"/>
+            <a:ext cx="184731" cy="369332"/>
+          </a:xfrm>
+          <a:prstGeom prst="rect">
+            <a:avLst/>
+          </a:prstGeom>
+          <a:noFill/>
+        </p:spPr>
+        <p:txBody>
+          <a:bodyPr wrap="none" rtlCol="0">
+            <a:spAutoFit/>
+          </a:bodyPr>
+          <a:lstStyle/>
+          <a:p>
+            <a:endParaRPr lang="ko-KR" altLang="en-US" dirty="0">
+              <a:solidFill>
+                <a:schemeClr val="accent5"/>
+              </a:solidFill>
+              <a:latin typeface="D2Coding" panose="020B0609020101020101" pitchFamily="49" charset="-127"/>
+              <a:ea typeface="D2Coding" panose="020B0609020101020101" pitchFamily="49" charset="-127"/>
+            </a:endParaRPr>
+          </a:p>
+        </p:txBody>
+      </p:sp>
+      <p:sp>
+        <p:nvSpPr>
+          <p:cNvPr id="2" name="슬라이드 번호 개체 틀 3">
+            <a:extLst>
+              <a:ext uri="{FF2B5EF4-FFF2-40B4-BE49-F238E27FC236}">
+                <a16:creationId xmlns:a16="http://schemas.microsoft.com/office/drawing/2014/main" id="{03848BC8-1ABE-0BD9-D867-BEF02A368B64}"/>
+              </a:ext>
+            </a:extLst>
+          </p:cNvPr>
+          <p:cNvSpPr txBox="1">
+            <a:spLocks/>
+          </p:cNvSpPr>
+          <p:nvPr/>
+        </p:nvSpPr>
+        <p:spPr>
+          <a:xfrm>
+            <a:off x="11180761" y="299420"/>
+            <a:ext cx="753545" cy="365125"/>
+          </a:xfrm>
+          <a:prstGeom prst="rect">
+            <a:avLst/>
+          </a:prstGeom>
+        </p:spPr>
+        <p:txBody>
+          <a:bodyPr vert="horz" lIns="91440" tIns="45720" rIns="91440" bIns="45720" rtlCol="0" anchor="ctr"/>
+          <a:lstStyle>
+            <a:defPPr rtl="0">
+              <a:defRPr lang="ko-KR"/>
+            </a:defPPr>
+            <a:lvl1pPr marL="0" algn="r" defTabSz="914400" rtl="0" eaLnBrk="1" latinLnBrk="0" hangingPunct="1">
+              <a:defRPr sz="1200" kern="1200" baseline="0">
+                <a:solidFill>
+                  <a:schemeClr val="tx1">
+                    <a:lumMod val="65000"/>
+                    <a:lumOff val="35000"/>
+                  </a:schemeClr>
+                </a:solidFill>
+                <a:latin typeface="맑은 고딕" panose="020B0503020000020004" pitchFamily="50" charset="-127"/>
+                <a:ea typeface="맑은 고딕" panose="020B0503020000020004" pitchFamily="50" charset="-127"/>
+                <a:cs typeface="+mn-cs"/>
+              </a:defRPr>
+            </a:lvl1pPr>
+            <a:lvl2pPr marL="457200" algn="l" defTabSz="914400" rtl="0" eaLnBrk="1" latinLnBrk="0" hangingPunct="1">
+              <a:defRPr sz="1800" kern="1200">
+                <a:solidFill>
+                  <a:schemeClr val="tx1"/>
+                </a:solidFill>
+                <a:latin typeface="+mn-lt"/>
+                <a:ea typeface="+mn-ea"/>
+                <a:cs typeface="+mn-cs"/>
+              </a:defRPr>
+            </a:lvl2pPr>
+            <a:lvl3pPr marL="914400" algn="l" defTabSz="914400" rtl="0" eaLnBrk="1" latinLnBrk="0" hangingPunct="1">
+              <a:defRPr sz="1800" kern="1200">
+                <a:solidFill>
+                  <a:schemeClr val="tx1"/>
+                </a:solidFill>
+                <a:latin typeface="+mn-lt"/>
+                <a:ea typeface="+mn-ea"/>
+                <a:cs typeface="+mn-cs"/>
+              </a:defRPr>
+            </a:lvl3pPr>
+            <a:lvl4pPr marL="1371600" algn="l" defTabSz="914400" rtl="0" eaLnBrk="1" latinLnBrk="0" hangingPunct="1">
+              <a:defRPr sz="1800" kern="1200">
+                <a:solidFill>
+                  <a:schemeClr val="tx1"/>
+                </a:solidFill>
+                <a:latin typeface="+mn-lt"/>
+                <a:ea typeface="+mn-ea"/>
+                <a:cs typeface="+mn-cs"/>
+              </a:defRPr>
+            </a:lvl4pPr>
+            <a:lvl5pPr marL="1828800" algn="l" defTabSz="914400" rtl="0" eaLnBrk="1" latinLnBrk="0" hangingPunct="1">
+              <a:defRPr sz="1800" kern="1200">
+                <a:solidFill>
+                  <a:schemeClr val="tx1"/>
+                </a:solidFill>
+                <a:latin typeface="+mn-lt"/>
+                <a:ea typeface="+mn-ea"/>
+                <a:cs typeface="+mn-cs"/>
+              </a:defRPr>
+            </a:lvl5pPr>
+            <a:lvl6pPr marL="2286000" algn="l" defTabSz="914400" rtl="0" eaLnBrk="1" latinLnBrk="0" hangingPunct="1">
+              <a:defRPr sz="1800" kern="1200">
+                <a:solidFill>
+                  <a:schemeClr val="tx1"/>
+                </a:solidFill>
+                <a:latin typeface="+mn-lt"/>
+                <a:ea typeface="+mn-ea"/>
+                <a:cs typeface="+mn-cs"/>
+              </a:defRPr>
+            </a:lvl6pPr>
+            <a:lvl7pPr marL="2743200" algn="l" defTabSz="914400" rtl="0" eaLnBrk="1" latinLnBrk="0" hangingPunct="1">
+              <a:defRPr sz="1800" kern="1200">
+                <a:solidFill>
+                  <a:schemeClr val="tx1"/>
+                </a:solidFill>
+                <a:latin typeface="+mn-lt"/>
+                <a:ea typeface="+mn-ea"/>
+                <a:cs typeface="+mn-cs"/>
+              </a:defRPr>
+            </a:lvl7pPr>
+            <a:lvl8pPr marL="3200400" algn="l" defTabSz="914400" rtl="0" eaLnBrk="1" latinLnBrk="0" hangingPunct="1">
+              <a:defRPr sz="1800" kern="1200">
+                <a:solidFill>
+                  <a:schemeClr val="tx1"/>
+                </a:solidFill>
+                <a:latin typeface="+mn-lt"/>
+                <a:ea typeface="+mn-ea"/>
+                <a:cs typeface="+mn-cs"/>
+              </a:defRPr>
+            </a:lvl8pPr>
+            <a:lvl9pPr marL="3657600" algn="l" defTabSz="914400" rtl="0" eaLnBrk="1" latinLnBrk="0" hangingPunct="1">
+              <a:defRPr sz="1800" kern="1200">
+                <a:solidFill>
+                  <a:schemeClr val="tx1"/>
+                </a:solidFill>
+                <a:latin typeface="+mn-lt"/>
+                <a:ea typeface="+mn-ea"/>
+                <a:cs typeface="+mn-cs"/>
+              </a:defRPr>
+            </a:lvl9pPr>
+          </a:lstStyle>
+          <a:p>
+            <a:fld id="{D57F1E4F-1CFF-5643-939E-217C01CDF565}" type="slidenum">
+              <a:rPr lang="en-US" b="1" smtClean="0">
+                <a:latin typeface="Segoe UI Emoji" panose="020B0502040204020203" pitchFamily="34" charset="0"/>
+                <a:ea typeface="Segoe UI Emoji" panose="020B0502040204020203" pitchFamily="34" charset="0"/>
+              </a:rPr>
+              <a:pPr/>
+              <a:t>10</a:t>
+            </a:fld>
+            <a:endParaRPr lang="en-US" b="1" dirty="0">
+              <a:latin typeface="Segoe UI Emoji" panose="020B0502040204020203" pitchFamily="34" charset="0"/>
+              <a:ea typeface="Segoe UI Emoji" panose="020B0502040204020203" pitchFamily="34" charset="0"/>
+            </a:endParaRPr>
+          </a:p>
+        </p:txBody>
+      </p:sp>
+      <p:pic>
+        <p:nvPicPr>
+          <p:cNvPr id="9" name="그림 8">
+            <a:extLst>
+              <a:ext uri="{FF2B5EF4-FFF2-40B4-BE49-F238E27FC236}">
+                <a16:creationId xmlns:a16="http://schemas.microsoft.com/office/drawing/2014/main" id="{277C49C9-1C30-EB3E-F23D-FDA9073C7FCD}"/>
+              </a:ext>
+            </a:extLst>
+          </p:cNvPr>
+          <p:cNvPicPr>
+            <a:picLocks noChangeAspect="1"/>
+          </p:cNvPicPr>
+          <p:nvPr/>
+        </p:nvPicPr>
+        <p:blipFill>
+          <a:blip r:embed="rId2"/>
+          <a:stretch>
+            <a:fillRect/>
+          </a:stretch>
+        </p:blipFill>
+        <p:spPr>
+          <a:xfrm>
+            <a:off x="2039929" y="1529510"/>
+            <a:ext cx="7521592" cy="4732430"/>
+          </a:xfrm>
+          <a:prstGeom prst="rect">
+            <a:avLst/>
+          </a:prstGeom>
+        </p:spPr>
+      </p:pic>
+      <p:pic>
+        <p:nvPicPr>
+          <p:cNvPr id="4" name="그래픽 3" descr="수영">
+            <a:extLst>
+              <a:ext uri="{FF2B5EF4-FFF2-40B4-BE49-F238E27FC236}">
+                <a16:creationId xmlns:a16="http://schemas.microsoft.com/office/drawing/2014/main" id="{453B4CE4-3E16-22A3-4EC3-2511DC714DEB}"/>
+              </a:ext>
+            </a:extLst>
+          </p:cNvPr>
+          <p:cNvPicPr>
+            <a:picLocks noChangeAspect="1"/>
+          </p:cNvPicPr>
+          <p:nvPr/>
+        </p:nvPicPr>
+        <p:blipFill>
+          <a:blip r:embed="rId3">
+            <a:extLst>
+              <a:ext uri="{96DAC541-7B7A-43D3-8B79-37D633B846F1}">
+                <asvg:svgBlip xmlns:asvg="http://schemas.microsoft.com/office/drawing/2016/SVG/main" r:embed="rId4"/>
+              </a:ext>
+            </a:extLst>
+          </a:blip>
+          <a:stretch>
+            <a:fillRect/>
+          </a:stretch>
+        </p:blipFill>
+        <p:spPr>
+          <a:xfrm>
+            <a:off x="10685980" y="373930"/>
+            <a:ext cx="914400" cy="914400"/>
+          </a:xfrm>
+          <a:prstGeom prst="rect">
+            <a:avLst/>
+          </a:prstGeom>
+        </p:spPr>
+      </p:pic>
+    </p:spTree>
+    <p:extLst>
+      <p:ext uri="{BB962C8B-B14F-4D97-AF65-F5344CB8AC3E}">
+        <p14:creationId xmlns:p14="http://schemas.microsoft.com/office/powerpoint/2010/main" val="1018683190"/>
+      </p:ext>
+    </p:extLst>
+  </p:cSld>
+  <p:clrMapOvr>
+    <a:masterClrMapping/>
+  </p:clrMapOvr>
+</p:sld>
+</file>
+
+<file path=ppt/slides/slide11.xml><?xml version="1.0" encoding="utf-8"?>
+<p:sld xmlns:a="http://schemas.openxmlformats.org/drawingml/2006/main" xmlns:r="http://schemas.openxmlformats.org/officeDocument/2006/relationships" xmlns:p="http://schemas.openxmlformats.org/presentationml/2006/main">
+  <p:cSld>
+    <p:spTree>
+      <p:nvGrpSpPr>
+        <p:cNvPr id="1" name="">
+          <a:extLst>
+            <a:ext uri="{FF2B5EF4-FFF2-40B4-BE49-F238E27FC236}">
+              <a16:creationId xmlns:a16="http://schemas.microsoft.com/office/drawing/2014/main" id="{55CF85D5-E24E-B833-4C4D-B3B056D31B4A}"/>
+            </a:ext>
+          </a:extLst>
+        </p:cNvPr>
+        <p:cNvGrpSpPr/>
+        <p:nvPr/>
+      </p:nvGrpSpPr>
+      <p:grpSpPr>
+        <a:xfrm>
+          <a:off x="0" y="0"/>
+          <a:ext cx="0" cy="0"/>
+          <a:chOff x="0" y="0"/>
+          <a:chExt cx="0" cy="0"/>
+        </a:xfrm>
+      </p:grpSpPr>
+      <p:sp>
+        <p:nvSpPr>
+          <p:cNvPr id="2" name="제목 1">
+            <a:extLst>
+              <a:ext uri="{FF2B5EF4-FFF2-40B4-BE49-F238E27FC236}">
+                <a16:creationId xmlns:a16="http://schemas.microsoft.com/office/drawing/2014/main" id="{42CD545A-7E04-ABAD-5A16-156673493B1B}"/>
+              </a:ext>
+            </a:extLst>
+          </p:cNvPr>
+          <p:cNvSpPr>
+            <a:spLocks noGrp="1"/>
+          </p:cNvSpPr>
+          <p:nvPr>
+            <p:ph type="ctrTitle"/>
+          </p:nvPr>
+        </p:nvSpPr>
+        <p:spPr>
+          <a:xfrm>
+            <a:off x="838199" y="1164324"/>
+            <a:ext cx="10934701" cy="2387600"/>
+          </a:xfrm>
+        </p:spPr>
+        <p:txBody>
+          <a:bodyPr rtlCol="0" anchor="ctr" anchorCtr="0">
+            <a:normAutofit/>
+          </a:bodyPr>
+          <a:lstStyle/>
+          <a:p>
+            <a:r>
+              <a:rPr lang="en-US" altLang="ko-KR" sz="5400" dirty="0">
+                <a:solidFill>
+                  <a:schemeClr val="bg1"/>
+                </a:solidFill>
+                <a:latin typeface="D2Coding" panose="020B0609020101020101" pitchFamily="49" charset="-127"/>
+                <a:ea typeface="D2Coding" panose="020B0609020101020101" pitchFamily="49" charset="-127"/>
+              </a:rPr>
+              <a:t>Docker Deployment</a:t>
+            </a:r>
+            <a:endParaRPr lang="ko-KR" altLang="en-US" sz="5400" dirty="0">
+              <a:solidFill>
+                <a:schemeClr val="bg1"/>
+              </a:solidFill>
+              <a:latin typeface="D2Coding" panose="020B0609020101020101" pitchFamily="49" charset="-127"/>
+              <a:ea typeface="D2Coding" panose="020B0609020101020101" pitchFamily="49" charset="-127"/>
+            </a:endParaRPr>
+          </a:p>
+        </p:txBody>
+      </p:sp>
+      <p:sp>
+        <p:nvSpPr>
+          <p:cNvPr id="5" name="부제목 2">
+            <a:extLst>
+              <a:ext uri="{FF2B5EF4-FFF2-40B4-BE49-F238E27FC236}">
+                <a16:creationId xmlns:a16="http://schemas.microsoft.com/office/drawing/2014/main" id="{4B690CFB-61F9-C8A8-B334-48F3880A6791}"/>
+              </a:ext>
+            </a:extLst>
+          </p:cNvPr>
+          <p:cNvSpPr txBox="1">
+            <a:spLocks/>
+          </p:cNvSpPr>
+          <p:nvPr/>
+        </p:nvSpPr>
+        <p:spPr>
+          <a:xfrm>
+            <a:off x="855620" y="4555883"/>
+            <a:ext cx="9582736" cy="1137793"/>
+          </a:xfrm>
+          <a:prstGeom prst="rect">
+            <a:avLst/>
+          </a:prstGeom>
+        </p:spPr>
+        <p:txBody>
+          <a:bodyPr vert="horz" lIns="91440" tIns="45720" rIns="91440" bIns="45720" rtlCol="0">
+            <a:normAutofit fontScale="85000" lnSpcReduction="20000"/>
+          </a:bodyPr>
+          <a:lstStyle>
+            <a:lvl1pPr marL="0" indent="0" algn="l" defTabSz="914400" rtl="0" eaLnBrk="1" latinLnBrk="1" hangingPunct="1">
+              <a:lnSpc>
+                <a:spcPct val="150000"/>
+              </a:lnSpc>
+              <a:spcBef>
+                <a:spcPts val="1000"/>
+              </a:spcBef>
+              <a:spcAft>
+                <a:spcPts val="1200"/>
+              </a:spcAft>
+              <a:buFontTx/>
+              <a:buNone/>
+              <a:defRPr lang="en-US" sz="1200" kern="1200" dirty="0">
+                <a:solidFill>
+                  <a:schemeClr val="tx1"/>
+                </a:solidFill>
+                <a:latin typeface="맑은 고딕" panose="020B0503020000020004" pitchFamily="50" charset="-127"/>
+                <a:ea typeface="맑은 고딕" panose="020B0503020000020004" pitchFamily="50" charset="-127"/>
+                <a:cs typeface="+mn-cs"/>
+              </a:defRPr>
+            </a:lvl1pPr>
+            <a:lvl2pPr marL="228600" indent="-228600" algn="l" defTabSz="914400" rtl="0" eaLnBrk="1" latinLnBrk="1" hangingPunct="1">
+              <a:lnSpc>
+                <a:spcPct val="150000"/>
+              </a:lnSpc>
+              <a:spcBef>
+                <a:spcPts val="1000"/>
+              </a:spcBef>
+              <a:spcAft>
+                <a:spcPts val="1200"/>
+              </a:spcAft>
+              <a:buFont typeface="Arial" panose="020B0604020202020204" pitchFamily="34" charset="0"/>
+              <a:buChar char="•"/>
+              <a:defRPr lang="en-US" sz="1200" kern="1200" dirty="0">
+                <a:solidFill>
+                  <a:schemeClr val="tx1"/>
+                </a:solidFill>
+                <a:latin typeface="맑은 고딕" panose="020B0503020000020004" pitchFamily="50" charset="-127"/>
+                <a:ea typeface="맑은 고딕" panose="020B0503020000020004" pitchFamily="50" charset="-127"/>
+                <a:cs typeface="+mn-cs"/>
+              </a:defRPr>
+            </a:lvl2pPr>
+            <a:lvl3pPr marL="685800" indent="-228600" algn="l" defTabSz="914400" rtl="0" eaLnBrk="1" latinLnBrk="1" hangingPunct="1">
+              <a:lnSpc>
+                <a:spcPct val="150000"/>
+              </a:lnSpc>
+              <a:spcBef>
+                <a:spcPts val="1000"/>
+              </a:spcBef>
+              <a:spcAft>
+                <a:spcPts val="1200"/>
+              </a:spcAft>
+              <a:buFont typeface="Arial" panose="020B0604020202020204" pitchFamily="34" charset="0"/>
+              <a:buChar char="•"/>
+              <a:defRPr lang="en-US" sz="1200" kern="1200" dirty="0">
+                <a:solidFill>
+                  <a:schemeClr val="tx1"/>
+                </a:solidFill>
+                <a:latin typeface="맑은 고딕" panose="020B0503020000020004" pitchFamily="50" charset="-127"/>
+                <a:ea typeface="맑은 고딕" panose="020B0503020000020004" pitchFamily="50" charset="-127"/>
+                <a:cs typeface="+mn-cs"/>
+              </a:defRPr>
+            </a:lvl3pPr>
+            <a:lvl4pPr marL="1143000" indent="-228600" algn="l" defTabSz="914400" rtl="0" eaLnBrk="1" latinLnBrk="1" hangingPunct="1">
+              <a:lnSpc>
+                <a:spcPct val="150000"/>
+              </a:lnSpc>
+              <a:spcBef>
+                <a:spcPts val="1000"/>
+              </a:spcBef>
+              <a:spcAft>
+                <a:spcPts val="1200"/>
+              </a:spcAft>
+              <a:buFont typeface="Arial" panose="020B0604020202020204" pitchFamily="34" charset="0"/>
+              <a:buChar char="•"/>
+              <a:defRPr lang="en-US" sz="1200" kern="1200" dirty="0" smtClean="0">
+                <a:solidFill>
+                  <a:schemeClr val="tx1"/>
+                </a:solidFill>
+                <a:latin typeface="맑은 고딕" panose="020B0503020000020004" pitchFamily="50" charset="-127"/>
+                <a:ea typeface="맑은 고딕" panose="020B0503020000020004" pitchFamily="50" charset="-127"/>
+                <a:cs typeface="+mn-cs"/>
+              </a:defRPr>
+            </a:lvl4pPr>
+            <a:lvl5pPr marL="1600200" indent="-228600" algn="l" defTabSz="914400" rtl="0" eaLnBrk="1" latinLnBrk="1" hangingPunct="1">
+              <a:lnSpc>
+                <a:spcPct val="150000"/>
+              </a:lnSpc>
+              <a:spcBef>
+                <a:spcPts val="1000"/>
+              </a:spcBef>
+              <a:spcAft>
+                <a:spcPts val="1200"/>
+              </a:spcAft>
+              <a:buFont typeface="Arial" panose="020B0604020202020204" pitchFamily="34" charset="0"/>
+              <a:buChar char="•"/>
+              <a:defRPr lang="en-US" sz="1200" kern="1200" dirty="0" smtClean="0">
+                <a:solidFill>
+                  <a:schemeClr val="tx1"/>
+                </a:solidFill>
+                <a:latin typeface="맑은 고딕" panose="020B0503020000020004" pitchFamily="50" charset="-127"/>
+                <a:ea typeface="맑은 고딕" panose="020B0503020000020004" pitchFamily="50" charset="-127"/>
+                <a:cs typeface="+mn-cs"/>
+              </a:defRPr>
+            </a:lvl5pPr>
+            <a:lvl6pPr marL="2057400" indent="-228600" algn="l" defTabSz="914400" rtl="0" eaLnBrk="1" latinLnBrk="1" hangingPunct="1">
+              <a:lnSpc>
+                <a:spcPct val="150000"/>
+              </a:lnSpc>
+              <a:spcBef>
+                <a:spcPts val="1000"/>
+              </a:spcBef>
+              <a:spcAft>
+                <a:spcPts val="1200"/>
+              </a:spcAft>
+              <a:buFont typeface="Arial" panose="020B0604020202020204" pitchFamily="34" charset="0"/>
+              <a:buChar char="•"/>
+              <a:defRPr lang="en-US" sz="1200" kern="1200" dirty="0" smtClean="0">
+                <a:solidFill>
+                  <a:schemeClr val="tx1"/>
+                </a:solidFill>
+                <a:latin typeface="+mn-lt"/>
+                <a:ea typeface="+mn-ea"/>
+                <a:cs typeface="+mn-cs"/>
+              </a:defRPr>
+            </a:lvl6pPr>
+            <a:lvl7pPr marL="2514600" indent="-228600" algn="l" defTabSz="914400" rtl="0" eaLnBrk="1" latinLnBrk="1" hangingPunct="1">
+              <a:lnSpc>
+                <a:spcPct val="150000"/>
+              </a:lnSpc>
+              <a:spcBef>
+                <a:spcPts val="1000"/>
+              </a:spcBef>
+              <a:spcAft>
+                <a:spcPts val="1200"/>
+              </a:spcAft>
+              <a:buFont typeface="Arial" panose="020B0604020202020204" pitchFamily="34" charset="0"/>
+              <a:buChar char="•"/>
+              <a:defRPr lang="en-US" sz="1200" kern="1200" dirty="0" smtClean="0">
+                <a:solidFill>
+                  <a:schemeClr val="tx1"/>
+                </a:solidFill>
+                <a:latin typeface="+mn-lt"/>
+                <a:ea typeface="+mn-ea"/>
+                <a:cs typeface="+mn-cs"/>
+              </a:defRPr>
+            </a:lvl7pPr>
+            <a:lvl8pPr marL="2971800" indent="-228600" algn="l" defTabSz="914400" rtl="0" eaLnBrk="1" latinLnBrk="1" hangingPunct="1">
+              <a:lnSpc>
+                <a:spcPct val="150000"/>
+              </a:lnSpc>
+              <a:spcBef>
+                <a:spcPts val="1000"/>
+              </a:spcBef>
+              <a:spcAft>
+                <a:spcPts val="1200"/>
+              </a:spcAft>
+              <a:buFont typeface="Arial" panose="020B0604020202020204" pitchFamily="34" charset="0"/>
+              <a:buChar char="•"/>
+              <a:defRPr lang="en-US" sz="1200" kern="1200" dirty="0" smtClean="0">
+                <a:solidFill>
+                  <a:schemeClr val="tx1"/>
+                </a:solidFill>
+                <a:latin typeface="+mn-lt"/>
+                <a:ea typeface="+mn-ea"/>
+                <a:cs typeface="+mn-cs"/>
+              </a:defRPr>
+            </a:lvl8pPr>
+            <a:lvl9pPr marL="3429000" indent="-228600" algn="l" defTabSz="914400" rtl="0" eaLnBrk="1" latinLnBrk="1" hangingPunct="1">
+              <a:lnSpc>
+                <a:spcPct val="90000"/>
+              </a:lnSpc>
+              <a:spcBef>
+                <a:spcPct val="30000"/>
+              </a:spcBef>
+              <a:buFont typeface="Arial" panose="020B0604020202020204" pitchFamily="34" charset="0"/>
+              <a:buNone/>
+              <a:defRPr sz="1200" kern="1200">
+                <a:solidFill>
+                  <a:schemeClr val="tx1"/>
+                </a:solidFill>
+                <a:latin typeface="+mn-lt"/>
+                <a:ea typeface="+mn-ea"/>
+                <a:cs typeface="+mn-cs"/>
+              </a:defRPr>
+            </a:lvl9pPr>
+          </a:lstStyle>
+          <a:p>
+            <a:r>
+              <a:rPr lang="en-US" altLang="ko-KR" sz="2400" dirty="0">
+                <a:solidFill>
+                  <a:schemeClr val="bg1"/>
+                </a:solidFill>
+                <a:latin typeface="D2Coding" panose="020B0609020101020101" pitchFamily="49" charset="-127"/>
+                <a:ea typeface="D2Coding" panose="020B0609020101020101" pitchFamily="49" charset="-127"/>
+              </a:rPr>
+              <a:t>2026 Fall</a:t>
+            </a:r>
+          </a:p>
+          <a:p>
+            <a:r>
+              <a:rPr lang="ko-KR" altLang="en-US" sz="2400" dirty="0" err="1">
+                <a:solidFill>
+                  <a:schemeClr val="bg1"/>
+                </a:solidFill>
+                <a:latin typeface="D2Coding" panose="020B0609020101020101" pitchFamily="49" charset="-127"/>
+                <a:ea typeface="D2Coding" panose="020B0609020101020101" pitchFamily="49" charset="-127"/>
+              </a:rPr>
+              <a:t>조상구교수</a:t>
+            </a:r>
+            <a:endParaRPr lang="en-US" altLang="ko-KR" sz="2400" dirty="0">
+              <a:solidFill>
+                <a:schemeClr val="bg1"/>
+              </a:solidFill>
+              <a:latin typeface="D2Coding" panose="020B0609020101020101" pitchFamily="49" charset="-127"/>
+              <a:ea typeface="D2Coding" panose="020B0609020101020101" pitchFamily="49" charset="-127"/>
+            </a:endParaRPr>
+          </a:p>
+        </p:txBody>
+      </p:sp>
+    </p:spTree>
+    <p:extLst>
+      <p:ext uri="{BB962C8B-B14F-4D97-AF65-F5344CB8AC3E}">
+        <p14:creationId xmlns:p14="http://schemas.microsoft.com/office/powerpoint/2010/main" val="2117542224"/>
+      </p:ext>
+    </p:extLst>
+  </p:cSld>
+  <p:clrMapOvr>
+    <a:masterClrMapping/>
+  </p:clrMapOvr>
+</p:sld>
+</file>
+
+<file path=ppt/slides/slide12.xml><?xml version="1.0" encoding="utf-8"?>
+<p:sld xmlns:a="http://schemas.openxmlformats.org/drawingml/2006/main" xmlns:r="http://schemas.openxmlformats.org/officeDocument/2006/relationships" xmlns:p="http://schemas.openxmlformats.org/presentationml/2006/main">
+  <p:cSld>
+    <p:spTree>
+      <p:nvGrpSpPr>
+        <p:cNvPr id="1" name="">
+          <a:extLst>
+            <a:ext uri="{FF2B5EF4-FFF2-40B4-BE49-F238E27FC236}">
+              <a16:creationId xmlns:a16="http://schemas.microsoft.com/office/drawing/2014/main" id="{193D32C9-8831-7BD4-9DD2-7AACBD37C5DF}"/>
+            </a:ext>
+          </a:extLst>
+        </p:cNvPr>
+        <p:cNvGrpSpPr/>
+        <p:nvPr/>
+      </p:nvGrpSpPr>
+      <p:grpSpPr>
+        <a:xfrm>
+          <a:off x="0" y="0"/>
+          <a:ext cx="0" cy="0"/>
+          <a:chOff x="0" y="0"/>
+          <a:chExt cx="0" cy="0"/>
+        </a:xfrm>
+      </p:grpSpPr>
+      <p:sp>
+        <p:nvSpPr>
+          <p:cNvPr id="3" name="제목 1">
+            <a:extLst>
+              <a:ext uri="{FF2B5EF4-FFF2-40B4-BE49-F238E27FC236}">
+                <a16:creationId xmlns:a16="http://schemas.microsoft.com/office/drawing/2014/main" id="{C8B4136D-BB87-5441-BE89-2E19A00EAA1C}"/>
+              </a:ext>
+            </a:extLst>
+          </p:cNvPr>
+          <p:cNvSpPr txBox="1">
+            <a:spLocks/>
+          </p:cNvSpPr>
+          <p:nvPr/>
+        </p:nvSpPr>
+        <p:spPr>
+          <a:xfrm>
+            <a:off x="475645" y="481983"/>
+            <a:ext cx="10353762" cy="766439"/>
+          </a:xfrm>
+          <a:prstGeom prst="rect">
+            <a:avLst/>
+          </a:prstGeom>
+        </p:spPr>
+        <p:txBody>
+          <a:bodyPr vert="horz" lIns="91440" tIns="45720" rIns="91440" bIns="45720" rtlCol="0" anchor="ctr">
+            <a:normAutofit/>
+          </a:bodyPr>
+          <a:lstStyle>
+            <a:lvl1pPr algn="ctr" defTabSz="914400" rtl="0" eaLnBrk="1" latinLnBrk="1" hangingPunct="1">
+              <a:lnSpc>
+                <a:spcPct val="90000"/>
+              </a:lnSpc>
+              <a:spcBef>
+                <a:spcPct val="0"/>
+              </a:spcBef>
+              <a:buNone/>
+              <a:defRPr sz="3200" kern="1200" cap="all" baseline="0">
+                <a:solidFill>
+                  <a:schemeClr val="tx1"/>
+                </a:solidFill>
+                <a:effectLst/>
+                <a:latin typeface="Batang" panose="02030600000101010101" pitchFamily="18" charset="-127"/>
+                <a:ea typeface="Batang" panose="02030600000101010101" pitchFamily="18" charset="-127"/>
+                <a:cs typeface="+mj-cs"/>
+              </a:defRPr>
+            </a:lvl1pPr>
+          </a:lstStyle>
+          <a:p>
+            <a:pPr algn="l"/>
+            <a:r>
+              <a:rPr lang="en-US" altLang="ko-KR" sz="2800" cap="none" dirty="0">
+                <a:solidFill>
+                  <a:schemeClr val="bg2">
+                    <a:lumMod val="25000"/>
+                  </a:schemeClr>
+                </a:solidFill>
+                <a:latin typeface="D2Coding" panose="020B0609020101020101" pitchFamily="49" charset="-127"/>
+                <a:ea typeface="D2Coding" panose="020B0609020101020101" pitchFamily="49" charset="-127"/>
+                <a:cs typeface="Segoe UI Light" panose="020B0502040204020203" pitchFamily="34" charset="0"/>
+              </a:rPr>
+              <a:t>Readme.md</a:t>
+            </a:r>
+            <a:endParaRPr lang="ko-KR" altLang="en-US" sz="2800" cap="none" dirty="0">
+              <a:solidFill>
+                <a:schemeClr val="bg2">
+                  <a:lumMod val="25000"/>
+                </a:schemeClr>
+              </a:solidFill>
+              <a:latin typeface="D2Coding" panose="020B0609020101020101" pitchFamily="49" charset="-127"/>
+              <a:ea typeface="D2Coding" panose="020B0609020101020101" pitchFamily="49" charset="-127"/>
+              <a:cs typeface="Segoe UI Light" panose="020B0502040204020203" pitchFamily="34" charset="0"/>
+            </a:endParaRPr>
+          </a:p>
+        </p:txBody>
+      </p:sp>
+      <p:sp>
+        <p:nvSpPr>
+          <p:cNvPr id="8" name="TextBox 7">
+            <a:extLst>
+              <a:ext uri="{FF2B5EF4-FFF2-40B4-BE49-F238E27FC236}">
+                <a16:creationId xmlns:a16="http://schemas.microsoft.com/office/drawing/2014/main" id="{F5041BF8-57BD-FF6A-26BC-9BF604EA4BCD}"/>
+              </a:ext>
+            </a:extLst>
+          </p:cNvPr>
+          <p:cNvSpPr txBox="1"/>
+          <p:nvPr/>
+        </p:nvSpPr>
+        <p:spPr>
+          <a:xfrm>
+            <a:off x="744020" y="3244334"/>
+            <a:ext cx="184731" cy="369332"/>
+          </a:xfrm>
+          <a:prstGeom prst="rect">
+            <a:avLst/>
+          </a:prstGeom>
+          <a:noFill/>
+        </p:spPr>
+        <p:txBody>
+          <a:bodyPr wrap="none" rtlCol="0">
+            <a:spAutoFit/>
+          </a:bodyPr>
+          <a:lstStyle/>
+          <a:p>
+            <a:endParaRPr lang="ko-KR" altLang="en-US" dirty="0">
+              <a:solidFill>
+                <a:schemeClr val="accent5"/>
+              </a:solidFill>
+              <a:latin typeface="D2Coding" panose="020B0609020101020101" pitchFamily="49" charset="-127"/>
+              <a:ea typeface="D2Coding" panose="020B0609020101020101" pitchFamily="49" charset="-127"/>
+            </a:endParaRPr>
+          </a:p>
+        </p:txBody>
+      </p:sp>
+      <p:sp>
+        <p:nvSpPr>
+          <p:cNvPr id="2" name="슬라이드 번호 개체 틀 3">
+            <a:extLst>
+              <a:ext uri="{FF2B5EF4-FFF2-40B4-BE49-F238E27FC236}">
+                <a16:creationId xmlns:a16="http://schemas.microsoft.com/office/drawing/2014/main" id="{B2919CB0-5F55-77BF-0798-AB95E32044FF}"/>
+              </a:ext>
+            </a:extLst>
+          </p:cNvPr>
+          <p:cNvSpPr txBox="1">
+            <a:spLocks/>
+          </p:cNvSpPr>
+          <p:nvPr/>
+        </p:nvSpPr>
+        <p:spPr>
+          <a:xfrm>
+            <a:off x="11180761" y="299420"/>
+            <a:ext cx="753545" cy="365125"/>
+          </a:xfrm>
+          <a:prstGeom prst="rect">
+            <a:avLst/>
+          </a:prstGeom>
+        </p:spPr>
+        <p:txBody>
+          <a:bodyPr vert="horz" lIns="91440" tIns="45720" rIns="91440" bIns="45720" rtlCol="0" anchor="ctr"/>
+          <a:lstStyle>
+            <a:defPPr rtl="0">
+              <a:defRPr lang="ko-KR"/>
+            </a:defPPr>
+            <a:lvl1pPr marL="0" algn="r" defTabSz="914400" rtl="0" eaLnBrk="1" latinLnBrk="0" hangingPunct="1">
+              <a:defRPr sz="1200" kern="1200" baseline="0">
+                <a:solidFill>
+                  <a:schemeClr val="tx1">
+                    <a:lumMod val="65000"/>
+                    <a:lumOff val="35000"/>
+                  </a:schemeClr>
+                </a:solidFill>
+                <a:latin typeface="맑은 고딕" panose="020B0503020000020004" pitchFamily="50" charset="-127"/>
+                <a:ea typeface="맑은 고딕" panose="020B0503020000020004" pitchFamily="50" charset="-127"/>
+                <a:cs typeface="+mn-cs"/>
+              </a:defRPr>
+            </a:lvl1pPr>
+            <a:lvl2pPr marL="457200" algn="l" defTabSz="914400" rtl="0" eaLnBrk="1" latinLnBrk="0" hangingPunct="1">
+              <a:defRPr sz="1800" kern="1200">
+                <a:solidFill>
+                  <a:schemeClr val="tx1"/>
+                </a:solidFill>
+                <a:latin typeface="+mn-lt"/>
+                <a:ea typeface="+mn-ea"/>
+                <a:cs typeface="+mn-cs"/>
+              </a:defRPr>
+            </a:lvl2pPr>
+            <a:lvl3pPr marL="914400" algn="l" defTabSz="914400" rtl="0" eaLnBrk="1" latinLnBrk="0" hangingPunct="1">
+              <a:defRPr sz="1800" kern="1200">
+                <a:solidFill>
+                  <a:schemeClr val="tx1"/>
+                </a:solidFill>
+                <a:latin typeface="+mn-lt"/>
+                <a:ea typeface="+mn-ea"/>
+                <a:cs typeface="+mn-cs"/>
+              </a:defRPr>
+            </a:lvl3pPr>
+            <a:lvl4pPr marL="1371600" algn="l" defTabSz="914400" rtl="0" eaLnBrk="1" latinLnBrk="0" hangingPunct="1">
+              <a:defRPr sz="1800" kern="1200">
+                <a:solidFill>
+                  <a:schemeClr val="tx1"/>
+                </a:solidFill>
+                <a:latin typeface="+mn-lt"/>
+                <a:ea typeface="+mn-ea"/>
+                <a:cs typeface="+mn-cs"/>
+              </a:defRPr>
+            </a:lvl4pPr>
+            <a:lvl5pPr marL="1828800" algn="l" defTabSz="914400" rtl="0" eaLnBrk="1" latinLnBrk="0" hangingPunct="1">
+              <a:defRPr sz="1800" kern="1200">
+                <a:solidFill>
+                  <a:schemeClr val="tx1"/>
+                </a:solidFill>
+                <a:latin typeface="+mn-lt"/>
+                <a:ea typeface="+mn-ea"/>
+                <a:cs typeface="+mn-cs"/>
+              </a:defRPr>
+            </a:lvl5pPr>
+            <a:lvl6pPr marL="2286000" algn="l" defTabSz="914400" rtl="0" eaLnBrk="1" latinLnBrk="0" hangingPunct="1">
+              <a:defRPr sz="1800" kern="1200">
+                <a:solidFill>
+                  <a:schemeClr val="tx1"/>
+                </a:solidFill>
+                <a:latin typeface="+mn-lt"/>
+                <a:ea typeface="+mn-ea"/>
+                <a:cs typeface="+mn-cs"/>
+              </a:defRPr>
+            </a:lvl6pPr>
+            <a:lvl7pPr marL="2743200" algn="l" defTabSz="914400" rtl="0" eaLnBrk="1" latinLnBrk="0" hangingPunct="1">
+              <a:defRPr sz="1800" kern="1200">
+                <a:solidFill>
+                  <a:schemeClr val="tx1"/>
+                </a:solidFill>
+                <a:latin typeface="+mn-lt"/>
+                <a:ea typeface="+mn-ea"/>
+                <a:cs typeface="+mn-cs"/>
+              </a:defRPr>
+            </a:lvl7pPr>
+            <a:lvl8pPr marL="3200400" algn="l" defTabSz="914400" rtl="0" eaLnBrk="1" latinLnBrk="0" hangingPunct="1">
+              <a:defRPr sz="1800" kern="1200">
+                <a:solidFill>
+                  <a:schemeClr val="tx1"/>
+                </a:solidFill>
+                <a:latin typeface="+mn-lt"/>
+                <a:ea typeface="+mn-ea"/>
+                <a:cs typeface="+mn-cs"/>
+              </a:defRPr>
+            </a:lvl8pPr>
+            <a:lvl9pPr marL="3657600" algn="l" defTabSz="914400" rtl="0" eaLnBrk="1" latinLnBrk="0" hangingPunct="1">
+              <a:defRPr sz="1800" kern="1200">
+                <a:solidFill>
+                  <a:schemeClr val="tx1"/>
+                </a:solidFill>
+                <a:latin typeface="+mn-lt"/>
+                <a:ea typeface="+mn-ea"/>
+                <a:cs typeface="+mn-cs"/>
+              </a:defRPr>
+            </a:lvl9pPr>
+          </a:lstStyle>
+          <a:p>
+            <a:fld id="{D57F1E4F-1CFF-5643-939E-217C01CDF565}" type="slidenum">
+              <a:rPr lang="en-US" b="1" smtClean="0">
+                <a:latin typeface="Segoe UI Emoji" panose="020B0502040204020203" pitchFamily="34" charset="0"/>
+                <a:ea typeface="Segoe UI Emoji" panose="020B0502040204020203" pitchFamily="34" charset="0"/>
+              </a:rPr>
+              <a:pPr/>
+              <a:t>12</a:t>
+            </a:fld>
+            <a:endParaRPr lang="en-US" b="1" dirty="0">
+              <a:latin typeface="Segoe UI Emoji" panose="020B0502040204020203" pitchFamily="34" charset="0"/>
+              <a:ea typeface="Segoe UI Emoji" panose="020B0502040204020203" pitchFamily="34" charset="0"/>
+            </a:endParaRPr>
+          </a:p>
+        </p:txBody>
+      </p:sp>
+      <p:pic>
+        <p:nvPicPr>
+          <p:cNvPr id="10" name="그래픽 9" descr="수영">
+            <a:extLst>
+              <a:ext uri="{FF2B5EF4-FFF2-40B4-BE49-F238E27FC236}">
+                <a16:creationId xmlns:a16="http://schemas.microsoft.com/office/drawing/2014/main" id="{E56311E5-7256-D3E9-E789-358C2B19FA98}"/>
+              </a:ext>
+            </a:extLst>
+          </p:cNvPr>
+          <p:cNvPicPr>
+            <a:picLocks noChangeAspect="1"/>
+          </p:cNvPicPr>
+          <p:nvPr/>
+        </p:nvPicPr>
+        <p:blipFill>
+          <a:blip r:embed="rId2">
+            <a:extLst>
+              <a:ext uri="{96DAC541-7B7A-43D3-8B79-37D633B846F1}">
+                <asvg:svgBlip xmlns:asvg="http://schemas.microsoft.com/office/drawing/2016/SVG/main" r:embed="rId3"/>
+              </a:ext>
+            </a:extLst>
+          </a:blip>
+          <a:stretch>
+            <a:fillRect/>
+          </a:stretch>
+        </p:blipFill>
+        <p:spPr>
+          <a:xfrm>
+            <a:off x="10685980" y="373930"/>
+            <a:ext cx="914400" cy="914400"/>
+          </a:xfrm>
+          <a:prstGeom prst="rect">
+            <a:avLst/>
+          </a:prstGeom>
+        </p:spPr>
+      </p:pic>
+      <p:sp>
+        <p:nvSpPr>
+          <p:cNvPr id="5" name="Rectangle 2">
+            <a:extLst>
+              <a:ext uri="{FF2B5EF4-FFF2-40B4-BE49-F238E27FC236}">
+                <a16:creationId xmlns:a16="http://schemas.microsoft.com/office/drawing/2014/main" id="{9D2E4FE6-88CB-4B28-45F1-11126F9C14A1}"/>
+              </a:ext>
+            </a:extLst>
+          </p:cNvPr>
+          <p:cNvSpPr>
+            <a:spLocks noChangeArrowheads="1"/>
+          </p:cNvSpPr>
+          <p:nvPr/>
+        </p:nvSpPr>
+        <p:spPr bwMode="auto">
+          <a:xfrm>
+            <a:off x="608995" y="2210514"/>
+            <a:ext cx="11154380" cy="3332322"/>
+          </a:xfrm>
+          <a:prstGeom prst="rect">
+            <a:avLst/>
+          </a:prstGeom>
+          <a:noFill/>
+          <a:ln>
+            <a:noFill/>
+          </a:ln>
+          <a:effectLst/>
+          <a:extLst>
+            <a:ext uri="{909E8E84-426E-40DD-AFC4-6F175D3DCCD1}">
+              <a14:hiddenFill xmlns:a14="http://schemas.microsoft.com/office/drawing/2010/main">
+                <a:solidFill>
+                  <a:schemeClr val="accent1"/>
+                </a:solidFill>
+              </a14:hiddenFill>
+            </a:ext>
+            <a:ext uri="{91240B29-F687-4F45-9708-019B960494DF}">
+              <a14:hiddenLine xmlns:a14="http://schemas.microsoft.com/office/drawing/2010/main" w="9525">
+                <a:solidFill>
+                  <a:schemeClr val="tx1"/>
+                </a:solidFill>
+                <a:miter lim="800000"/>
+                <a:headEnd/>
+                <a:tailEnd/>
+              </a14:hiddenLine>
+            </a:ext>
+            <a:ext uri="{AF507438-7753-43E0-B8FC-AC1667EBCBE1}">
+              <a14:hiddenEffects xmlns:a14="http://schemas.microsoft.com/office/drawing/2010/main">
+                <a:effectLst>
+                  <a:outerShdw dist="35921" dir="2700000" algn="ctr" rotWithShape="0">
+                    <a:schemeClr val="bg2"/>
+                  </a:outerShdw>
+                </a:effectLst>
+              </a14:hiddenEffects>
+            </a:ext>
+          </a:extLst>
+        </p:spPr>
+        <p:txBody>
+          <a:bodyPr vert="horz" wrap="square" lIns="91440" tIns="0" rIns="91440" bIns="45720" numCol="1" anchor="ctr" anchorCtr="0" compatLnSpc="1">
+            <a:prstTxWarp prst="textNoShape">
+              <a:avLst/>
+            </a:prstTxWarp>
+            <a:spAutoFit/>
+          </a:bodyPr>
+          <a:lstStyle/>
+          <a:p>
+            <a:pPr marL="342900" marR="0" lvl="0" indent="-342900" algn="l" defTabSz="914400" rtl="0" eaLnBrk="0" fontAlgn="base" latinLnBrk="0" hangingPunct="0">
+              <a:lnSpc>
+                <a:spcPct val="150000"/>
+              </a:lnSpc>
+              <a:spcBef>
+                <a:spcPct val="0"/>
+              </a:spcBef>
+              <a:spcAft>
+                <a:spcPct val="0"/>
+              </a:spcAft>
+              <a:buClrTx/>
+              <a:buSzTx/>
+              <a:buFont typeface="Wingdings" panose="05000000000000000000" pitchFamily="2" charset="2"/>
+              <a:buChar char="v"/>
+              <a:tabLst/>
+            </a:pPr>
+            <a:r>
+              <a:rPr kumimoji="0" lang="ko-KR" altLang="ko-KR" sz="1600" i="0" u="none" strike="noStrike" cap="none" normalizeH="0" baseline="0" dirty="0">
+                <a:ln>
+                  <a:noFill/>
+                </a:ln>
+                <a:solidFill>
+                  <a:schemeClr val="tx1"/>
+                </a:solidFill>
+                <a:effectLst/>
+                <a:latin typeface="D2Coding" panose="020B0609020101020101" pitchFamily="49" charset="-127"/>
+                <a:ea typeface="D2Coding" panose="020B0609020101020101" pitchFamily="49" charset="-127"/>
+              </a:rPr>
+              <a:t>컨테이너 실행 (</a:t>
+            </a:r>
+            <a:r>
+              <a:rPr kumimoji="0" lang="ko-KR" altLang="ko-KR" sz="1600" i="0" u="none" strike="noStrike" cap="none" normalizeH="0" baseline="0" dirty="0" err="1">
+                <a:ln>
+                  <a:noFill/>
+                </a:ln>
+                <a:solidFill>
+                  <a:schemeClr val="tx1"/>
+                </a:solidFill>
+                <a:effectLst/>
+                <a:latin typeface="D2Coding" panose="020B0609020101020101" pitchFamily="49" charset="-127"/>
+                <a:ea typeface="D2Coding" panose="020B0609020101020101" pitchFamily="49" charset="-127"/>
+              </a:rPr>
+              <a:t>docker</a:t>
+            </a:r>
+            <a:r>
+              <a:rPr kumimoji="0" lang="ko-KR" altLang="ko-KR" sz="1600" i="0" u="none" strike="noStrike" cap="none" normalizeH="0" baseline="0" dirty="0">
+                <a:ln>
+                  <a:noFill/>
+                </a:ln>
+                <a:solidFill>
+                  <a:schemeClr val="tx1"/>
+                </a:solidFill>
+                <a:effectLst/>
+                <a:latin typeface="D2Coding" panose="020B0609020101020101" pitchFamily="49" charset="-127"/>
+                <a:ea typeface="D2Coding" panose="020B0609020101020101" pitchFamily="49" charset="-127"/>
+              </a:rPr>
+              <a:t> </a:t>
+            </a:r>
+            <a:r>
+              <a:rPr kumimoji="0" lang="ko-KR" altLang="ko-KR" sz="1600" i="0" u="none" strike="noStrike" cap="none" normalizeH="0" baseline="0" dirty="0" err="1">
+                <a:ln>
+                  <a:noFill/>
+                </a:ln>
+                <a:solidFill>
+                  <a:schemeClr val="tx1"/>
+                </a:solidFill>
+                <a:effectLst/>
+                <a:latin typeface="D2Coding" panose="020B0609020101020101" pitchFamily="49" charset="-127"/>
+                <a:ea typeface="D2Coding" panose="020B0609020101020101" pitchFamily="49" charset="-127"/>
+              </a:rPr>
+              <a:t>run</a:t>
+            </a:r>
+            <a:r>
+              <a:rPr kumimoji="0" lang="ko-KR" altLang="ko-KR" sz="1600" i="0" u="none" strike="noStrike" cap="none" normalizeH="0" baseline="0" dirty="0">
+                <a:ln>
+                  <a:noFill/>
+                </a:ln>
+                <a:solidFill>
+                  <a:schemeClr val="tx1"/>
+                </a:solidFill>
+                <a:effectLst/>
+                <a:latin typeface="D2Coding" panose="020B0609020101020101" pitchFamily="49" charset="-127"/>
+                <a:ea typeface="D2Coding" panose="020B0609020101020101" pitchFamily="49" charset="-127"/>
+              </a:rPr>
+              <a:t>)</a:t>
+            </a:r>
+            <a:endParaRPr lang="en-US" altLang="ko-KR" sz="1600" dirty="0">
+              <a:latin typeface="D2Coding" panose="020B0609020101020101" pitchFamily="49" charset="-127"/>
+              <a:ea typeface="D2Coding" panose="020B0609020101020101" pitchFamily="49" charset="-127"/>
+            </a:endParaRPr>
+          </a:p>
+          <a:p>
+            <a:pPr marL="800100" lvl="1" indent="-342900" eaLnBrk="0" fontAlgn="base" hangingPunct="0">
+              <a:lnSpc>
+                <a:spcPct val="150000"/>
+              </a:lnSpc>
+              <a:spcBef>
+                <a:spcPct val="0"/>
+              </a:spcBef>
+              <a:spcAft>
+                <a:spcPct val="0"/>
+              </a:spcAft>
+              <a:buFont typeface="Wingdings" panose="05000000000000000000" pitchFamily="2" charset="2"/>
+              <a:buChar char="v"/>
+            </a:pPr>
+            <a:r>
+              <a:rPr kumimoji="0" lang="ko-KR" altLang="ko-KR" sz="1600" i="0" u="none" strike="noStrike" cap="none" normalizeH="0" baseline="0" dirty="0" err="1">
+                <a:ln>
+                  <a:noFill/>
+                </a:ln>
+                <a:solidFill>
+                  <a:schemeClr val="tx1"/>
+                </a:solidFill>
+                <a:effectLst/>
+                <a:latin typeface="D2Coding" panose="020B0609020101020101" pitchFamily="49" charset="-127"/>
+                <a:ea typeface="D2Coding" panose="020B0609020101020101" pitchFamily="49" charset="-127"/>
+              </a:rPr>
+              <a:t>docker</a:t>
+            </a:r>
+            <a:r>
+              <a:rPr kumimoji="0" lang="ko-KR" altLang="ko-KR" sz="1600" i="0" u="none" strike="noStrike" cap="none" normalizeH="0" baseline="0" dirty="0">
+                <a:ln>
+                  <a:noFill/>
+                </a:ln>
+                <a:solidFill>
+                  <a:schemeClr val="tx1"/>
+                </a:solidFill>
+                <a:effectLst/>
+                <a:latin typeface="D2Coding" panose="020B0609020101020101" pitchFamily="49" charset="-127"/>
+                <a:ea typeface="D2Coding" panose="020B0609020101020101" pitchFamily="49" charset="-127"/>
+              </a:rPr>
+              <a:t> </a:t>
+            </a:r>
+            <a:r>
+              <a:rPr kumimoji="0" lang="ko-KR" altLang="ko-KR" sz="1600" i="0" u="none" strike="noStrike" cap="none" normalizeH="0" baseline="0" dirty="0" err="1">
+                <a:ln>
+                  <a:noFill/>
+                </a:ln>
+                <a:solidFill>
+                  <a:schemeClr val="tx1"/>
+                </a:solidFill>
+                <a:effectLst/>
+                <a:latin typeface="D2Coding" panose="020B0609020101020101" pitchFamily="49" charset="-127"/>
+                <a:ea typeface="D2Coding" panose="020B0609020101020101" pitchFamily="49" charset="-127"/>
+              </a:rPr>
+              <a:t>run</a:t>
+            </a:r>
+            <a:r>
+              <a:rPr kumimoji="0" lang="ko-KR" altLang="ko-KR" sz="1600" i="0" u="none" strike="noStrike" cap="none" normalizeH="0" baseline="0" dirty="0">
+                <a:ln>
+                  <a:noFill/>
+                </a:ln>
+                <a:solidFill>
+                  <a:schemeClr val="tx1"/>
+                </a:solidFill>
+                <a:effectLst/>
+                <a:latin typeface="D2Coding" panose="020B0609020101020101" pitchFamily="49" charset="-127"/>
+                <a:ea typeface="D2Coding" panose="020B0609020101020101" pitchFamily="49" charset="-127"/>
+              </a:rPr>
+              <a:t> </a:t>
+            </a:r>
+            <a:r>
+              <a:rPr kumimoji="0" lang="ko-KR" altLang="ko-KR" sz="1600" i="0" u="none" strike="noStrike" cap="none" normalizeH="0" baseline="0" dirty="0" err="1">
+                <a:ln>
+                  <a:noFill/>
+                </a:ln>
+                <a:solidFill>
+                  <a:schemeClr val="tx1"/>
+                </a:solidFill>
+                <a:effectLst/>
+                <a:latin typeface="D2Coding" panose="020B0609020101020101" pitchFamily="49" charset="-127"/>
+                <a:ea typeface="D2Coding" panose="020B0609020101020101" pitchFamily="49" charset="-127"/>
+              </a:rPr>
+              <a:t>hello-world</a:t>
+            </a:r>
+            <a:endParaRPr lang="en-US" altLang="ko-KR" sz="1600" dirty="0">
+              <a:latin typeface="D2Coding" panose="020B0609020101020101" pitchFamily="49" charset="-127"/>
+              <a:ea typeface="D2Coding" panose="020B0609020101020101" pitchFamily="49" charset="-127"/>
+            </a:endParaRPr>
+          </a:p>
+          <a:p>
+            <a:pPr marL="800100" lvl="1" indent="-342900" eaLnBrk="0" fontAlgn="base" hangingPunct="0">
+              <a:lnSpc>
+                <a:spcPct val="150000"/>
+              </a:lnSpc>
+              <a:spcBef>
+                <a:spcPct val="0"/>
+              </a:spcBef>
+              <a:spcAft>
+                <a:spcPct val="0"/>
+              </a:spcAft>
+              <a:buFont typeface="Wingdings" panose="05000000000000000000" pitchFamily="2" charset="2"/>
+              <a:buChar char="v"/>
+            </a:pPr>
+            <a:r>
+              <a:rPr kumimoji="0" lang="ko-KR" altLang="ko-KR" sz="1600" i="0" u="none" strike="noStrike" cap="none" normalizeH="0" baseline="0" dirty="0" err="1">
+                <a:ln>
+                  <a:noFill/>
+                </a:ln>
+                <a:solidFill>
+                  <a:schemeClr val="tx1"/>
+                </a:solidFill>
+                <a:effectLst/>
+                <a:latin typeface="D2Coding" panose="020B0609020101020101" pitchFamily="49" charset="-127"/>
+                <a:ea typeface="D2Coding" panose="020B0609020101020101" pitchFamily="49" charset="-127"/>
+              </a:rPr>
+              <a:t>도커</a:t>
+            </a:r>
+            <a:r>
+              <a:rPr kumimoji="0" lang="ko-KR" altLang="ko-KR" sz="1600" i="0" u="none" strike="noStrike" cap="none" normalizeH="0" baseline="0" dirty="0">
+                <a:ln>
+                  <a:noFill/>
+                </a:ln>
+                <a:solidFill>
+                  <a:schemeClr val="tx1"/>
+                </a:solidFill>
+                <a:effectLst/>
+                <a:latin typeface="D2Coding" panose="020B0609020101020101" pitchFamily="49" charset="-127"/>
+                <a:ea typeface="D2Coding" panose="020B0609020101020101" pitchFamily="49" charset="-127"/>
+              </a:rPr>
+              <a:t> 허브에서 이미지 자동 다운로드 </a:t>
+            </a:r>
+            <a:r>
+              <a:rPr lang="en-US" altLang="ko-KR" sz="1600" dirty="0">
+                <a:latin typeface="D2Coding" panose="020B0609020101020101" pitchFamily="49" charset="-127"/>
+                <a:ea typeface="D2Coding" panose="020B0609020101020101" pitchFamily="49" charset="-127"/>
+                <a:sym typeface="Wingdings" panose="05000000000000000000" pitchFamily="2" charset="2"/>
+              </a:rPr>
+              <a:t> </a:t>
+            </a:r>
+            <a:r>
+              <a:rPr kumimoji="0" lang="ko-KR" altLang="ko-KR" sz="1600" i="0" u="none" strike="noStrike" cap="none" normalizeH="0" baseline="0" dirty="0">
+                <a:ln>
+                  <a:noFill/>
+                </a:ln>
+                <a:solidFill>
+                  <a:schemeClr val="tx1"/>
+                </a:solidFill>
+                <a:effectLst/>
+                <a:latin typeface="D2Coding" panose="020B0609020101020101" pitchFamily="49" charset="-127"/>
+                <a:ea typeface="D2Coding" panose="020B0609020101020101" pitchFamily="49" charset="-127"/>
+              </a:rPr>
+              <a:t>컨테이너 생성 </a:t>
+            </a:r>
+            <a:r>
+              <a:rPr kumimoji="0" lang="en-US" altLang="ko-KR" sz="1600" i="0" u="none" strike="noStrike" cap="none" normalizeH="0" baseline="0" dirty="0">
+                <a:ln>
+                  <a:noFill/>
+                </a:ln>
+                <a:solidFill>
+                  <a:schemeClr val="tx1"/>
+                </a:solidFill>
+                <a:effectLst/>
+                <a:latin typeface="D2Coding" panose="020B0609020101020101" pitchFamily="49" charset="-127"/>
+                <a:ea typeface="D2Coding" panose="020B0609020101020101" pitchFamily="49" charset="-127"/>
+                <a:sym typeface="Wingdings" panose="05000000000000000000" pitchFamily="2" charset="2"/>
+              </a:rPr>
+              <a:t> </a:t>
+            </a:r>
+            <a:r>
+              <a:rPr kumimoji="0" lang="ko-KR" altLang="ko-KR" sz="1600" i="0" u="none" strike="noStrike" cap="none" normalizeH="0" baseline="0" dirty="0">
+                <a:ln>
+                  <a:noFill/>
+                </a:ln>
+                <a:solidFill>
+                  <a:schemeClr val="tx1"/>
+                </a:solidFill>
+                <a:effectLst/>
+                <a:latin typeface="D2Coding" panose="020B0609020101020101" pitchFamily="49" charset="-127"/>
+                <a:ea typeface="D2Coding" panose="020B0609020101020101" pitchFamily="49" charset="-127"/>
+              </a:rPr>
+              <a:t>테스트 메시지 출력 후 종료</a:t>
+            </a:r>
+          </a:p>
+          <a:p>
+            <a:pPr marL="342900" marR="0" lvl="0" indent="-342900" algn="l" defTabSz="914400" rtl="0" eaLnBrk="0" fontAlgn="base" latinLnBrk="0" hangingPunct="0">
+              <a:lnSpc>
+                <a:spcPct val="150000"/>
+              </a:lnSpc>
+              <a:spcBef>
+                <a:spcPct val="0"/>
+              </a:spcBef>
+              <a:spcAft>
+                <a:spcPct val="0"/>
+              </a:spcAft>
+              <a:buClrTx/>
+              <a:buSzTx/>
+              <a:buFont typeface="Wingdings" panose="05000000000000000000" pitchFamily="2" charset="2"/>
+              <a:buChar char="v"/>
+              <a:tabLst/>
+            </a:pPr>
+            <a:r>
+              <a:rPr kumimoji="0" lang="ko-KR" altLang="ko-KR" sz="1600" i="0" u="none" strike="noStrike" cap="none" normalizeH="0" baseline="0" dirty="0">
+                <a:ln>
+                  <a:noFill/>
+                </a:ln>
+                <a:solidFill>
+                  <a:schemeClr val="tx1"/>
+                </a:solidFill>
+                <a:effectLst/>
+                <a:latin typeface="D2Coding" panose="020B0609020101020101" pitchFamily="49" charset="-127"/>
+                <a:ea typeface="D2Coding" panose="020B0609020101020101" pitchFamily="49" charset="-127"/>
+              </a:rPr>
+              <a:t>컨테이너 상태 조회</a:t>
+            </a:r>
+          </a:p>
+          <a:p>
+            <a:pPr marL="800100" lvl="1" indent="-342900" eaLnBrk="0" fontAlgn="base" hangingPunct="0">
+              <a:lnSpc>
+                <a:spcPct val="150000"/>
+              </a:lnSpc>
+              <a:spcBef>
+                <a:spcPct val="0"/>
+              </a:spcBef>
+              <a:spcAft>
+                <a:spcPct val="0"/>
+              </a:spcAft>
+              <a:buFont typeface="Wingdings" panose="05000000000000000000" pitchFamily="2" charset="2"/>
+              <a:buChar char="v"/>
+            </a:pPr>
+            <a:r>
+              <a:rPr kumimoji="0" lang="ko-KR" altLang="ko-KR" sz="1600" i="0" u="none" strike="noStrike" cap="none" normalizeH="0" baseline="0" dirty="0" err="1">
+                <a:ln>
+                  <a:noFill/>
+                </a:ln>
+                <a:solidFill>
+                  <a:schemeClr val="tx1"/>
+                </a:solidFill>
+                <a:effectLst/>
+                <a:latin typeface="D2Coding" panose="020B0609020101020101" pitchFamily="49" charset="-127"/>
+                <a:ea typeface="D2Coding" panose="020B0609020101020101" pitchFamily="49" charset="-127"/>
+              </a:rPr>
+              <a:t>docker</a:t>
+            </a:r>
+            <a:r>
+              <a:rPr kumimoji="0" lang="ko-KR" altLang="ko-KR" sz="1600" i="0" u="none" strike="noStrike" cap="none" normalizeH="0" baseline="0" dirty="0">
+                <a:ln>
+                  <a:noFill/>
+                </a:ln>
+                <a:solidFill>
+                  <a:schemeClr val="tx1"/>
+                </a:solidFill>
+                <a:effectLst/>
+                <a:latin typeface="D2Coding" panose="020B0609020101020101" pitchFamily="49" charset="-127"/>
+                <a:ea typeface="D2Coding" panose="020B0609020101020101" pitchFamily="49" charset="-127"/>
+              </a:rPr>
+              <a:t> </a:t>
+            </a:r>
+            <a:r>
+              <a:rPr kumimoji="0" lang="ko-KR" altLang="ko-KR" sz="1600" i="0" u="none" strike="noStrike" cap="none" normalizeH="0" baseline="0" dirty="0" err="1">
+                <a:ln>
+                  <a:noFill/>
+                </a:ln>
+                <a:solidFill>
+                  <a:schemeClr val="tx1"/>
+                </a:solidFill>
+                <a:effectLst/>
+                <a:latin typeface="D2Coding" panose="020B0609020101020101" pitchFamily="49" charset="-127"/>
+                <a:ea typeface="D2Coding" panose="020B0609020101020101" pitchFamily="49" charset="-127"/>
+              </a:rPr>
+              <a:t>ps</a:t>
+            </a:r>
+            <a:r>
+              <a:rPr kumimoji="0" lang="en-US" altLang="ko-KR" sz="1600" i="0" u="none" strike="noStrike" cap="none" normalizeH="0" baseline="0" dirty="0">
+                <a:ln>
+                  <a:noFill/>
+                </a:ln>
+                <a:solidFill>
+                  <a:schemeClr val="tx1"/>
+                </a:solidFill>
+                <a:effectLst/>
+                <a:latin typeface="D2Coding" panose="020B0609020101020101" pitchFamily="49" charset="-127"/>
+                <a:ea typeface="D2Coding" panose="020B0609020101020101" pitchFamily="49" charset="-127"/>
+              </a:rPr>
+              <a:t> : </a:t>
+            </a:r>
+            <a:r>
+              <a:rPr kumimoji="0" lang="ko-KR" altLang="ko-KR" sz="1600" i="0" u="none" strike="noStrike" cap="none" normalizeH="0" baseline="0" dirty="0">
+                <a:ln>
+                  <a:noFill/>
+                </a:ln>
+                <a:solidFill>
+                  <a:schemeClr val="tx1"/>
+                </a:solidFill>
+                <a:effectLst/>
+                <a:latin typeface="D2Coding" panose="020B0609020101020101" pitchFamily="49" charset="-127"/>
+                <a:ea typeface="D2Coding" panose="020B0609020101020101" pitchFamily="49" charset="-127"/>
+              </a:rPr>
+              <a:t>현재 실행 중인 컨테이너 목록 조회</a:t>
+            </a:r>
+          </a:p>
+          <a:p>
+            <a:pPr marL="800100" lvl="1" indent="-342900" eaLnBrk="0" fontAlgn="base" hangingPunct="0">
+              <a:lnSpc>
+                <a:spcPct val="150000"/>
+              </a:lnSpc>
+              <a:spcBef>
+                <a:spcPct val="0"/>
+              </a:spcBef>
+              <a:spcAft>
+                <a:spcPct val="0"/>
+              </a:spcAft>
+              <a:buFont typeface="Wingdings" panose="05000000000000000000" pitchFamily="2" charset="2"/>
+              <a:buChar char="v"/>
+            </a:pPr>
+            <a:r>
+              <a:rPr kumimoji="0" lang="ko-KR" altLang="ko-KR" sz="1600" i="0" u="none" strike="noStrike" cap="none" normalizeH="0" baseline="0" dirty="0" err="1">
+                <a:ln>
+                  <a:noFill/>
+                </a:ln>
+                <a:solidFill>
+                  <a:schemeClr val="tx1"/>
+                </a:solidFill>
+                <a:effectLst/>
+                <a:latin typeface="D2Coding" panose="020B0609020101020101" pitchFamily="49" charset="-127"/>
+                <a:ea typeface="D2Coding" panose="020B0609020101020101" pitchFamily="49" charset="-127"/>
+              </a:rPr>
+              <a:t>docker</a:t>
+            </a:r>
+            <a:r>
+              <a:rPr kumimoji="0" lang="ko-KR" altLang="ko-KR" sz="1600" i="0" u="none" strike="noStrike" cap="none" normalizeH="0" baseline="0" dirty="0">
+                <a:ln>
+                  <a:noFill/>
+                </a:ln>
+                <a:solidFill>
+                  <a:schemeClr val="tx1"/>
+                </a:solidFill>
+                <a:effectLst/>
+                <a:latin typeface="D2Coding" panose="020B0609020101020101" pitchFamily="49" charset="-127"/>
+                <a:ea typeface="D2Coding" panose="020B0609020101020101" pitchFamily="49" charset="-127"/>
+              </a:rPr>
+              <a:t> </a:t>
+            </a:r>
+            <a:r>
+              <a:rPr kumimoji="0" lang="ko-KR" altLang="ko-KR" sz="1600" i="0" u="none" strike="noStrike" cap="none" normalizeH="0" baseline="0" dirty="0" err="1">
+                <a:ln>
+                  <a:noFill/>
+                </a:ln>
+                <a:solidFill>
+                  <a:schemeClr val="tx1"/>
+                </a:solidFill>
+                <a:effectLst/>
+                <a:latin typeface="D2Coding" panose="020B0609020101020101" pitchFamily="49" charset="-127"/>
+                <a:ea typeface="D2Coding" panose="020B0609020101020101" pitchFamily="49" charset="-127"/>
+              </a:rPr>
+              <a:t>ps</a:t>
+            </a:r>
+            <a:r>
+              <a:rPr kumimoji="0" lang="ko-KR" altLang="ko-KR" sz="1600" i="0" u="none" strike="noStrike" cap="none" normalizeH="0" baseline="0" dirty="0">
+                <a:ln>
+                  <a:noFill/>
+                </a:ln>
+                <a:solidFill>
+                  <a:schemeClr val="tx1"/>
+                </a:solidFill>
+                <a:effectLst/>
+                <a:latin typeface="D2Coding" panose="020B0609020101020101" pitchFamily="49" charset="-127"/>
+                <a:ea typeface="D2Coding" panose="020B0609020101020101" pitchFamily="49" charset="-127"/>
+              </a:rPr>
+              <a:t> </a:t>
+            </a:r>
+            <a:r>
+              <a:rPr kumimoji="0" lang="en-US" altLang="ko-KR" sz="1600" i="0" u="none" strike="noStrike" cap="none" normalizeH="0" baseline="0" dirty="0">
+                <a:ln>
+                  <a:noFill/>
+                </a:ln>
+                <a:solidFill>
+                  <a:schemeClr val="tx1"/>
+                </a:solidFill>
+                <a:effectLst/>
+                <a:latin typeface="D2Coding" panose="020B0609020101020101" pitchFamily="49" charset="-127"/>
+                <a:ea typeface="D2Coding" panose="020B0609020101020101" pitchFamily="49" charset="-127"/>
+              </a:rPr>
+              <a:t>–</a:t>
+            </a:r>
+            <a:r>
+              <a:rPr kumimoji="0" lang="ko-KR" altLang="ko-KR" sz="1600" i="0" u="none" strike="noStrike" cap="none" normalizeH="0" baseline="0" dirty="0" err="1">
+                <a:ln>
+                  <a:noFill/>
+                </a:ln>
+                <a:solidFill>
+                  <a:schemeClr val="tx1"/>
+                </a:solidFill>
+                <a:effectLst/>
+                <a:latin typeface="D2Coding" panose="020B0609020101020101" pitchFamily="49" charset="-127"/>
+                <a:ea typeface="D2Coding" panose="020B0609020101020101" pitchFamily="49" charset="-127"/>
+              </a:rPr>
+              <a:t>a</a:t>
+            </a:r>
+            <a:r>
+              <a:rPr kumimoji="0" lang="en-US" altLang="ko-KR" sz="1600" i="0" u="none" strike="noStrike" cap="none" normalizeH="0" baseline="0" dirty="0">
+                <a:ln>
+                  <a:noFill/>
+                </a:ln>
+                <a:solidFill>
+                  <a:schemeClr val="tx1"/>
+                </a:solidFill>
+                <a:effectLst/>
+                <a:latin typeface="D2Coding" panose="020B0609020101020101" pitchFamily="49" charset="-127"/>
+                <a:ea typeface="D2Coding" panose="020B0609020101020101" pitchFamily="49" charset="-127"/>
+              </a:rPr>
+              <a:t> : </a:t>
+            </a:r>
+            <a:r>
+              <a:rPr kumimoji="0" lang="ko-KR" altLang="ko-KR" sz="1600" i="0" u="none" strike="noStrike" cap="none" normalizeH="0" baseline="0" dirty="0">
+                <a:ln>
+                  <a:noFill/>
+                </a:ln>
+                <a:solidFill>
+                  <a:schemeClr val="tx1"/>
+                </a:solidFill>
+                <a:effectLst/>
+                <a:latin typeface="D2Coding" panose="020B0609020101020101" pitchFamily="49" charset="-127"/>
+                <a:ea typeface="D2Coding" panose="020B0609020101020101" pitchFamily="49" charset="-127"/>
+              </a:rPr>
+              <a:t>종료된 컨테이너를 포함한 전체 실행 기록(히스토리) 조회</a:t>
+            </a:r>
+          </a:p>
+          <a:p>
+            <a:pPr marL="342900" marR="0" lvl="0" indent="-342900" algn="l" defTabSz="914400" rtl="0" eaLnBrk="0" fontAlgn="base" latinLnBrk="0" hangingPunct="0">
+              <a:lnSpc>
+                <a:spcPct val="150000"/>
+              </a:lnSpc>
+              <a:spcBef>
+                <a:spcPct val="0"/>
+              </a:spcBef>
+              <a:spcAft>
+                <a:spcPct val="0"/>
+              </a:spcAft>
+              <a:buClrTx/>
+              <a:buSzTx/>
+              <a:buFont typeface="Wingdings" panose="05000000000000000000" pitchFamily="2" charset="2"/>
+              <a:buChar char="v"/>
+              <a:tabLst/>
+            </a:pPr>
+            <a:r>
+              <a:rPr kumimoji="0" lang="ko-KR" altLang="ko-KR" sz="1600" i="0" u="none" strike="noStrike" cap="none" normalizeH="0" baseline="0" dirty="0">
+                <a:ln>
+                  <a:noFill/>
+                </a:ln>
+                <a:solidFill>
+                  <a:schemeClr val="tx1"/>
+                </a:solidFill>
+                <a:effectLst/>
+                <a:latin typeface="D2Coding" panose="020B0609020101020101" pitchFamily="49" charset="-127"/>
+                <a:ea typeface="D2Coding" panose="020B0609020101020101" pitchFamily="49" charset="-127"/>
+              </a:rPr>
+              <a:t>컨테이너 중지 및 정돈</a:t>
+            </a:r>
+          </a:p>
+          <a:p>
+            <a:pPr marL="800100" lvl="1" indent="-342900" eaLnBrk="0" fontAlgn="base" hangingPunct="0">
+              <a:lnSpc>
+                <a:spcPct val="150000"/>
+              </a:lnSpc>
+              <a:spcBef>
+                <a:spcPct val="0"/>
+              </a:spcBef>
+              <a:spcAft>
+                <a:spcPct val="0"/>
+              </a:spcAft>
+              <a:buFont typeface="Wingdings" panose="05000000000000000000" pitchFamily="2" charset="2"/>
+              <a:buChar char="v"/>
+            </a:pPr>
+            <a:r>
+              <a:rPr kumimoji="0" lang="ko-KR" altLang="ko-KR" sz="1600" i="0" u="none" strike="noStrike" cap="none" normalizeH="0" baseline="0" dirty="0" err="1">
+                <a:ln>
+                  <a:noFill/>
+                </a:ln>
+                <a:solidFill>
+                  <a:schemeClr val="tx1"/>
+                </a:solidFill>
+                <a:effectLst/>
+                <a:latin typeface="D2Coding" panose="020B0609020101020101" pitchFamily="49" charset="-127"/>
+                <a:ea typeface="D2Coding" panose="020B0609020101020101" pitchFamily="49" charset="-127"/>
+              </a:rPr>
+              <a:t>docker</a:t>
+            </a:r>
+            <a:r>
+              <a:rPr kumimoji="0" lang="ko-KR" altLang="ko-KR" sz="1600" i="0" u="none" strike="noStrike" cap="none" normalizeH="0" baseline="0" dirty="0">
+                <a:ln>
+                  <a:noFill/>
+                </a:ln>
+                <a:solidFill>
+                  <a:schemeClr val="tx1"/>
+                </a:solidFill>
+                <a:effectLst/>
+                <a:latin typeface="D2Coding" panose="020B0609020101020101" pitchFamily="49" charset="-127"/>
+                <a:ea typeface="D2Coding" panose="020B0609020101020101" pitchFamily="49" charset="-127"/>
+              </a:rPr>
+              <a:t> </a:t>
+            </a:r>
+            <a:r>
+              <a:rPr kumimoji="0" lang="ko-KR" altLang="ko-KR" sz="1600" i="0" u="none" strike="noStrike" cap="none" normalizeH="0" baseline="0" dirty="0" err="1">
+                <a:ln>
+                  <a:noFill/>
+                </a:ln>
+                <a:solidFill>
+                  <a:schemeClr val="tx1"/>
+                </a:solidFill>
+                <a:effectLst/>
+                <a:latin typeface="D2Coding" panose="020B0609020101020101" pitchFamily="49" charset="-127"/>
+                <a:ea typeface="D2Coding" panose="020B0609020101020101" pitchFamily="49" charset="-127"/>
+              </a:rPr>
+              <a:t>stop</a:t>
+            </a:r>
+            <a:r>
+              <a:rPr kumimoji="0" lang="ko-KR" altLang="ko-KR" sz="1600" i="0" u="none" strike="noStrike" cap="none" normalizeH="0" baseline="0" dirty="0">
+                <a:ln>
+                  <a:noFill/>
+                </a:ln>
+                <a:solidFill>
+                  <a:schemeClr val="tx1"/>
+                </a:solidFill>
+                <a:effectLst/>
+                <a:latin typeface="D2Coding" panose="020B0609020101020101" pitchFamily="49" charset="-127"/>
+                <a:ea typeface="D2Coding" panose="020B0609020101020101" pitchFamily="49" charset="-127"/>
+              </a:rPr>
+              <a:t> &lt;</a:t>
+            </a:r>
+            <a:r>
+              <a:rPr kumimoji="0" lang="ko-KR" altLang="ko-KR" sz="1600" i="0" u="none" strike="noStrike" cap="none" normalizeH="0" baseline="0" dirty="0" err="1">
+                <a:ln>
+                  <a:noFill/>
+                </a:ln>
+                <a:solidFill>
+                  <a:schemeClr val="tx1"/>
+                </a:solidFill>
+                <a:effectLst/>
+                <a:latin typeface="D2Coding" panose="020B0609020101020101" pitchFamily="49" charset="-127"/>
+                <a:ea typeface="D2Coding" panose="020B0609020101020101" pitchFamily="49" charset="-127"/>
+              </a:rPr>
+              <a:t>컨테이너ID</a:t>
+            </a:r>
+            <a:r>
+              <a:rPr kumimoji="0" lang="ko-KR" altLang="ko-KR" sz="1600" i="0" u="none" strike="noStrike" cap="none" normalizeH="0" baseline="0" dirty="0">
+                <a:ln>
+                  <a:noFill/>
+                </a:ln>
+                <a:solidFill>
+                  <a:schemeClr val="tx1"/>
+                </a:solidFill>
+                <a:effectLst/>
+                <a:latin typeface="D2Coding" panose="020B0609020101020101" pitchFamily="49" charset="-127"/>
+                <a:ea typeface="D2Coding" panose="020B0609020101020101" pitchFamily="49" charset="-127"/>
+              </a:rPr>
+              <a:t>/이름&gt;</a:t>
+            </a:r>
+            <a:r>
+              <a:rPr kumimoji="0" lang="en-US" altLang="ko-KR" sz="1600" i="0" u="none" strike="noStrike" cap="none" normalizeH="0" baseline="0" dirty="0">
+                <a:ln>
+                  <a:noFill/>
+                </a:ln>
+                <a:solidFill>
+                  <a:schemeClr val="tx1"/>
+                </a:solidFill>
+                <a:effectLst/>
+                <a:latin typeface="D2Coding" panose="020B0609020101020101" pitchFamily="49" charset="-127"/>
+                <a:ea typeface="D2Coding" panose="020B0609020101020101" pitchFamily="49" charset="-127"/>
+              </a:rPr>
+              <a:t> : </a:t>
+            </a:r>
+            <a:r>
+              <a:rPr kumimoji="0" lang="ko-KR" altLang="ko-KR" sz="1600" i="0" u="none" strike="noStrike" cap="none" normalizeH="0" baseline="0" dirty="0">
+                <a:ln>
+                  <a:noFill/>
+                </a:ln>
+                <a:solidFill>
+                  <a:schemeClr val="tx1"/>
+                </a:solidFill>
+                <a:effectLst/>
+                <a:latin typeface="D2Coding" panose="020B0609020101020101" pitchFamily="49" charset="-127"/>
+                <a:ea typeface="D2Coding" panose="020B0609020101020101" pitchFamily="49" charset="-127"/>
+              </a:rPr>
+              <a:t>실행 중인 컨테이너 안전하게 중지</a:t>
+            </a:r>
+          </a:p>
+          <a:p>
+            <a:pPr marL="342900" marR="0" lvl="0" indent="-342900" algn="l" defTabSz="914400" rtl="0" eaLnBrk="0" fontAlgn="base" latinLnBrk="0" hangingPunct="0">
+              <a:lnSpc>
+                <a:spcPct val="150000"/>
+              </a:lnSpc>
+              <a:spcBef>
+                <a:spcPct val="0"/>
+              </a:spcBef>
+              <a:spcAft>
+                <a:spcPct val="0"/>
+              </a:spcAft>
+              <a:buClrTx/>
+              <a:buSzTx/>
+              <a:buFont typeface="Wingdings" panose="05000000000000000000" pitchFamily="2" charset="2"/>
+              <a:buChar char="v"/>
+              <a:tabLst/>
+            </a:pPr>
+            <a:r>
+              <a:rPr kumimoji="0" lang="ko-KR" altLang="ko-KR" sz="1600" i="0" u="none" strike="noStrike" cap="none" normalizeH="0" baseline="0" dirty="0" err="1">
+                <a:ln>
+                  <a:noFill/>
+                </a:ln>
+                <a:solidFill>
+                  <a:schemeClr val="tx1"/>
+                </a:solidFill>
+                <a:effectLst/>
+                <a:latin typeface="D2Coding" panose="020B0609020101020101" pitchFamily="49" charset="-127"/>
+                <a:ea typeface="D2Coding" panose="020B0609020101020101" pitchFamily="49" charset="-127"/>
+              </a:rPr>
+              <a:t>docker</a:t>
+            </a:r>
+            <a:r>
+              <a:rPr kumimoji="0" lang="ko-KR" altLang="ko-KR" sz="1600" i="0" u="none" strike="noStrike" cap="none" normalizeH="0" baseline="0" dirty="0">
+                <a:ln>
+                  <a:noFill/>
+                </a:ln>
+                <a:solidFill>
+                  <a:schemeClr val="tx1"/>
+                </a:solidFill>
+                <a:effectLst/>
+                <a:latin typeface="D2Coding" panose="020B0609020101020101" pitchFamily="49" charset="-127"/>
+                <a:ea typeface="D2Coding" panose="020B0609020101020101" pitchFamily="49" charset="-127"/>
+              </a:rPr>
+              <a:t> </a:t>
+            </a:r>
+            <a:r>
+              <a:rPr kumimoji="0" lang="ko-KR" altLang="ko-KR" sz="1600" i="0" u="none" strike="noStrike" cap="none" normalizeH="0" baseline="0" dirty="0" err="1">
+                <a:ln>
+                  <a:noFill/>
+                </a:ln>
+                <a:solidFill>
+                  <a:schemeClr val="tx1"/>
+                </a:solidFill>
+                <a:effectLst/>
+                <a:latin typeface="D2Coding" panose="020B0609020101020101" pitchFamily="49" charset="-127"/>
+                <a:ea typeface="D2Coding" panose="020B0609020101020101" pitchFamily="49" charset="-127"/>
+              </a:rPr>
+              <a:t>rm</a:t>
+            </a:r>
+            <a:r>
+              <a:rPr kumimoji="0" lang="ko-KR" altLang="ko-KR" sz="1600" i="0" u="none" strike="noStrike" cap="none" normalizeH="0" baseline="0" dirty="0">
+                <a:ln>
+                  <a:noFill/>
+                </a:ln>
+                <a:solidFill>
+                  <a:schemeClr val="tx1"/>
+                </a:solidFill>
+                <a:effectLst/>
+                <a:latin typeface="D2Coding" panose="020B0609020101020101" pitchFamily="49" charset="-127"/>
+                <a:ea typeface="D2Coding" panose="020B0609020101020101" pitchFamily="49" charset="-127"/>
+              </a:rPr>
+              <a:t> &lt;</a:t>
+            </a:r>
+            <a:r>
+              <a:rPr kumimoji="0" lang="ko-KR" altLang="ko-KR" sz="1600" i="0" u="none" strike="noStrike" cap="none" normalizeH="0" baseline="0" dirty="0" err="1">
+                <a:ln>
+                  <a:noFill/>
+                </a:ln>
+                <a:solidFill>
+                  <a:schemeClr val="tx1"/>
+                </a:solidFill>
+                <a:effectLst/>
+                <a:latin typeface="D2Coding" panose="020B0609020101020101" pitchFamily="49" charset="-127"/>
+                <a:ea typeface="D2Coding" panose="020B0609020101020101" pitchFamily="49" charset="-127"/>
+              </a:rPr>
+              <a:t>컨테이너ID</a:t>
+            </a:r>
+            <a:r>
+              <a:rPr kumimoji="0" lang="ko-KR" altLang="ko-KR" sz="1600" i="0" u="none" strike="noStrike" cap="none" normalizeH="0" baseline="0" dirty="0">
+                <a:ln>
+                  <a:noFill/>
+                </a:ln>
+                <a:solidFill>
+                  <a:schemeClr val="tx1"/>
+                </a:solidFill>
+                <a:effectLst/>
+                <a:latin typeface="D2Coding" panose="020B0609020101020101" pitchFamily="49" charset="-127"/>
+                <a:ea typeface="D2Coding" panose="020B0609020101020101" pitchFamily="49" charset="-127"/>
+              </a:rPr>
+              <a:t>/이름&gt;</a:t>
+            </a:r>
+            <a:r>
+              <a:rPr kumimoji="0" lang="en-US" altLang="ko-KR" sz="1600" i="0" u="none" strike="noStrike" cap="none" normalizeH="0" baseline="0" dirty="0">
+                <a:ln>
+                  <a:noFill/>
+                </a:ln>
+                <a:solidFill>
+                  <a:schemeClr val="tx1"/>
+                </a:solidFill>
+                <a:effectLst/>
+                <a:latin typeface="D2Coding" panose="020B0609020101020101" pitchFamily="49" charset="-127"/>
+                <a:ea typeface="D2Coding" panose="020B0609020101020101" pitchFamily="49" charset="-127"/>
+              </a:rPr>
+              <a:t> : </a:t>
+            </a:r>
+            <a:r>
+              <a:rPr kumimoji="0" lang="ko-KR" altLang="ko-KR" sz="1600" i="0" u="none" strike="noStrike" cap="none" normalizeH="0" baseline="0" dirty="0">
+                <a:ln>
+                  <a:noFill/>
+                </a:ln>
+                <a:solidFill>
+                  <a:schemeClr val="tx1"/>
+                </a:solidFill>
+                <a:effectLst/>
+                <a:latin typeface="D2Coding" panose="020B0609020101020101" pitchFamily="49" charset="-127"/>
+                <a:ea typeface="D2Coding" panose="020B0609020101020101" pitchFamily="49" charset="-127"/>
+              </a:rPr>
+              <a:t>중지된 컨테이너 삭제 (-</a:t>
+            </a:r>
+            <a:r>
+              <a:rPr kumimoji="0" lang="ko-KR" altLang="ko-KR" sz="1600" i="0" u="none" strike="noStrike" cap="none" normalizeH="0" baseline="0" dirty="0" err="1">
+                <a:ln>
+                  <a:noFill/>
+                </a:ln>
+                <a:solidFill>
+                  <a:schemeClr val="tx1"/>
+                </a:solidFill>
+                <a:effectLst/>
+                <a:latin typeface="D2Coding" panose="020B0609020101020101" pitchFamily="49" charset="-127"/>
+                <a:ea typeface="D2Coding" panose="020B0609020101020101" pitchFamily="49" charset="-127"/>
+              </a:rPr>
+              <a:t>f</a:t>
+            </a:r>
+            <a:r>
+              <a:rPr kumimoji="0" lang="ko-KR" altLang="ko-KR" sz="1600" i="0" u="none" strike="noStrike" cap="none" normalizeH="0" baseline="0" dirty="0">
+                <a:ln>
+                  <a:noFill/>
+                </a:ln>
+                <a:solidFill>
+                  <a:schemeClr val="tx1"/>
+                </a:solidFill>
+                <a:effectLst/>
+                <a:latin typeface="D2Coding" panose="020B0609020101020101" pitchFamily="49" charset="-127"/>
+                <a:ea typeface="D2Coding" panose="020B0609020101020101" pitchFamily="49" charset="-127"/>
+              </a:rPr>
+              <a:t> 옵션 추가 시 실행 중인 컨테이너 강제 삭제)</a:t>
+            </a:r>
+          </a:p>
+        </p:txBody>
+      </p:sp>
+    </p:spTree>
+    <p:extLst>
+      <p:ext uri="{BB962C8B-B14F-4D97-AF65-F5344CB8AC3E}">
+        <p14:creationId xmlns:p14="http://schemas.microsoft.com/office/powerpoint/2010/main" val="4184478597"/>
+      </p:ext>
+    </p:extLst>
+  </p:cSld>
+  <p:clrMapOvr>
+    <a:masterClrMapping/>
+  </p:clrMapOvr>
+</p:sld>
+</file>
+
+<file path=ppt/slides/slide13.xml><?xml version="1.0" encoding="utf-8"?>
+<p:sld xmlns:a="http://schemas.openxmlformats.org/drawingml/2006/main" xmlns:r="http://schemas.openxmlformats.org/officeDocument/2006/relationships" xmlns:p="http://schemas.openxmlformats.org/presentationml/2006/main">
+  <p:cSld>
+    <p:spTree>
+      <p:nvGrpSpPr>
+        <p:cNvPr id="1" name="">
+          <a:extLst>
+            <a:ext uri="{FF2B5EF4-FFF2-40B4-BE49-F238E27FC236}">
+              <a16:creationId xmlns:a16="http://schemas.microsoft.com/office/drawing/2014/main" id="{BB8BD33A-6D4F-7983-05F1-FD4213D10F64}"/>
+            </a:ext>
+          </a:extLst>
+        </p:cNvPr>
+        <p:cNvGrpSpPr/>
+        <p:nvPr/>
+      </p:nvGrpSpPr>
+      <p:grpSpPr>
+        <a:xfrm>
+          <a:off x="0" y="0"/>
+          <a:ext cx="0" cy="0"/>
+          <a:chOff x="0" y="0"/>
+          <a:chExt cx="0" cy="0"/>
+        </a:xfrm>
+      </p:grpSpPr>
+      <p:sp>
+        <p:nvSpPr>
+          <p:cNvPr id="3" name="제목 1">
+            <a:extLst>
+              <a:ext uri="{FF2B5EF4-FFF2-40B4-BE49-F238E27FC236}">
+                <a16:creationId xmlns:a16="http://schemas.microsoft.com/office/drawing/2014/main" id="{55B89909-E97F-29A7-E7F1-B9A29BB959AD}"/>
+              </a:ext>
+            </a:extLst>
+          </p:cNvPr>
+          <p:cNvSpPr txBox="1">
+            <a:spLocks/>
+          </p:cNvSpPr>
+          <p:nvPr/>
+        </p:nvSpPr>
+        <p:spPr>
+          <a:xfrm>
+            <a:off x="475645" y="481983"/>
+            <a:ext cx="10353762" cy="766439"/>
+          </a:xfrm>
+          <a:prstGeom prst="rect">
+            <a:avLst/>
+          </a:prstGeom>
+        </p:spPr>
+        <p:txBody>
+          <a:bodyPr vert="horz" lIns="91440" tIns="45720" rIns="91440" bIns="45720" rtlCol="0" anchor="ctr">
+            <a:normAutofit/>
+          </a:bodyPr>
+          <a:lstStyle>
+            <a:lvl1pPr algn="ctr" defTabSz="914400" rtl="0" eaLnBrk="1" latinLnBrk="1" hangingPunct="1">
+              <a:lnSpc>
+                <a:spcPct val="90000"/>
+              </a:lnSpc>
+              <a:spcBef>
+                <a:spcPct val="0"/>
+              </a:spcBef>
+              <a:buNone/>
+              <a:defRPr sz="3200" kern="1200" cap="all" baseline="0">
+                <a:solidFill>
+                  <a:schemeClr val="tx1"/>
+                </a:solidFill>
+                <a:effectLst/>
+                <a:latin typeface="Batang" panose="02030600000101010101" pitchFamily="18" charset="-127"/>
+                <a:ea typeface="Batang" panose="02030600000101010101" pitchFamily="18" charset="-127"/>
+                <a:cs typeface="+mj-cs"/>
+              </a:defRPr>
+            </a:lvl1pPr>
+          </a:lstStyle>
+          <a:p>
+            <a:pPr algn="l"/>
+            <a:r>
+              <a:rPr lang="en-US" altLang="ko-KR" sz="2800" cap="none" dirty="0" err="1">
+                <a:solidFill>
+                  <a:schemeClr val="bg2">
+                    <a:lumMod val="25000"/>
+                  </a:schemeClr>
+                </a:solidFill>
+                <a:latin typeface="D2Coding" panose="020B0609020101020101" pitchFamily="49" charset="-127"/>
+                <a:ea typeface="D2Coding" panose="020B0609020101020101" pitchFamily="49" charset="-127"/>
+                <a:cs typeface="Segoe UI Light" panose="020B0502040204020203" pitchFamily="34" charset="0"/>
+              </a:rPr>
+              <a:t>Github</a:t>
+            </a:r>
+            <a:r>
+              <a:rPr lang="en-US" altLang="ko-KR" sz="2800" cap="none" dirty="0">
+                <a:solidFill>
+                  <a:schemeClr val="bg2">
+                    <a:lumMod val="25000"/>
+                  </a:schemeClr>
+                </a:solidFill>
+                <a:latin typeface="D2Coding" panose="020B0609020101020101" pitchFamily="49" charset="-127"/>
+                <a:ea typeface="D2Coding" panose="020B0609020101020101" pitchFamily="49" charset="-127"/>
+                <a:cs typeface="Segoe UI Light" panose="020B0502040204020203" pitchFamily="34" charset="0"/>
+              </a:rPr>
+              <a:t> </a:t>
+            </a:r>
+            <a:r>
+              <a:rPr lang="en-US" altLang="ko-KR" sz="2800" cap="none" dirty="0" err="1">
+                <a:solidFill>
+                  <a:schemeClr val="bg2">
+                    <a:lumMod val="25000"/>
+                  </a:schemeClr>
+                </a:solidFill>
+                <a:latin typeface="D2Coding" panose="020B0609020101020101" pitchFamily="49" charset="-127"/>
+                <a:ea typeface="D2Coding" panose="020B0609020101020101" pitchFamily="49" charset="-127"/>
+                <a:cs typeface="Segoe UI Light" panose="020B0502040204020203" pitchFamily="34" charset="0"/>
+              </a:rPr>
+              <a:t>codespaces</a:t>
+            </a:r>
+            <a:endParaRPr lang="ko-KR" altLang="en-US" sz="2800" cap="none" dirty="0">
+              <a:solidFill>
+                <a:schemeClr val="bg2">
+                  <a:lumMod val="25000"/>
+                </a:schemeClr>
+              </a:solidFill>
+              <a:latin typeface="D2Coding" panose="020B0609020101020101" pitchFamily="49" charset="-127"/>
+              <a:ea typeface="D2Coding" panose="020B0609020101020101" pitchFamily="49" charset="-127"/>
+              <a:cs typeface="Segoe UI Light" panose="020B0502040204020203" pitchFamily="34" charset="0"/>
+            </a:endParaRPr>
+          </a:p>
+        </p:txBody>
+      </p:sp>
+      <p:sp>
+        <p:nvSpPr>
+          <p:cNvPr id="8" name="TextBox 7">
+            <a:extLst>
+              <a:ext uri="{FF2B5EF4-FFF2-40B4-BE49-F238E27FC236}">
+                <a16:creationId xmlns:a16="http://schemas.microsoft.com/office/drawing/2014/main" id="{A4948C15-FDC3-711B-6FFF-DA3B587AFEE9}"/>
+              </a:ext>
+            </a:extLst>
+          </p:cNvPr>
+          <p:cNvSpPr txBox="1"/>
+          <p:nvPr/>
+        </p:nvSpPr>
+        <p:spPr>
+          <a:xfrm>
+            <a:off x="744020" y="3244334"/>
+            <a:ext cx="184731" cy="369332"/>
+          </a:xfrm>
+          <a:prstGeom prst="rect">
+            <a:avLst/>
+          </a:prstGeom>
+          <a:noFill/>
+        </p:spPr>
+        <p:txBody>
+          <a:bodyPr wrap="none" rtlCol="0">
+            <a:spAutoFit/>
+          </a:bodyPr>
+          <a:lstStyle/>
+          <a:p>
+            <a:endParaRPr lang="ko-KR" altLang="en-US" dirty="0">
+              <a:solidFill>
+                <a:schemeClr val="accent5"/>
+              </a:solidFill>
+              <a:latin typeface="D2Coding" panose="020B0609020101020101" pitchFamily="49" charset="-127"/>
+              <a:ea typeface="D2Coding" panose="020B0609020101020101" pitchFamily="49" charset="-127"/>
+            </a:endParaRPr>
+          </a:p>
+        </p:txBody>
+      </p:sp>
+      <p:sp>
+        <p:nvSpPr>
+          <p:cNvPr id="2" name="슬라이드 번호 개체 틀 3">
+            <a:extLst>
+              <a:ext uri="{FF2B5EF4-FFF2-40B4-BE49-F238E27FC236}">
+                <a16:creationId xmlns:a16="http://schemas.microsoft.com/office/drawing/2014/main" id="{6D6B74DF-A617-6F5B-B0F7-4B5F480EB67E}"/>
+              </a:ext>
+            </a:extLst>
+          </p:cNvPr>
+          <p:cNvSpPr txBox="1">
+            <a:spLocks/>
+          </p:cNvSpPr>
+          <p:nvPr/>
+        </p:nvSpPr>
+        <p:spPr>
+          <a:xfrm>
+            <a:off x="11180761" y="299420"/>
+            <a:ext cx="753545" cy="365125"/>
+          </a:xfrm>
+          <a:prstGeom prst="rect">
+            <a:avLst/>
+          </a:prstGeom>
+        </p:spPr>
+        <p:txBody>
+          <a:bodyPr vert="horz" lIns="91440" tIns="45720" rIns="91440" bIns="45720" rtlCol="0" anchor="ctr"/>
+          <a:lstStyle>
+            <a:defPPr rtl="0">
+              <a:defRPr lang="ko-KR"/>
+            </a:defPPr>
+            <a:lvl1pPr marL="0" algn="r" defTabSz="914400" rtl="0" eaLnBrk="1" latinLnBrk="0" hangingPunct="1">
+              <a:defRPr sz="1200" kern="1200" baseline="0">
+                <a:solidFill>
+                  <a:schemeClr val="tx1">
+                    <a:lumMod val="65000"/>
+                    <a:lumOff val="35000"/>
+                  </a:schemeClr>
+                </a:solidFill>
+                <a:latin typeface="맑은 고딕" panose="020B0503020000020004" pitchFamily="50" charset="-127"/>
+                <a:ea typeface="맑은 고딕" panose="020B0503020000020004" pitchFamily="50" charset="-127"/>
+                <a:cs typeface="+mn-cs"/>
+              </a:defRPr>
+            </a:lvl1pPr>
+            <a:lvl2pPr marL="457200" algn="l" defTabSz="914400" rtl="0" eaLnBrk="1" latinLnBrk="0" hangingPunct="1">
+              <a:defRPr sz="1800" kern="1200">
+                <a:solidFill>
+                  <a:schemeClr val="tx1"/>
+                </a:solidFill>
+                <a:latin typeface="+mn-lt"/>
+                <a:ea typeface="+mn-ea"/>
+                <a:cs typeface="+mn-cs"/>
+              </a:defRPr>
+            </a:lvl2pPr>
+            <a:lvl3pPr marL="914400" algn="l" defTabSz="914400" rtl="0" eaLnBrk="1" latinLnBrk="0" hangingPunct="1">
+              <a:defRPr sz="1800" kern="1200">
+                <a:solidFill>
+                  <a:schemeClr val="tx1"/>
+                </a:solidFill>
+                <a:latin typeface="+mn-lt"/>
+                <a:ea typeface="+mn-ea"/>
+                <a:cs typeface="+mn-cs"/>
+              </a:defRPr>
+            </a:lvl3pPr>
+            <a:lvl4pPr marL="1371600" algn="l" defTabSz="914400" rtl="0" eaLnBrk="1" latinLnBrk="0" hangingPunct="1">
+              <a:defRPr sz="1800" kern="1200">
+                <a:solidFill>
+                  <a:schemeClr val="tx1"/>
+                </a:solidFill>
+                <a:latin typeface="+mn-lt"/>
+                <a:ea typeface="+mn-ea"/>
+                <a:cs typeface="+mn-cs"/>
+              </a:defRPr>
+            </a:lvl4pPr>
+            <a:lvl5pPr marL="1828800" algn="l" defTabSz="914400" rtl="0" eaLnBrk="1" latinLnBrk="0" hangingPunct="1">
+              <a:defRPr sz="1800" kern="1200">
+                <a:solidFill>
+                  <a:schemeClr val="tx1"/>
+                </a:solidFill>
+                <a:latin typeface="+mn-lt"/>
+                <a:ea typeface="+mn-ea"/>
+                <a:cs typeface="+mn-cs"/>
+              </a:defRPr>
+            </a:lvl5pPr>
+            <a:lvl6pPr marL="2286000" algn="l" defTabSz="914400" rtl="0" eaLnBrk="1" latinLnBrk="0" hangingPunct="1">
+              <a:defRPr sz="1800" kern="1200">
+                <a:solidFill>
+                  <a:schemeClr val="tx1"/>
+                </a:solidFill>
+                <a:latin typeface="+mn-lt"/>
+                <a:ea typeface="+mn-ea"/>
+                <a:cs typeface="+mn-cs"/>
+              </a:defRPr>
+            </a:lvl6pPr>
+            <a:lvl7pPr marL="2743200" algn="l" defTabSz="914400" rtl="0" eaLnBrk="1" latinLnBrk="0" hangingPunct="1">
+              <a:defRPr sz="1800" kern="1200">
+                <a:solidFill>
+                  <a:schemeClr val="tx1"/>
+                </a:solidFill>
+                <a:latin typeface="+mn-lt"/>
+                <a:ea typeface="+mn-ea"/>
+                <a:cs typeface="+mn-cs"/>
+              </a:defRPr>
+            </a:lvl7pPr>
+            <a:lvl8pPr marL="3200400" algn="l" defTabSz="914400" rtl="0" eaLnBrk="1" latinLnBrk="0" hangingPunct="1">
+              <a:defRPr sz="1800" kern="1200">
+                <a:solidFill>
+                  <a:schemeClr val="tx1"/>
+                </a:solidFill>
+                <a:latin typeface="+mn-lt"/>
+                <a:ea typeface="+mn-ea"/>
+                <a:cs typeface="+mn-cs"/>
+              </a:defRPr>
+            </a:lvl8pPr>
+            <a:lvl9pPr marL="3657600" algn="l" defTabSz="914400" rtl="0" eaLnBrk="1" latinLnBrk="0" hangingPunct="1">
+              <a:defRPr sz="1800" kern="1200">
+                <a:solidFill>
+                  <a:schemeClr val="tx1"/>
+                </a:solidFill>
+                <a:latin typeface="+mn-lt"/>
+                <a:ea typeface="+mn-ea"/>
+                <a:cs typeface="+mn-cs"/>
+              </a:defRPr>
+            </a:lvl9pPr>
+          </a:lstStyle>
+          <a:p>
+            <a:fld id="{D57F1E4F-1CFF-5643-939E-217C01CDF565}" type="slidenum">
+              <a:rPr lang="en-US" b="1" smtClean="0">
+                <a:latin typeface="Segoe UI Emoji" panose="020B0502040204020203" pitchFamily="34" charset="0"/>
+                <a:ea typeface="Segoe UI Emoji" panose="020B0502040204020203" pitchFamily="34" charset="0"/>
+              </a:rPr>
+              <a:pPr/>
+              <a:t>13</a:t>
+            </a:fld>
+            <a:endParaRPr lang="en-US" b="1" dirty="0">
+              <a:latin typeface="Segoe UI Emoji" panose="020B0502040204020203" pitchFamily="34" charset="0"/>
+              <a:ea typeface="Segoe UI Emoji" panose="020B0502040204020203" pitchFamily="34" charset="0"/>
+            </a:endParaRPr>
+          </a:p>
+        </p:txBody>
+      </p:sp>
+      <p:pic>
+        <p:nvPicPr>
+          <p:cNvPr id="10" name="그래픽 9" descr="수영">
+            <a:extLst>
+              <a:ext uri="{FF2B5EF4-FFF2-40B4-BE49-F238E27FC236}">
+                <a16:creationId xmlns:a16="http://schemas.microsoft.com/office/drawing/2014/main" id="{573CE50D-45DD-A082-4E33-08CB3DE49955}"/>
+              </a:ext>
+            </a:extLst>
+          </p:cNvPr>
+          <p:cNvPicPr>
+            <a:picLocks noChangeAspect="1"/>
+          </p:cNvPicPr>
+          <p:nvPr/>
+        </p:nvPicPr>
+        <p:blipFill>
+          <a:blip r:embed="rId2">
+            <a:extLst>
+              <a:ext uri="{96DAC541-7B7A-43D3-8B79-37D633B846F1}">
+                <asvg:svgBlip xmlns:asvg="http://schemas.microsoft.com/office/drawing/2016/SVG/main" r:embed="rId3"/>
+              </a:ext>
+            </a:extLst>
+          </a:blip>
+          <a:stretch>
+            <a:fillRect/>
+          </a:stretch>
+        </p:blipFill>
+        <p:spPr>
+          <a:xfrm>
+            <a:off x="10685980" y="373930"/>
+            <a:ext cx="914400" cy="914400"/>
+          </a:xfrm>
+          <a:prstGeom prst="rect">
+            <a:avLst/>
+          </a:prstGeom>
+        </p:spPr>
+      </p:pic>
+      <p:pic>
+        <p:nvPicPr>
+          <p:cNvPr id="6" name="그림 5">
+            <a:extLst>
+              <a:ext uri="{FF2B5EF4-FFF2-40B4-BE49-F238E27FC236}">
+                <a16:creationId xmlns:a16="http://schemas.microsoft.com/office/drawing/2014/main" id="{8504A012-36C2-A0FE-73EA-163FFB056B98}"/>
+              </a:ext>
+            </a:extLst>
+          </p:cNvPr>
+          <p:cNvPicPr>
+            <a:picLocks noChangeAspect="1"/>
+          </p:cNvPicPr>
+          <p:nvPr/>
+        </p:nvPicPr>
+        <p:blipFill>
+          <a:blip r:embed="rId4"/>
+          <a:stretch>
+            <a:fillRect/>
+          </a:stretch>
+        </p:blipFill>
+        <p:spPr>
+          <a:xfrm>
+            <a:off x="3190364" y="2960717"/>
+            <a:ext cx="7372862" cy="3415300"/>
+          </a:xfrm>
+          <a:prstGeom prst="rect">
+            <a:avLst/>
+          </a:prstGeom>
+        </p:spPr>
+      </p:pic>
+      <p:sp>
+        <p:nvSpPr>
+          <p:cNvPr id="7" name="Rectangle 1">
+            <a:extLst>
+              <a:ext uri="{FF2B5EF4-FFF2-40B4-BE49-F238E27FC236}">
+                <a16:creationId xmlns:a16="http://schemas.microsoft.com/office/drawing/2014/main" id="{F6B67764-92A4-6371-4797-DBF149A811E4}"/>
+              </a:ext>
+            </a:extLst>
+          </p:cNvPr>
+          <p:cNvSpPr>
+            <a:spLocks noChangeArrowheads="1"/>
+          </p:cNvSpPr>
+          <p:nvPr/>
+        </p:nvSpPr>
+        <p:spPr bwMode="auto">
+          <a:xfrm>
+            <a:off x="591620" y="1171129"/>
+            <a:ext cx="11353281" cy="1531830"/>
+          </a:xfrm>
+          <a:prstGeom prst="rect">
+            <a:avLst/>
+          </a:prstGeom>
+          <a:noFill/>
+          <a:ln>
+            <a:noFill/>
+          </a:ln>
+          <a:effectLst/>
+          <a:extLst>
+            <a:ext uri="{909E8E84-426E-40DD-AFC4-6F175D3DCCD1}">
+              <a14:hiddenFill xmlns:a14="http://schemas.microsoft.com/office/drawing/2010/main">
+                <a:solidFill>
+                  <a:schemeClr val="accent1"/>
+                </a:solidFill>
+              </a14:hiddenFill>
+            </a:ext>
+            <a:ext uri="{91240B29-F687-4F45-9708-019B960494DF}">
+              <a14:hiddenLine xmlns:a14="http://schemas.microsoft.com/office/drawing/2010/main" w="9525">
+                <a:solidFill>
+                  <a:schemeClr val="tx1"/>
+                </a:solidFill>
+                <a:miter lim="800000"/>
+                <a:headEnd/>
+                <a:tailEnd/>
+              </a14:hiddenLine>
+            </a:ext>
+            <a:ext uri="{AF507438-7753-43E0-B8FC-AC1667EBCBE1}">
+              <a14:hiddenEffects xmlns:a14="http://schemas.microsoft.com/office/drawing/2010/main">
+                <a:effectLst>
+                  <a:outerShdw dist="35921" dir="2700000" algn="ctr" rotWithShape="0">
+                    <a:schemeClr val="bg2"/>
+                  </a:outerShdw>
+                </a:effectLst>
+              </a14:hiddenEffects>
+            </a:ext>
+          </a:extLst>
+        </p:spPr>
+        <p:txBody>
+          <a:bodyPr vert="horz" wrap="square" lIns="91440" tIns="45720" rIns="91440" bIns="45720" numCol="1" anchor="ctr" anchorCtr="0" compatLnSpc="1">
+            <a:prstTxWarp prst="textNoShape">
+              <a:avLst/>
+            </a:prstTxWarp>
+            <a:spAutoFit/>
+          </a:bodyPr>
+          <a:lstStyle/>
+          <a:p>
+            <a:pPr marL="285750" marR="0" lvl="0" indent="-285750" algn="l" defTabSz="914400" rtl="0" eaLnBrk="0" fontAlgn="base" latinLnBrk="0" hangingPunct="0">
+              <a:lnSpc>
+                <a:spcPct val="150000"/>
+              </a:lnSpc>
+              <a:spcBef>
+                <a:spcPct val="0"/>
+              </a:spcBef>
+              <a:spcAft>
+                <a:spcPct val="0"/>
+              </a:spcAft>
+              <a:buClrTx/>
+              <a:buSzTx/>
+              <a:buFont typeface="Wingdings" panose="05000000000000000000" pitchFamily="2" charset="2"/>
+              <a:buChar char="v"/>
+              <a:tabLst/>
+            </a:pPr>
+            <a:r>
+              <a:rPr kumimoji="0" lang="ko-KR" altLang="ko-KR" sz="1600" i="0" u="none" strike="noStrike" cap="none" normalizeH="0" baseline="0" dirty="0">
+                <a:ln>
+                  <a:noFill/>
+                </a:ln>
+                <a:solidFill>
+                  <a:schemeClr val="tx1"/>
+                </a:solidFill>
+                <a:effectLst/>
+                <a:latin typeface="D2Coding" panose="020B0609020101020101" pitchFamily="49" charset="-127"/>
+                <a:ea typeface="D2Coding" panose="020B0609020101020101" pitchFamily="49" charset="-127"/>
+              </a:rPr>
+              <a:t>웹 브라우저 안에서 VS </a:t>
+            </a:r>
+            <a:r>
+              <a:rPr kumimoji="0" lang="ko-KR" altLang="ko-KR" sz="1600" i="0" u="none" strike="noStrike" cap="none" normalizeH="0" baseline="0" dirty="0" err="1">
+                <a:ln>
+                  <a:noFill/>
+                </a:ln>
+                <a:solidFill>
+                  <a:schemeClr val="tx1"/>
+                </a:solidFill>
+                <a:effectLst/>
+                <a:latin typeface="D2Coding" panose="020B0609020101020101" pitchFamily="49" charset="-127"/>
+                <a:ea typeface="D2Coding" panose="020B0609020101020101" pitchFamily="49" charset="-127"/>
+              </a:rPr>
+              <a:t>Code</a:t>
+            </a:r>
+            <a:r>
+              <a:rPr kumimoji="0" lang="ko-KR" altLang="ko-KR" sz="1600" i="0" u="none" strike="noStrike" cap="none" normalizeH="0" baseline="0" dirty="0">
+                <a:ln>
+                  <a:noFill/>
+                </a:ln>
+                <a:solidFill>
+                  <a:schemeClr val="tx1"/>
+                </a:solidFill>
+                <a:effectLst/>
+                <a:latin typeface="D2Coding" panose="020B0609020101020101" pitchFamily="49" charset="-127"/>
+                <a:ea typeface="D2Coding" panose="020B0609020101020101" pitchFamily="49" charset="-127"/>
+              </a:rPr>
+              <a:t> 에디터와 리눅스 터미널을 함께 쓰는 클라우드 IDE</a:t>
+            </a:r>
+          </a:p>
+          <a:p>
+            <a:pPr marL="285750" marR="0" lvl="0" indent="-285750" algn="l" defTabSz="914400" rtl="0" eaLnBrk="0" fontAlgn="base" latinLnBrk="0" hangingPunct="0">
+              <a:lnSpc>
+                <a:spcPct val="150000"/>
+              </a:lnSpc>
+              <a:spcBef>
+                <a:spcPct val="0"/>
+              </a:spcBef>
+              <a:spcAft>
+                <a:spcPct val="0"/>
+              </a:spcAft>
+              <a:buClrTx/>
+              <a:buSzTx/>
+              <a:buFont typeface="Wingdings" panose="05000000000000000000" pitchFamily="2" charset="2"/>
+              <a:buChar char="v"/>
+              <a:tabLst/>
+            </a:pPr>
+            <a:r>
+              <a:rPr kumimoji="0" lang="ko-KR" altLang="ko-KR" sz="1600" i="0" u="none" strike="noStrike" cap="none" normalizeH="0" baseline="0" dirty="0">
+                <a:ln>
+                  <a:noFill/>
+                </a:ln>
+                <a:solidFill>
+                  <a:schemeClr val="tx1"/>
+                </a:solidFill>
+                <a:effectLst/>
+                <a:latin typeface="D2Coding" panose="020B0609020101020101" pitchFamily="49" charset="-127"/>
+                <a:ea typeface="D2Coding" panose="020B0609020101020101" pitchFamily="49" charset="-127"/>
+              </a:rPr>
+              <a:t>에디터 화면에서 </a:t>
+            </a:r>
+            <a:r>
+              <a:rPr kumimoji="0" lang="ko-KR" altLang="ko-KR" sz="1600" i="0" u="none" strike="noStrike" cap="none" normalizeH="0" baseline="0" dirty="0" err="1">
+                <a:ln>
+                  <a:noFill/>
+                </a:ln>
+                <a:solidFill>
+                  <a:schemeClr val="tx1"/>
+                </a:solidFill>
+                <a:effectLst/>
+                <a:latin typeface="D2Coding" panose="020B0609020101020101" pitchFamily="49" charset="-127"/>
+                <a:ea typeface="D2Coding" panose="020B0609020101020101" pitchFamily="49" charset="-127"/>
+              </a:rPr>
+              <a:t>Dockerfile이나</a:t>
+            </a:r>
+            <a:r>
+              <a:rPr kumimoji="0" lang="ko-KR" altLang="ko-KR" sz="1600" i="0" u="none" strike="noStrike" cap="none" normalizeH="0" baseline="0" dirty="0">
+                <a:ln>
+                  <a:noFill/>
+                </a:ln>
+                <a:solidFill>
+                  <a:schemeClr val="tx1"/>
+                </a:solidFill>
+                <a:effectLst/>
+                <a:latin typeface="D2Coding" panose="020B0609020101020101" pitchFamily="49" charset="-127"/>
+                <a:ea typeface="D2Coding" panose="020B0609020101020101" pitchFamily="49" charset="-127"/>
+              </a:rPr>
+              <a:t> </a:t>
+            </a:r>
+            <a:r>
+              <a:rPr kumimoji="0" lang="ko-KR" altLang="ko-KR" sz="1600" i="0" u="none" strike="noStrike" cap="none" normalizeH="0" baseline="0" dirty="0" err="1">
+                <a:ln>
+                  <a:noFill/>
+                </a:ln>
+                <a:solidFill>
+                  <a:schemeClr val="tx1"/>
+                </a:solidFill>
+                <a:effectLst/>
+                <a:latin typeface="D2Coding" panose="020B0609020101020101" pitchFamily="49" charset="-127"/>
+                <a:ea typeface="D2Coding" panose="020B0609020101020101" pitchFamily="49" charset="-127"/>
+              </a:rPr>
+              <a:t>docker-compose.yml을</a:t>
+            </a:r>
+            <a:r>
+              <a:rPr kumimoji="0" lang="ko-KR" altLang="ko-KR" sz="1600" i="0" u="none" strike="noStrike" cap="none" normalizeH="0" baseline="0" dirty="0">
+                <a:ln>
+                  <a:noFill/>
+                </a:ln>
+                <a:solidFill>
+                  <a:schemeClr val="tx1"/>
+                </a:solidFill>
+                <a:effectLst/>
+                <a:latin typeface="D2Coding" panose="020B0609020101020101" pitchFamily="49" charset="-127"/>
+                <a:ea typeface="D2Coding" panose="020B0609020101020101" pitchFamily="49" charset="-127"/>
+              </a:rPr>
+              <a:t> 직접 작성하고 터미널에서 빌드/실행(월 60시간 무료)</a:t>
+            </a:r>
+          </a:p>
+          <a:p>
+            <a:pPr marL="285750" marR="0" lvl="0" indent="-285750" algn="l" defTabSz="914400" rtl="0" eaLnBrk="0" fontAlgn="base" latinLnBrk="0" hangingPunct="0">
+              <a:lnSpc>
+                <a:spcPct val="150000"/>
+              </a:lnSpc>
+              <a:spcBef>
+                <a:spcPct val="0"/>
+              </a:spcBef>
+              <a:spcAft>
+                <a:spcPct val="0"/>
+              </a:spcAft>
+              <a:buClrTx/>
+              <a:buSzTx/>
+              <a:buFont typeface="Wingdings" panose="05000000000000000000" pitchFamily="2" charset="2"/>
+              <a:buChar char="v"/>
+              <a:tabLst/>
+            </a:pPr>
+            <a:r>
+              <a:rPr kumimoji="0" lang="ko-KR" altLang="ko-KR" sz="1600" i="0" u="none" strike="noStrike" cap="none" normalizeH="0" baseline="0" dirty="0" err="1">
+                <a:ln>
+                  <a:noFill/>
+                </a:ln>
+                <a:solidFill>
+                  <a:schemeClr val="tx1"/>
+                </a:solidFill>
+                <a:effectLst/>
+                <a:latin typeface="D2Coding" panose="020B0609020101020101" pitchFamily="49" charset="-127"/>
+                <a:ea typeface="D2Coding" panose="020B0609020101020101" pitchFamily="49" charset="-127"/>
+              </a:rPr>
+              <a:t>Dockerfile</a:t>
+            </a:r>
+            <a:r>
+              <a:rPr kumimoji="0" lang="ko-KR" altLang="ko-KR" sz="1600" i="0" u="none" strike="noStrike" cap="none" normalizeH="0" baseline="0" dirty="0">
+                <a:ln>
+                  <a:noFill/>
+                </a:ln>
+                <a:solidFill>
+                  <a:schemeClr val="tx1"/>
+                </a:solidFill>
+                <a:effectLst/>
+                <a:latin typeface="D2Coding" panose="020B0609020101020101" pitchFamily="49" charset="-127"/>
+                <a:ea typeface="D2Coding" panose="020B0609020101020101" pitchFamily="49" charset="-127"/>
+              </a:rPr>
+              <a:t> 작성, 소스코드 패키징, 다중 컨테이너(DB 연동) 실습</a:t>
+            </a:r>
+          </a:p>
+          <a:p>
+            <a:pPr marL="285750" marR="0" lvl="0" indent="-285750" algn="l" defTabSz="914400" rtl="0" eaLnBrk="0" fontAlgn="base" latinLnBrk="0" hangingPunct="0">
+              <a:lnSpc>
+                <a:spcPct val="150000"/>
+              </a:lnSpc>
+              <a:spcBef>
+                <a:spcPct val="0"/>
+              </a:spcBef>
+              <a:spcAft>
+                <a:spcPct val="0"/>
+              </a:spcAft>
+              <a:buClrTx/>
+              <a:buSzTx/>
+              <a:buFont typeface="Wingdings" panose="05000000000000000000" pitchFamily="2" charset="2"/>
+              <a:buChar char="v"/>
+              <a:tabLst/>
+            </a:pPr>
+            <a:r>
+              <a:rPr kumimoji="0" lang="ko-KR" altLang="ko-KR" sz="1600" i="0" u="none" strike="noStrike" cap="none" normalizeH="0" baseline="0" dirty="0">
+                <a:ln>
+                  <a:noFill/>
+                </a:ln>
+                <a:solidFill>
+                  <a:schemeClr val="tx1"/>
+                </a:solidFill>
+                <a:effectLst/>
+                <a:latin typeface="D2Coding" panose="020B0609020101020101" pitchFamily="49" charset="-127"/>
+                <a:ea typeface="D2Coding" panose="020B0609020101020101" pitchFamily="49" charset="-127"/>
+              </a:rPr>
+              <a:t>사이트: </a:t>
+            </a:r>
+            <a:r>
+              <a:rPr kumimoji="0" lang="ko-KR" altLang="ko-KR" sz="1600" i="0" u="none" strike="noStrike" cap="none" normalizeH="0" baseline="0" dirty="0" err="1">
+                <a:ln>
+                  <a:noFill/>
+                </a:ln>
+                <a:solidFill>
+                  <a:schemeClr val="tx1"/>
+                </a:solidFill>
+                <a:effectLst/>
+                <a:latin typeface="D2Coding" panose="020B0609020101020101" pitchFamily="49" charset="-127"/>
+                <a:ea typeface="D2Coding" panose="020B0609020101020101" pitchFamily="49" charset="-127"/>
+                <a:hlinkClick r:id="rId5"/>
+              </a:rPr>
+              <a:t>github.com</a:t>
+            </a:r>
+            <a:r>
+              <a:rPr kumimoji="0" lang="ko-KR" altLang="ko-KR" sz="1600" i="0" u="none" strike="noStrike" cap="none" normalizeH="0" baseline="0" dirty="0">
+                <a:ln>
+                  <a:noFill/>
+                </a:ln>
+                <a:solidFill>
+                  <a:schemeClr val="tx1"/>
+                </a:solidFill>
+                <a:effectLst/>
+                <a:latin typeface="D2Coding" panose="020B0609020101020101" pitchFamily="49" charset="-127"/>
+                <a:ea typeface="D2Coding" panose="020B0609020101020101" pitchFamily="49" charset="-127"/>
+                <a:hlinkClick r:id="rId5"/>
+              </a:rPr>
+              <a:t>/</a:t>
+            </a:r>
+            <a:r>
+              <a:rPr kumimoji="0" lang="ko-KR" altLang="ko-KR" sz="1600" i="0" u="none" strike="noStrike" cap="none" normalizeH="0" baseline="0" dirty="0" err="1">
+                <a:ln>
+                  <a:noFill/>
+                </a:ln>
+                <a:solidFill>
+                  <a:schemeClr val="tx1"/>
+                </a:solidFill>
+                <a:effectLst/>
+                <a:latin typeface="D2Coding" panose="020B0609020101020101" pitchFamily="49" charset="-127"/>
+                <a:ea typeface="D2Coding" panose="020B0609020101020101" pitchFamily="49" charset="-127"/>
+                <a:hlinkClick r:id="rId5"/>
+              </a:rPr>
+              <a:t>features</a:t>
+            </a:r>
+            <a:r>
+              <a:rPr kumimoji="0" lang="ko-KR" altLang="ko-KR" sz="1600" i="0" u="none" strike="noStrike" cap="none" normalizeH="0" baseline="0" dirty="0">
+                <a:ln>
+                  <a:noFill/>
+                </a:ln>
+                <a:solidFill>
+                  <a:schemeClr val="tx1"/>
+                </a:solidFill>
+                <a:effectLst/>
+                <a:latin typeface="D2Coding" panose="020B0609020101020101" pitchFamily="49" charset="-127"/>
+                <a:ea typeface="D2Coding" panose="020B0609020101020101" pitchFamily="49" charset="-127"/>
+                <a:hlinkClick r:id="rId5"/>
+              </a:rPr>
+              <a:t>/</a:t>
+            </a:r>
+            <a:r>
+              <a:rPr kumimoji="0" lang="ko-KR" altLang="ko-KR" sz="1600" i="0" u="none" strike="noStrike" cap="none" normalizeH="0" baseline="0" dirty="0" err="1">
+                <a:ln>
+                  <a:noFill/>
+                </a:ln>
+                <a:solidFill>
+                  <a:schemeClr val="tx1"/>
+                </a:solidFill>
+                <a:effectLst/>
+                <a:latin typeface="D2Coding" panose="020B0609020101020101" pitchFamily="49" charset="-127"/>
+                <a:ea typeface="D2Coding" panose="020B0609020101020101" pitchFamily="49" charset="-127"/>
+                <a:hlinkClick r:id="rId5"/>
+              </a:rPr>
+              <a:t>codespaces</a:t>
+            </a:r>
+            <a:endParaRPr kumimoji="0" lang="ko-KR" altLang="ko-KR" sz="1600" i="0" u="none" strike="noStrike" cap="none" normalizeH="0" baseline="0" dirty="0">
+              <a:ln>
+                <a:noFill/>
+              </a:ln>
+              <a:solidFill>
+                <a:schemeClr val="tx1"/>
+              </a:solidFill>
+              <a:effectLst/>
+              <a:latin typeface="D2Coding" panose="020B0609020101020101" pitchFamily="49" charset="-127"/>
+              <a:ea typeface="D2Coding" panose="020B0609020101020101" pitchFamily="49" charset="-127"/>
+            </a:endParaRPr>
+          </a:p>
+        </p:txBody>
+      </p:sp>
+    </p:spTree>
+    <p:extLst>
+      <p:ext uri="{BB962C8B-B14F-4D97-AF65-F5344CB8AC3E}">
+        <p14:creationId xmlns:p14="http://schemas.microsoft.com/office/powerpoint/2010/main" val="2568910720"/>
+      </p:ext>
+    </p:extLst>
+  </p:cSld>
+  <p:clrMapOvr>
+    <a:masterClrMapping/>
+  </p:clrMapOvr>
+</p:sld>
+</file>
+
+<file path=ppt/slides/slide14.xml><?xml version="1.0" encoding="utf-8"?>
+<p:sld xmlns:a="http://schemas.openxmlformats.org/drawingml/2006/main" xmlns:r="http://schemas.openxmlformats.org/officeDocument/2006/relationships" xmlns:p="http://schemas.openxmlformats.org/presentationml/2006/main">
+  <p:cSld>
+    <p:spTree>
+      <p:nvGrpSpPr>
+        <p:cNvPr id="1" name="">
+          <a:extLst>
+            <a:ext uri="{FF2B5EF4-FFF2-40B4-BE49-F238E27FC236}">
+              <a16:creationId xmlns:a16="http://schemas.microsoft.com/office/drawing/2014/main" id="{3E8E7208-FD41-51A5-10D0-162555D90C55}"/>
+            </a:ext>
+          </a:extLst>
+        </p:cNvPr>
+        <p:cNvGrpSpPr/>
+        <p:nvPr/>
+      </p:nvGrpSpPr>
+      <p:grpSpPr>
+        <a:xfrm>
+          <a:off x="0" y="0"/>
+          <a:ext cx="0" cy="0"/>
+          <a:chOff x="0" y="0"/>
+          <a:chExt cx="0" cy="0"/>
+        </a:xfrm>
+      </p:grpSpPr>
+      <p:sp>
+        <p:nvSpPr>
+          <p:cNvPr id="3" name="제목 1">
+            <a:extLst>
+              <a:ext uri="{FF2B5EF4-FFF2-40B4-BE49-F238E27FC236}">
+                <a16:creationId xmlns:a16="http://schemas.microsoft.com/office/drawing/2014/main" id="{89FAE5FF-C735-D784-1683-049AAD3021F3}"/>
+              </a:ext>
+            </a:extLst>
+          </p:cNvPr>
+          <p:cNvSpPr txBox="1">
+            <a:spLocks/>
+          </p:cNvSpPr>
+          <p:nvPr/>
+        </p:nvSpPr>
+        <p:spPr>
+          <a:xfrm>
+            <a:off x="475645" y="481983"/>
+            <a:ext cx="10353762" cy="766439"/>
+          </a:xfrm>
+          <a:prstGeom prst="rect">
+            <a:avLst/>
+          </a:prstGeom>
+        </p:spPr>
+        <p:txBody>
+          <a:bodyPr vert="horz" lIns="91440" tIns="45720" rIns="91440" bIns="45720" rtlCol="0" anchor="ctr">
+            <a:normAutofit/>
+          </a:bodyPr>
+          <a:lstStyle>
+            <a:lvl1pPr algn="ctr" defTabSz="914400" rtl="0" eaLnBrk="1" latinLnBrk="1" hangingPunct="1">
+              <a:lnSpc>
+                <a:spcPct val="90000"/>
+              </a:lnSpc>
+              <a:spcBef>
+                <a:spcPct val="0"/>
+              </a:spcBef>
+              <a:buNone/>
+              <a:defRPr sz="3200" kern="1200" cap="all" baseline="0">
+                <a:solidFill>
+                  <a:schemeClr val="tx1"/>
+                </a:solidFill>
+                <a:effectLst/>
+                <a:latin typeface="Batang" panose="02030600000101010101" pitchFamily="18" charset="-127"/>
+                <a:ea typeface="Batang" panose="02030600000101010101" pitchFamily="18" charset="-127"/>
+                <a:cs typeface="+mj-cs"/>
+              </a:defRPr>
+            </a:lvl1pPr>
+          </a:lstStyle>
+          <a:p>
+            <a:pPr algn="l"/>
+            <a:r>
+              <a:rPr lang="en-US" altLang="ko-KR" sz="2800" cap="none" dirty="0">
+                <a:solidFill>
+                  <a:schemeClr val="bg2">
+                    <a:lumMod val="25000"/>
+                  </a:schemeClr>
+                </a:solidFill>
+                <a:latin typeface="D2Coding" panose="020B0609020101020101" pitchFamily="49" charset="-127"/>
+                <a:ea typeface="D2Coding" panose="020B0609020101020101" pitchFamily="49" charset="-127"/>
+                <a:cs typeface="Segoe UI Light" panose="020B0502040204020203" pitchFamily="34" charset="0"/>
+              </a:rPr>
+              <a:t>docker hub</a:t>
+            </a:r>
+            <a:endParaRPr lang="ko-KR" altLang="en-US" sz="2800" cap="none" dirty="0">
+              <a:solidFill>
+                <a:schemeClr val="bg2">
+                  <a:lumMod val="25000"/>
+                </a:schemeClr>
+              </a:solidFill>
+              <a:latin typeface="D2Coding" panose="020B0609020101020101" pitchFamily="49" charset="-127"/>
+              <a:ea typeface="D2Coding" panose="020B0609020101020101" pitchFamily="49" charset="-127"/>
+              <a:cs typeface="Segoe UI Light" panose="020B0502040204020203" pitchFamily="34" charset="0"/>
+            </a:endParaRPr>
+          </a:p>
+        </p:txBody>
+      </p:sp>
+      <p:sp>
+        <p:nvSpPr>
+          <p:cNvPr id="8" name="TextBox 7">
+            <a:extLst>
+              <a:ext uri="{FF2B5EF4-FFF2-40B4-BE49-F238E27FC236}">
+                <a16:creationId xmlns:a16="http://schemas.microsoft.com/office/drawing/2014/main" id="{45495112-72D8-FE99-8BD9-68DA6A7D836B}"/>
+              </a:ext>
+            </a:extLst>
+          </p:cNvPr>
+          <p:cNvSpPr txBox="1"/>
+          <p:nvPr/>
+        </p:nvSpPr>
+        <p:spPr>
+          <a:xfrm>
+            <a:off x="744020" y="3244334"/>
+            <a:ext cx="184731" cy="369332"/>
+          </a:xfrm>
+          <a:prstGeom prst="rect">
+            <a:avLst/>
+          </a:prstGeom>
+          <a:noFill/>
+        </p:spPr>
+        <p:txBody>
+          <a:bodyPr wrap="none" rtlCol="0">
+            <a:spAutoFit/>
+          </a:bodyPr>
+          <a:lstStyle/>
+          <a:p>
+            <a:endParaRPr lang="ko-KR" altLang="en-US" dirty="0">
+              <a:solidFill>
+                <a:schemeClr val="accent5"/>
+              </a:solidFill>
+              <a:latin typeface="D2Coding" panose="020B0609020101020101" pitchFamily="49" charset="-127"/>
+              <a:ea typeface="D2Coding" panose="020B0609020101020101" pitchFamily="49" charset="-127"/>
+            </a:endParaRPr>
+          </a:p>
+        </p:txBody>
+      </p:sp>
+      <p:sp>
+        <p:nvSpPr>
+          <p:cNvPr id="2" name="슬라이드 번호 개체 틀 3">
+            <a:extLst>
+              <a:ext uri="{FF2B5EF4-FFF2-40B4-BE49-F238E27FC236}">
+                <a16:creationId xmlns:a16="http://schemas.microsoft.com/office/drawing/2014/main" id="{5495CDA8-7D3C-3E63-9A35-7918D2A62E68}"/>
+              </a:ext>
+            </a:extLst>
+          </p:cNvPr>
+          <p:cNvSpPr txBox="1">
+            <a:spLocks/>
+          </p:cNvSpPr>
+          <p:nvPr/>
+        </p:nvSpPr>
+        <p:spPr>
+          <a:xfrm>
+            <a:off x="11180761" y="299420"/>
+            <a:ext cx="753545" cy="365125"/>
+          </a:xfrm>
+          <a:prstGeom prst="rect">
+            <a:avLst/>
+          </a:prstGeom>
+        </p:spPr>
+        <p:txBody>
+          <a:bodyPr vert="horz" lIns="91440" tIns="45720" rIns="91440" bIns="45720" rtlCol="0" anchor="ctr"/>
+          <a:lstStyle>
+            <a:defPPr rtl="0">
+              <a:defRPr lang="ko-KR"/>
+            </a:defPPr>
+            <a:lvl1pPr marL="0" algn="r" defTabSz="914400" rtl="0" eaLnBrk="1" latinLnBrk="0" hangingPunct="1">
+              <a:defRPr sz="1200" kern="1200" baseline="0">
+                <a:solidFill>
+                  <a:schemeClr val="tx1">
+                    <a:lumMod val="65000"/>
+                    <a:lumOff val="35000"/>
+                  </a:schemeClr>
+                </a:solidFill>
+                <a:latin typeface="맑은 고딕" panose="020B0503020000020004" pitchFamily="50" charset="-127"/>
+                <a:ea typeface="맑은 고딕" panose="020B0503020000020004" pitchFamily="50" charset="-127"/>
+                <a:cs typeface="+mn-cs"/>
+              </a:defRPr>
+            </a:lvl1pPr>
+            <a:lvl2pPr marL="457200" algn="l" defTabSz="914400" rtl="0" eaLnBrk="1" latinLnBrk="0" hangingPunct="1">
+              <a:defRPr sz="1800" kern="1200">
+                <a:solidFill>
+                  <a:schemeClr val="tx1"/>
+                </a:solidFill>
+                <a:latin typeface="+mn-lt"/>
+                <a:ea typeface="+mn-ea"/>
+                <a:cs typeface="+mn-cs"/>
+              </a:defRPr>
+            </a:lvl2pPr>
+            <a:lvl3pPr marL="914400" algn="l" defTabSz="914400" rtl="0" eaLnBrk="1" latinLnBrk="0" hangingPunct="1">
+              <a:defRPr sz="1800" kern="1200">
+                <a:solidFill>
+                  <a:schemeClr val="tx1"/>
+                </a:solidFill>
+                <a:latin typeface="+mn-lt"/>
+                <a:ea typeface="+mn-ea"/>
+                <a:cs typeface="+mn-cs"/>
+              </a:defRPr>
+            </a:lvl3pPr>
+            <a:lvl4pPr marL="1371600" algn="l" defTabSz="914400" rtl="0" eaLnBrk="1" latinLnBrk="0" hangingPunct="1">
+              <a:defRPr sz="1800" kern="1200">
+                <a:solidFill>
+                  <a:schemeClr val="tx1"/>
+                </a:solidFill>
+                <a:latin typeface="+mn-lt"/>
+                <a:ea typeface="+mn-ea"/>
+                <a:cs typeface="+mn-cs"/>
+              </a:defRPr>
+            </a:lvl4pPr>
+            <a:lvl5pPr marL="1828800" algn="l" defTabSz="914400" rtl="0" eaLnBrk="1" latinLnBrk="0" hangingPunct="1">
+              <a:defRPr sz="1800" kern="1200">
+                <a:solidFill>
+                  <a:schemeClr val="tx1"/>
+                </a:solidFill>
+                <a:latin typeface="+mn-lt"/>
+                <a:ea typeface="+mn-ea"/>
+                <a:cs typeface="+mn-cs"/>
+              </a:defRPr>
+            </a:lvl5pPr>
+            <a:lvl6pPr marL="2286000" algn="l" defTabSz="914400" rtl="0" eaLnBrk="1" latinLnBrk="0" hangingPunct="1">
+              <a:defRPr sz="1800" kern="1200">
+                <a:solidFill>
+                  <a:schemeClr val="tx1"/>
+                </a:solidFill>
+                <a:latin typeface="+mn-lt"/>
+                <a:ea typeface="+mn-ea"/>
+                <a:cs typeface="+mn-cs"/>
+              </a:defRPr>
+            </a:lvl6pPr>
+            <a:lvl7pPr marL="2743200" algn="l" defTabSz="914400" rtl="0" eaLnBrk="1" latinLnBrk="0" hangingPunct="1">
+              <a:defRPr sz="1800" kern="1200">
+                <a:solidFill>
+                  <a:schemeClr val="tx1"/>
+                </a:solidFill>
+                <a:latin typeface="+mn-lt"/>
+                <a:ea typeface="+mn-ea"/>
+                <a:cs typeface="+mn-cs"/>
+              </a:defRPr>
+            </a:lvl7pPr>
+            <a:lvl8pPr marL="3200400" algn="l" defTabSz="914400" rtl="0" eaLnBrk="1" latinLnBrk="0" hangingPunct="1">
+              <a:defRPr sz="1800" kern="1200">
+                <a:solidFill>
+                  <a:schemeClr val="tx1"/>
+                </a:solidFill>
+                <a:latin typeface="+mn-lt"/>
+                <a:ea typeface="+mn-ea"/>
+                <a:cs typeface="+mn-cs"/>
+              </a:defRPr>
+            </a:lvl8pPr>
+            <a:lvl9pPr marL="3657600" algn="l" defTabSz="914400" rtl="0" eaLnBrk="1" latinLnBrk="0" hangingPunct="1">
+              <a:defRPr sz="1800" kern="1200">
+                <a:solidFill>
+                  <a:schemeClr val="tx1"/>
+                </a:solidFill>
+                <a:latin typeface="+mn-lt"/>
+                <a:ea typeface="+mn-ea"/>
+                <a:cs typeface="+mn-cs"/>
+              </a:defRPr>
+            </a:lvl9pPr>
+          </a:lstStyle>
+          <a:p>
+            <a:fld id="{D57F1E4F-1CFF-5643-939E-217C01CDF565}" type="slidenum">
+              <a:rPr lang="en-US" b="1" smtClean="0">
+                <a:latin typeface="Segoe UI Emoji" panose="020B0502040204020203" pitchFamily="34" charset="0"/>
+                <a:ea typeface="Segoe UI Emoji" panose="020B0502040204020203" pitchFamily="34" charset="0"/>
+              </a:rPr>
+              <a:pPr/>
+              <a:t>14</a:t>
+            </a:fld>
+            <a:endParaRPr lang="en-US" b="1" dirty="0">
+              <a:latin typeface="Segoe UI Emoji" panose="020B0502040204020203" pitchFamily="34" charset="0"/>
+              <a:ea typeface="Segoe UI Emoji" panose="020B0502040204020203" pitchFamily="34" charset="0"/>
+            </a:endParaRPr>
+          </a:p>
+        </p:txBody>
+      </p:sp>
+      <p:pic>
+        <p:nvPicPr>
+          <p:cNvPr id="10" name="그래픽 9" descr="수영">
+            <a:extLst>
+              <a:ext uri="{FF2B5EF4-FFF2-40B4-BE49-F238E27FC236}">
+                <a16:creationId xmlns:a16="http://schemas.microsoft.com/office/drawing/2014/main" id="{8C62E094-C837-DF31-CAFF-5547EF2FE65B}"/>
+              </a:ext>
+            </a:extLst>
+          </p:cNvPr>
+          <p:cNvPicPr>
+            <a:picLocks noChangeAspect="1"/>
+          </p:cNvPicPr>
+          <p:nvPr/>
+        </p:nvPicPr>
+        <p:blipFill>
+          <a:blip r:embed="rId2">
+            <a:extLst>
+              <a:ext uri="{96DAC541-7B7A-43D3-8B79-37D633B846F1}">
+                <asvg:svgBlip xmlns:asvg="http://schemas.microsoft.com/office/drawing/2016/SVG/main" r:embed="rId3"/>
+              </a:ext>
+            </a:extLst>
+          </a:blip>
+          <a:stretch>
+            <a:fillRect/>
+          </a:stretch>
+        </p:blipFill>
+        <p:spPr>
+          <a:xfrm>
+            <a:off x="10685980" y="373930"/>
+            <a:ext cx="914400" cy="914400"/>
+          </a:xfrm>
+          <a:prstGeom prst="rect">
+            <a:avLst/>
+          </a:prstGeom>
+        </p:spPr>
+      </p:pic>
+      <p:pic>
+        <p:nvPicPr>
+          <p:cNvPr id="12" name="그림 11">
+            <a:extLst>
+              <a:ext uri="{FF2B5EF4-FFF2-40B4-BE49-F238E27FC236}">
+                <a16:creationId xmlns:a16="http://schemas.microsoft.com/office/drawing/2014/main" id="{C39196BC-0F86-B1BC-1AC1-973A59B2FB25}"/>
+              </a:ext>
+            </a:extLst>
+          </p:cNvPr>
+          <p:cNvPicPr>
+            <a:picLocks noChangeAspect="1"/>
+          </p:cNvPicPr>
+          <p:nvPr/>
+        </p:nvPicPr>
+        <p:blipFill>
+          <a:blip r:embed="rId4"/>
+          <a:stretch>
+            <a:fillRect/>
+          </a:stretch>
+        </p:blipFill>
+        <p:spPr>
+          <a:xfrm>
+            <a:off x="1527038" y="1356475"/>
+            <a:ext cx="8250976" cy="5068549"/>
+          </a:xfrm>
+          <a:prstGeom prst="rect">
+            <a:avLst/>
+          </a:prstGeom>
+        </p:spPr>
+      </p:pic>
+    </p:spTree>
+    <p:extLst>
+      <p:ext uri="{BB962C8B-B14F-4D97-AF65-F5344CB8AC3E}">
+        <p14:creationId xmlns:p14="http://schemas.microsoft.com/office/powerpoint/2010/main" val="3177772068"/>
+      </p:ext>
+    </p:extLst>
+  </p:cSld>
+  <p:clrMapOvr>
+    <a:masterClrMapping/>
+  </p:clrMapOvr>
+</p:sld>
+</file>
+
+<file path=ppt/slides/slide15.xml><?xml version="1.0" encoding="utf-8"?>
+<p:sld xmlns:a="http://schemas.openxmlformats.org/drawingml/2006/main" xmlns:r="http://schemas.openxmlformats.org/officeDocument/2006/relationships" xmlns:p="http://schemas.openxmlformats.org/presentationml/2006/main">
+  <p:cSld>
+    <p:spTree>
+      <p:nvGrpSpPr>
+        <p:cNvPr id="1" name="">
+          <a:extLst>
+            <a:ext uri="{FF2B5EF4-FFF2-40B4-BE49-F238E27FC236}">
+              <a16:creationId xmlns:a16="http://schemas.microsoft.com/office/drawing/2014/main" id="{7795FDCF-A514-1757-9A1C-523CEC8B94DA}"/>
+            </a:ext>
+          </a:extLst>
+        </p:cNvPr>
+        <p:cNvGrpSpPr/>
+        <p:nvPr/>
+      </p:nvGrpSpPr>
+      <p:grpSpPr>
+        <a:xfrm>
+          <a:off x="0" y="0"/>
+          <a:ext cx="0" cy="0"/>
+          <a:chOff x="0" y="0"/>
+          <a:chExt cx="0" cy="0"/>
+        </a:xfrm>
+      </p:grpSpPr>
+      <p:sp>
+        <p:nvSpPr>
+          <p:cNvPr id="3" name="제목 1">
+            <a:extLst>
+              <a:ext uri="{FF2B5EF4-FFF2-40B4-BE49-F238E27FC236}">
+                <a16:creationId xmlns:a16="http://schemas.microsoft.com/office/drawing/2014/main" id="{8C103821-8849-6408-57BE-E15F46AA90E1}"/>
+              </a:ext>
+            </a:extLst>
+          </p:cNvPr>
+          <p:cNvSpPr txBox="1">
+            <a:spLocks/>
+          </p:cNvSpPr>
+          <p:nvPr/>
+        </p:nvSpPr>
+        <p:spPr>
+          <a:xfrm>
+            <a:off x="475645" y="481983"/>
+            <a:ext cx="10353762" cy="766439"/>
+          </a:xfrm>
+          <a:prstGeom prst="rect">
+            <a:avLst/>
+          </a:prstGeom>
+        </p:spPr>
+        <p:txBody>
+          <a:bodyPr vert="horz" lIns="91440" tIns="45720" rIns="91440" bIns="45720" rtlCol="0" anchor="ctr">
+            <a:normAutofit/>
+          </a:bodyPr>
+          <a:lstStyle>
+            <a:lvl1pPr algn="ctr" defTabSz="914400" rtl="0" eaLnBrk="1" latinLnBrk="1" hangingPunct="1">
+              <a:lnSpc>
+                <a:spcPct val="90000"/>
+              </a:lnSpc>
+              <a:spcBef>
+                <a:spcPct val="0"/>
+              </a:spcBef>
+              <a:buNone/>
+              <a:defRPr sz="3200" kern="1200" cap="all" baseline="0">
+                <a:solidFill>
+                  <a:schemeClr val="tx1"/>
+                </a:solidFill>
+                <a:effectLst/>
+                <a:latin typeface="Batang" panose="02030600000101010101" pitchFamily="18" charset="-127"/>
+                <a:ea typeface="Batang" panose="02030600000101010101" pitchFamily="18" charset="-127"/>
+                <a:cs typeface="+mj-cs"/>
+              </a:defRPr>
+            </a:lvl1pPr>
+          </a:lstStyle>
+          <a:p>
+            <a:pPr algn="l"/>
+            <a:r>
+              <a:rPr lang="en-US" altLang="ko-KR" sz="2800" cap="none" dirty="0">
+                <a:solidFill>
+                  <a:schemeClr val="bg2">
+                    <a:lumMod val="25000"/>
+                  </a:schemeClr>
+                </a:solidFill>
+                <a:latin typeface="D2Coding" panose="020B0609020101020101" pitchFamily="49" charset="-127"/>
+                <a:ea typeface="D2Coding" panose="020B0609020101020101" pitchFamily="49" charset="-127"/>
+                <a:cs typeface="Segoe UI Light" panose="020B0502040204020203" pitchFamily="34" charset="0"/>
+              </a:rPr>
+              <a:t>docker run hello-world</a:t>
+            </a:r>
+            <a:endParaRPr lang="ko-KR" altLang="en-US" sz="2800" cap="none" dirty="0">
+              <a:solidFill>
+                <a:schemeClr val="bg2">
+                  <a:lumMod val="25000"/>
+                </a:schemeClr>
+              </a:solidFill>
+              <a:latin typeface="D2Coding" panose="020B0609020101020101" pitchFamily="49" charset="-127"/>
+              <a:ea typeface="D2Coding" panose="020B0609020101020101" pitchFamily="49" charset="-127"/>
+              <a:cs typeface="Segoe UI Light" panose="020B0502040204020203" pitchFamily="34" charset="0"/>
+            </a:endParaRPr>
+          </a:p>
+        </p:txBody>
+      </p:sp>
+      <p:sp>
+        <p:nvSpPr>
+          <p:cNvPr id="8" name="TextBox 7">
+            <a:extLst>
+              <a:ext uri="{FF2B5EF4-FFF2-40B4-BE49-F238E27FC236}">
+                <a16:creationId xmlns:a16="http://schemas.microsoft.com/office/drawing/2014/main" id="{8FF93CA0-8854-EE15-F1F5-D29149C7B62D}"/>
+              </a:ext>
+            </a:extLst>
+          </p:cNvPr>
+          <p:cNvSpPr txBox="1"/>
+          <p:nvPr/>
+        </p:nvSpPr>
+        <p:spPr>
+          <a:xfrm>
+            <a:off x="744020" y="3244334"/>
+            <a:ext cx="184731" cy="369332"/>
+          </a:xfrm>
+          <a:prstGeom prst="rect">
+            <a:avLst/>
+          </a:prstGeom>
+          <a:noFill/>
+        </p:spPr>
+        <p:txBody>
+          <a:bodyPr wrap="none" rtlCol="0">
+            <a:spAutoFit/>
+          </a:bodyPr>
+          <a:lstStyle/>
+          <a:p>
+            <a:endParaRPr lang="ko-KR" altLang="en-US" dirty="0">
+              <a:solidFill>
+                <a:schemeClr val="accent5"/>
+              </a:solidFill>
+              <a:latin typeface="D2Coding" panose="020B0609020101020101" pitchFamily="49" charset="-127"/>
+              <a:ea typeface="D2Coding" panose="020B0609020101020101" pitchFamily="49" charset="-127"/>
+            </a:endParaRPr>
+          </a:p>
+        </p:txBody>
+      </p:sp>
+      <p:sp>
+        <p:nvSpPr>
+          <p:cNvPr id="2" name="슬라이드 번호 개체 틀 3">
+            <a:extLst>
+              <a:ext uri="{FF2B5EF4-FFF2-40B4-BE49-F238E27FC236}">
+                <a16:creationId xmlns:a16="http://schemas.microsoft.com/office/drawing/2014/main" id="{8A36BF2F-A6AE-22B4-7A69-1EB160D2DB47}"/>
+              </a:ext>
+            </a:extLst>
+          </p:cNvPr>
+          <p:cNvSpPr txBox="1">
+            <a:spLocks/>
+          </p:cNvSpPr>
+          <p:nvPr/>
+        </p:nvSpPr>
+        <p:spPr>
+          <a:xfrm>
+            <a:off x="11180761" y="299420"/>
+            <a:ext cx="753545" cy="365125"/>
+          </a:xfrm>
+          <a:prstGeom prst="rect">
+            <a:avLst/>
+          </a:prstGeom>
+        </p:spPr>
+        <p:txBody>
+          <a:bodyPr vert="horz" lIns="91440" tIns="45720" rIns="91440" bIns="45720" rtlCol="0" anchor="ctr"/>
+          <a:lstStyle>
+            <a:defPPr rtl="0">
+              <a:defRPr lang="ko-KR"/>
+            </a:defPPr>
+            <a:lvl1pPr marL="0" algn="r" defTabSz="914400" rtl="0" eaLnBrk="1" latinLnBrk="0" hangingPunct="1">
+              <a:defRPr sz="1200" kern="1200" baseline="0">
+                <a:solidFill>
+                  <a:schemeClr val="tx1">
+                    <a:lumMod val="65000"/>
+                    <a:lumOff val="35000"/>
+                  </a:schemeClr>
+                </a:solidFill>
+                <a:latin typeface="맑은 고딕" panose="020B0503020000020004" pitchFamily="50" charset="-127"/>
+                <a:ea typeface="맑은 고딕" panose="020B0503020000020004" pitchFamily="50" charset="-127"/>
+                <a:cs typeface="+mn-cs"/>
+              </a:defRPr>
+            </a:lvl1pPr>
+            <a:lvl2pPr marL="457200" algn="l" defTabSz="914400" rtl="0" eaLnBrk="1" latinLnBrk="0" hangingPunct="1">
+              <a:defRPr sz="1800" kern="1200">
+                <a:solidFill>
+                  <a:schemeClr val="tx1"/>
+                </a:solidFill>
+                <a:latin typeface="+mn-lt"/>
+                <a:ea typeface="+mn-ea"/>
+                <a:cs typeface="+mn-cs"/>
+              </a:defRPr>
+            </a:lvl2pPr>
+            <a:lvl3pPr marL="914400" algn="l" defTabSz="914400" rtl="0" eaLnBrk="1" latinLnBrk="0" hangingPunct="1">
+              <a:defRPr sz="1800" kern="1200">
+                <a:solidFill>
+                  <a:schemeClr val="tx1"/>
+                </a:solidFill>
+                <a:latin typeface="+mn-lt"/>
+                <a:ea typeface="+mn-ea"/>
+                <a:cs typeface="+mn-cs"/>
+              </a:defRPr>
+            </a:lvl3pPr>
+            <a:lvl4pPr marL="1371600" algn="l" defTabSz="914400" rtl="0" eaLnBrk="1" latinLnBrk="0" hangingPunct="1">
+              <a:defRPr sz="1800" kern="1200">
+                <a:solidFill>
+                  <a:schemeClr val="tx1"/>
+                </a:solidFill>
+                <a:latin typeface="+mn-lt"/>
+                <a:ea typeface="+mn-ea"/>
+                <a:cs typeface="+mn-cs"/>
+              </a:defRPr>
+            </a:lvl4pPr>
+            <a:lvl5pPr marL="1828800" algn="l" defTabSz="914400" rtl="0" eaLnBrk="1" latinLnBrk="0" hangingPunct="1">
+              <a:defRPr sz="1800" kern="1200">
+                <a:solidFill>
+                  <a:schemeClr val="tx1"/>
+                </a:solidFill>
+                <a:latin typeface="+mn-lt"/>
+                <a:ea typeface="+mn-ea"/>
+                <a:cs typeface="+mn-cs"/>
+              </a:defRPr>
+            </a:lvl5pPr>
+            <a:lvl6pPr marL="2286000" algn="l" defTabSz="914400" rtl="0" eaLnBrk="1" latinLnBrk="0" hangingPunct="1">
+              <a:defRPr sz="1800" kern="1200">
+                <a:solidFill>
+                  <a:schemeClr val="tx1"/>
+                </a:solidFill>
+                <a:latin typeface="+mn-lt"/>
+                <a:ea typeface="+mn-ea"/>
+                <a:cs typeface="+mn-cs"/>
+              </a:defRPr>
+            </a:lvl6pPr>
+            <a:lvl7pPr marL="2743200" algn="l" defTabSz="914400" rtl="0" eaLnBrk="1" latinLnBrk="0" hangingPunct="1">
+              <a:defRPr sz="1800" kern="1200">
+                <a:solidFill>
+                  <a:schemeClr val="tx1"/>
+                </a:solidFill>
+                <a:latin typeface="+mn-lt"/>
+                <a:ea typeface="+mn-ea"/>
+                <a:cs typeface="+mn-cs"/>
+              </a:defRPr>
+            </a:lvl7pPr>
+            <a:lvl8pPr marL="3200400" algn="l" defTabSz="914400" rtl="0" eaLnBrk="1" latinLnBrk="0" hangingPunct="1">
+              <a:defRPr sz="1800" kern="1200">
+                <a:solidFill>
+                  <a:schemeClr val="tx1"/>
+                </a:solidFill>
+                <a:latin typeface="+mn-lt"/>
+                <a:ea typeface="+mn-ea"/>
+                <a:cs typeface="+mn-cs"/>
+              </a:defRPr>
+            </a:lvl8pPr>
+            <a:lvl9pPr marL="3657600" algn="l" defTabSz="914400" rtl="0" eaLnBrk="1" latinLnBrk="0" hangingPunct="1">
+              <a:defRPr sz="1800" kern="1200">
+                <a:solidFill>
+                  <a:schemeClr val="tx1"/>
+                </a:solidFill>
+                <a:latin typeface="+mn-lt"/>
+                <a:ea typeface="+mn-ea"/>
+                <a:cs typeface="+mn-cs"/>
+              </a:defRPr>
+            </a:lvl9pPr>
+          </a:lstStyle>
+          <a:p>
+            <a:fld id="{D57F1E4F-1CFF-5643-939E-217C01CDF565}" type="slidenum">
+              <a:rPr lang="en-US" b="1" smtClean="0">
+                <a:latin typeface="Segoe UI Emoji" panose="020B0502040204020203" pitchFamily="34" charset="0"/>
+                <a:ea typeface="Segoe UI Emoji" panose="020B0502040204020203" pitchFamily="34" charset="0"/>
+              </a:rPr>
+              <a:pPr/>
+              <a:t>15</a:t>
+            </a:fld>
+            <a:endParaRPr lang="en-US" b="1" dirty="0">
+              <a:latin typeface="Segoe UI Emoji" panose="020B0502040204020203" pitchFamily="34" charset="0"/>
+              <a:ea typeface="Segoe UI Emoji" panose="020B0502040204020203" pitchFamily="34" charset="0"/>
+            </a:endParaRPr>
+          </a:p>
+        </p:txBody>
+      </p:sp>
+      <p:pic>
+        <p:nvPicPr>
+          <p:cNvPr id="10" name="그래픽 9" descr="수영">
+            <a:extLst>
+              <a:ext uri="{FF2B5EF4-FFF2-40B4-BE49-F238E27FC236}">
+                <a16:creationId xmlns:a16="http://schemas.microsoft.com/office/drawing/2014/main" id="{E3FF34DC-DBC1-9AB0-4F91-1857C2F5D47F}"/>
+              </a:ext>
+            </a:extLst>
+          </p:cNvPr>
+          <p:cNvPicPr>
+            <a:picLocks noChangeAspect="1"/>
+          </p:cNvPicPr>
+          <p:nvPr/>
+        </p:nvPicPr>
+        <p:blipFill>
+          <a:blip r:embed="rId2">
+            <a:extLst>
+              <a:ext uri="{96DAC541-7B7A-43D3-8B79-37D633B846F1}">
+                <asvg:svgBlip xmlns:asvg="http://schemas.microsoft.com/office/drawing/2016/SVG/main" r:embed="rId3"/>
+              </a:ext>
+            </a:extLst>
+          </a:blip>
+          <a:stretch>
+            <a:fillRect/>
+          </a:stretch>
+        </p:blipFill>
+        <p:spPr>
+          <a:xfrm>
+            <a:off x="10685980" y="373930"/>
+            <a:ext cx="914400" cy="914400"/>
+          </a:xfrm>
+          <a:prstGeom prst="rect">
+            <a:avLst/>
+          </a:prstGeom>
+        </p:spPr>
+      </p:pic>
+      <p:pic>
+        <p:nvPicPr>
+          <p:cNvPr id="9" name="그림 8">
+            <a:extLst>
+              <a:ext uri="{FF2B5EF4-FFF2-40B4-BE49-F238E27FC236}">
+                <a16:creationId xmlns:a16="http://schemas.microsoft.com/office/drawing/2014/main" id="{EC65908D-1062-EFC7-8AD9-484EF86D379E}"/>
+              </a:ext>
+            </a:extLst>
+          </p:cNvPr>
+          <p:cNvPicPr>
+            <a:picLocks noChangeAspect="1"/>
+          </p:cNvPicPr>
+          <p:nvPr/>
+        </p:nvPicPr>
+        <p:blipFill>
+          <a:blip r:embed="rId4"/>
+          <a:stretch>
+            <a:fillRect/>
+          </a:stretch>
+        </p:blipFill>
+        <p:spPr>
+          <a:xfrm>
+            <a:off x="579565" y="1369484"/>
+            <a:ext cx="7135685" cy="5006533"/>
+          </a:xfrm>
+          <a:prstGeom prst="rect">
+            <a:avLst/>
+          </a:prstGeom>
+        </p:spPr>
+      </p:pic>
+      <p:sp>
+        <p:nvSpPr>
+          <p:cNvPr id="7" name="설명선: 굽은 선 6">
+            <a:extLst>
+              <a:ext uri="{FF2B5EF4-FFF2-40B4-BE49-F238E27FC236}">
+                <a16:creationId xmlns:a16="http://schemas.microsoft.com/office/drawing/2014/main" id="{BBBC5263-FFEF-C04E-AD21-EE8282FE1DE2}"/>
+              </a:ext>
+            </a:extLst>
+          </p:cNvPr>
+          <p:cNvSpPr/>
+          <p:nvPr/>
+        </p:nvSpPr>
+        <p:spPr>
+          <a:xfrm>
+            <a:off x="7879705" y="1398032"/>
+            <a:ext cx="3901023" cy="2215634"/>
+          </a:xfrm>
+          <a:prstGeom prst="borderCallout2">
+            <a:avLst/>
+          </a:prstGeom>
+          <a:ln>
+            <a:solidFill>
+              <a:srgbClr val="FFFF00"/>
+            </a:solidFill>
+            <a:headEnd type="none" w="med" len="med"/>
+            <a:tailEnd type="arrow" w="med" len="med"/>
+          </a:ln>
+        </p:spPr>
+        <p:style>
+          <a:lnRef idx="2">
+            <a:schemeClr val="accent1">
+              <a:shade val="15000"/>
+            </a:schemeClr>
+          </a:lnRef>
+          <a:fillRef idx="1">
+            <a:schemeClr val="accent1"/>
+          </a:fillRef>
+          <a:effectRef idx="0">
+            <a:schemeClr val="accent1"/>
+          </a:effectRef>
+          <a:fontRef idx="minor">
+            <a:schemeClr val="lt1"/>
+          </a:fontRef>
+        </p:style>
+        <p:txBody>
+          <a:bodyPr rtlCol="0" anchor="ctr"/>
+          <a:lstStyle/>
+          <a:p>
+            <a:r>
+              <a:rPr lang="en-US" altLang="ko-KR" sz="1100" dirty="0">
+                <a:solidFill>
+                  <a:schemeClr val="bg1"/>
+                </a:solidFill>
+                <a:latin typeface="D2Coding" panose="020B0609020101020101" pitchFamily="49" charset="-127"/>
+                <a:ea typeface="D2Coding" panose="020B0609020101020101" pitchFamily="49" charset="-127"/>
+              </a:rPr>
+              <a:t>Hello from Docker! This message shows that your installation appears to be working correctly. </a:t>
+            </a:r>
+          </a:p>
+          <a:p>
+            <a:r>
+              <a:rPr lang="en-US" altLang="ko-KR" sz="1100" dirty="0">
+                <a:solidFill>
+                  <a:schemeClr val="bg1"/>
+                </a:solidFill>
+                <a:latin typeface="D2Coding" panose="020B0609020101020101" pitchFamily="49" charset="-127"/>
+                <a:ea typeface="D2Coding" panose="020B0609020101020101" pitchFamily="49" charset="-127"/>
+              </a:rPr>
+              <a:t>To generate this message, Docker took the following steps: </a:t>
+            </a:r>
+          </a:p>
+          <a:p>
+            <a:pPr marL="342900" indent="-342900">
+              <a:buAutoNum type="arabicPeriod"/>
+            </a:pPr>
+            <a:r>
+              <a:rPr lang="en-US" altLang="ko-KR" sz="1100" dirty="0">
+                <a:solidFill>
+                  <a:schemeClr val="bg1"/>
+                </a:solidFill>
+                <a:latin typeface="D2Coding" panose="020B0609020101020101" pitchFamily="49" charset="-127"/>
+                <a:ea typeface="D2Coding" panose="020B0609020101020101" pitchFamily="49" charset="-127"/>
+              </a:rPr>
+              <a:t>The Docker client contacted the Docker daemon. </a:t>
+            </a:r>
+          </a:p>
+          <a:p>
+            <a:pPr marL="342900" indent="-342900">
+              <a:buAutoNum type="arabicPeriod"/>
+            </a:pPr>
+            <a:r>
+              <a:rPr lang="en-US" altLang="ko-KR" sz="1100" dirty="0">
+                <a:solidFill>
+                  <a:schemeClr val="bg1"/>
+                </a:solidFill>
+                <a:latin typeface="D2Coding" panose="020B0609020101020101" pitchFamily="49" charset="-127"/>
+                <a:ea typeface="D2Coding" panose="020B0609020101020101" pitchFamily="49" charset="-127"/>
+              </a:rPr>
+              <a:t>The Docker daemon pulled the "hello-world" image from the Docker Hub. </a:t>
+            </a:r>
+          </a:p>
+          <a:p>
+            <a:pPr marL="342900" indent="-342900">
+              <a:buAutoNum type="arabicPeriod"/>
+            </a:pPr>
+            <a:r>
+              <a:rPr lang="en-US" altLang="ko-KR" sz="1100" dirty="0">
+                <a:solidFill>
+                  <a:schemeClr val="bg1"/>
+                </a:solidFill>
+                <a:latin typeface="D2Coding" panose="020B0609020101020101" pitchFamily="49" charset="-127"/>
+                <a:ea typeface="D2Coding" panose="020B0609020101020101" pitchFamily="49" charset="-127"/>
+              </a:rPr>
+              <a:t>The Docker daemon created a new container from that image... </a:t>
+            </a:r>
+          </a:p>
+          <a:p>
+            <a:pPr marL="342900" indent="-342900">
+              <a:buAutoNum type="arabicPeriod"/>
+            </a:pPr>
+            <a:r>
+              <a:rPr lang="en-US" altLang="ko-KR" sz="1100" dirty="0">
+                <a:solidFill>
+                  <a:schemeClr val="bg1"/>
+                </a:solidFill>
+                <a:latin typeface="D2Coding" panose="020B0609020101020101" pitchFamily="49" charset="-127"/>
+                <a:ea typeface="D2Coding" panose="020B0609020101020101" pitchFamily="49" charset="-127"/>
+              </a:rPr>
+              <a:t>4. The Docker daemon streamed that output to the Docker client...</a:t>
+            </a:r>
+            <a:endParaRPr lang="ko-KR" altLang="en-US" sz="1100" dirty="0">
+              <a:solidFill>
+                <a:schemeClr val="bg1"/>
+              </a:solidFill>
+              <a:latin typeface="D2Coding" panose="020B0609020101020101" pitchFamily="49" charset="-127"/>
+              <a:ea typeface="D2Coding" panose="020B0609020101020101" pitchFamily="49" charset="-127"/>
+            </a:endParaRPr>
+          </a:p>
+          <a:p>
+            <a:pPr algn="ctr"/>
+            <a:endParaRPr lang="ko-KR" altLang="en-US" sz="1100" dirty="0"/>
+          </a:p>
+        </p:txBody>
+      </p:sp>
+    </p:spTree>
+    <p:extLst>
+      <p:ext uri="{BB962C8B-B14F-4D97-AF65-F5344CB8AC3E}">
+        <p14:creationId xmlns:p14="http://schemas.microsoft.com/office/powerpoint/2010/main" val="4014083624"/>
+      </p:ext>
+    </p:extLst>
+  </p:cSld>
+  <p:clrMapOvr>
+    <a:masterClrMapping/>
+  </p:clrMapOvr>
+</p:sld>
+</file>
+
+<file path=ppt/slides/slide16.xml><?xml version="1.0" encoding="utf-8"?>
+<p:sld xmlns:a="http://schemas.openxmlformats.org/drawingml/2006/main" xmlns:r="http://schemas.openxmlformats.org/officeDocument/2006/relationships" xmlns:p="http://schemas.openxmlformats.org/presentationml/2006/main">
+  <p:cSld>
+    <p:spTree>
+      <p:nvGrpSpPr>
+        <p:cNvPr id="1" name="">
+          <a:extLst>
+            <a:ext uri="{FF2B5EF4-FFF2-40B4-BE49-F238E27FC236}">
+              <a16:creationId xmlns:a16="http://schemas.microsoft.com/office/drawing/2014/main" id="{EE3A1AEC-5624-24F6-8379-98C1F8AD09BC}"/>
+            </a:ext>
+          </a:extLst>
+        </p:cNvPr>
+        <p:cNvGrpSpPr/>
+        <p:nvPr/>
+      </p:nvGrpSpPr>
+      <p:grpSpPr>
+        <a:xfrm>
+          <a:off x="0" y="0"/>
+          <a:ext cx="0" cy="0"/>
+          <a:chOff x="0" y="0"/>
+          <a:chExt cx="0" cy="0"/>
+        </a:xfrm>
+      </p:grpSpPr>
+      <p:sp>
+        <p:nvSpPr>
+          <p:cNvPr id="3" name="제목 1">
+            <a:extLst>
+              <a:ext uri="{FF2B5EF4-FFF2-40B4-BE49-F238E27FC236}">
+                <a16:creationId xmlns:a16="http://schemas.microsoft.com/office/drawing/2014/main" id="{7DBA8A3E-5CE9-E8C8-625D-3E19FD81B1D5}"/>
+              </a:ext>
+            </a:extLst>
+          </p:cNvPr>
+          <p:cNvSpPr txBox="1">
+            <a:spLocks/>
+          </p:cNvSpPr>
+          <p:nvPr/>
+        </p:nvSpPr>
+        <p:spPr>
+          <a:xfrm>
+            <a:off x="475645" y="481983"/>
+            <a:ext cx="10353762" cy="766439"/>
+          </a:xfrm>
+          <a:prstGeom prst="rect">
+            <a:avLst/>
+          </a:prstGeom>
+        </p:spPr>
+        <p:txBody>
+          <a:bodyPr vert="horz" lIns="91440" tIns="45720" rIns="91440" bIns="45720" rtlCol="0" anchor="ctr">
+            <a:normAutofit/>
+          </a:bodyPr>
+          <a:lstStyle>
+            <a:lvl1pPr algn="ctr" defTabSz="914400" rtl="0" eaLnBrk="1" latinLnBrk="1" hangingPunct="1">
+              <a:lnSpc>
+                <a:spcPct val="90000"/>
+              </a:lnSpc>
+              <a:spcBef>
+                <a:spcPct val="0"/>
+              </a:spcBef>
+              <a:buNone/>
+              <a:defRPr sz="3200" kern="1200" cap="all" baseline="0">
+                <a:solidFill>
+                  <a:schemeClr val="tx1"/>
+                </a:solidFill>
+                <a:effectLst/>
+                <a:latin typeface="Batang" panose="02030600000101010101" pitchFamily="18" charset="-127"/>
+                <a:ea typeface="Batang" panose="02030600000101010101" pitchFamily="18" charset="-127"/>
+                <a:cs typeface="+mj-cs"/>
+              </a:defRPr>
+            </a:lvl1pPr>
+          </a:lstStyle>
+          <a:p>
+            <a:pPr algn="l"/>
+            <a:r>
+              <a:rPr lang="en-US" altLang="ko-KR" sz="2800" cap="none" dirty="0">
+                <a:solidFill>
+                  <a:schemeClr val="bg2">
+                    <a:lumMod val="25000"/>
+                  </a:schemeClr>
+                </a:solidFill>
+                <a:latin typeface="D2Coding" panose="020B0609020101020101" pitchFamily="49" charset="-127"/>
+                <a:ea typeface="D2Coding" panose="020B0609020101020101" pitchFamily="49" charset="-127"/>
+                <a:cs typeface="Segoe UI Light" panose="020B0502040204020203" pitchFamily="34" charset="0"/>
+              </a:rPr>
+              <a:t>Install docker</a:t>
+            </a:r>
+            <a:endParaRPr lang="ko-KR" altLang="en-US" sz="2800" cap="none" dirty="0">
+              <a:solidFill>
+                <a:schemeClr val="bg2">
+                  <a:lumMod val="25000"/>
+                </a:schemeClr>
+              </a:solidFill>
+              <a:latin typeface="D2Coding" panose="020B0609020101020101" pitchFamily="49" charset="-127"/>
+              <a:ea typeface="D2Coding" panose="020B0609020101020101" pitchFamily="49" charset="-127"/>
+              <a:cs typeface="Segoe UI Light" panose="020B0502040204020203" pitchFamily="34" charset="0"/>
+            </a:endParaRPr>
+          </a:p>
+        </p:txBody>
+      </p:sp>
+      <p:sp>
+        <p:nvSpPr>
+          <p:cNvPr id="8" name="TextBox 7">
+            <a:extLst>
+              <a:ext uri="{FF2B5EF4-FFF2-40B4-BE49-F238E27FC236}">
+                <a16:creationId xmlns:a16="http://schemas.microsoft.com/office/drawing/2014/main" id="{6154D114-5F84-74D5-66B9-0D2969803647}"/>
+              </a:ext>
+            </a:extLst>
+          </p:cNvPr>
+          <p:cNvSpPr txBox="1"/>
+          <p:nvPr/>
+        </p:nvSpPr>
+        <p:spPr>
+          <a:xfrm>
+            <a:off x="744020" y="3244334"/>
+            <a:ext cx="184731" cy="369332"/>
+          </a:xfrm>
+          <a:prstGeom prst="rect">
+            <a:avLst/>
+          </a:prstGeom>
+          <a:noFill/>
+        </p:spPr>
+        <p:txBody>
+          <a:bodyPr wrap="none" rtlCol="0">
+            <a:spAutoFit/>
+          </a:bodyPr>
+          <a:lstStyle/>
+          <a:p>
+            <a:endParaRPr lang="ko-KR" altLang="en-US" dirty="0">
+              <a:solidFill>
+                <a:schemeClr val="accent5"/>
+              </a:solidFill>
+              <a:latin typeface="D2Coding" panose="020B0609020101020101" pitchFamily="49" charset="-127"/>
+              <a:ea typeface="D2Coding" panose="020B0609020101020101" pitchFamily="49" charset="-127"/>
+            </a:endParaRPr>
+          </a:p>
+        </p:txBody>
+      </p:sp>
+      <p:sp>
+        <p:nvSpPr>
+          <p:cNvPr id="2" name="슬라이드 번호 개체 틀 3">
+            <a:extLst>
+              <a:ext uri="{FF2B5EF4-FFF2-40B4-BE49-F238E27FC236}">
+                <a16:creationId xmlns:a16="http://schemas.microsoft.com/office/drawing/2014/main" id="{F1364800-C37B-DC24-7E14-A3C8A5A5DFC9}"/>
+              </a:ext>
+            </a:extLst>
+          </p:cNvPr>
+          <p:cNvSpPr txBox="1">
+            <a:spLocks/>
+          </p:cNvSpPr>
+          <p:nvPr/>
+        </p:nvSpPr>
+        <p:spPr>
+          <a:xfrm>
+            <a:off x="11180761" y="299420"/>
+            <a:ext cx="753545" cy="365125"/>
+          </a:xfrm>
+          <a:prstGeom prst="rect">
+            <a:avLst/>
+          </a:prstGeom>
+        </p:spPr>
+        <p:txBody>
+          <a:bodyPr vert="horz" lIns="91440" tIns="45720" rIns="91440" bIns="45720" rtlCol="0" anchor="ctr"/>
+          <a:lstStyle>
+            <a:defPPr rtl="0">
+              <a:defRPr lang="ko-KR"/>
+            </a:defPPr>
+            <a:lvl1pPr marL="0" algn="r" defTabSz="914400" rtl="0" eaLnBrk="1" latinLnBrk="0" hangingPunct="1">
+              <a:defRPr sz="1200" kern="1200" baseline="0">
+                <a:solidFill>
+                  <a:schemeClr val="tx1">
+                    <a:lumMod val="65000"/>
+                    <a:lumOff val="35000"/>
+                  </a:schemeClr>
+                </a:solidFill>
+                <a:latin typeface="맑은 고딕" panose="020B0503020000020004" pitchFamily="50" charset="-127"/>
+                <a:ea typeface="맑은 고딕" panose="020B0503020000020004" pitchFamily="50" charset="-127"/>
+                <a:cs typeface="+mn-cs"/>
+              </a:defRPr>
+            </a:lvl1pPr>
+            <a:lvl2pPr marL="457200" algn="l" defTabSz="914400" rtl="0" eaLnBrk="1" latinLnBrk="0" hangingPunct="1">
+              <a:defRPr sz="1800" kern="1200">
+                <a:solidFill>
+                  <a:schemeClr val="tx1"/>
+                </a:solidFill>
+                <a:latin typeface="+mn-lt"/>
+                <a:ea typeface="+mn-ea"/>
+                <a:cs typeface="+mn-cs"/>
+              </a:defRPr>
+            </a:lvl2pPr>
+            <a:lvl3pPr marL="914400" algn="l" defTabSz="914400" rtl="0" eaLnBrk="1" latinLnBrk="0" hangingPunct="1">
+              <a:defRPr sz="1800" kern="1200">
+                <a:solidFill>
+                  <a:schemeClr val="tx1"/>
+                </a:solidFill>
+                <a:latin typeface="+mn-lt"/>
+                <a:ea typeface="+mn-ea"/>
+                <a:cs typeface="+mn-cs"/>
+              </a:defRPr>
+            </a:lvl3pPr>
+            <a:lvl4pPr marL="1371600" algn="l" defTabSz="914400" rtl="0" eaLnBrk="1" latinLnBrk="0" hangingPunct="1">
+              <a:defRPr sz="1800" kern="1200">
+                <a:solidFill>
+                  <a:schemeClr val="tx1"/>
+                </a:solidFill>
+                <a:latin typeface="+mn-lt"/>
+                <a:ea typeface="+mn-ea"/>
+                <a:cs typeface="+mn-cs"/>
+              </a:defRPr>
+            </a:lvl4pPr>
+            <a:lvl5pPr marL="1828800" algn="l" defTabSz="914400" rtl="0" eaLnBrk="1" latinLnBrk="0" hangingPunct="1">
+              <a:defRPr sz="1800" kern="1200">
+                <a:solidFill>
+                  <a:schemeClr val="tx1"/>
+                </a:solidFill>
+                <a:latin typeface="+mn-lt"/>
+                <a:ea typeface="+mn-ea"/>
+                <a:cs typeface="+mn-cs"/>
+              </a:defRPr>
+            </a:lvl5pPr>
+            <a:lvl6pPr marL="2286000" algn="l" defTabSz="914400" rtl="0" eaLnBrk="1" latinLnBrk="0" hangingPunct="1">
+              <a:defRPr sz="1800" kern="1200">
+                <a:solidFill>
+                  <a:schemeClr val="tx1"/>
+                </a:solidFill>
+                <a:latin typeface="+mn-lt"/>
+                <a:ea typeface="+mn-ea"/>
+                <a:cs typeface="+mn-cs"/>
+              </a:defRPr>
+            </a:lvl6pPr>
+            <a:lvl7pPr marL="2743200" algn="l" defTabSz="914400" rtl="0" eaLnBrk="1" latinLnBrk="0" hangingPunct="1">
+              <a:defRPr sz="1800" kern="1200">
+                <a:solidFill>
+                  <a:schemeClr val="tx1"/>
+                </a:solidFill>
+                <a:latin typeface="+mn-lt"/>
+                <a:ea typeface="+mn-ea"/>
+                <a:cs typeface="+mn-cs"/>
+              </a:defRPr>
+            </a:lvl7pPr>
+            <a:lvl8pPr marL="3200400" algn="l" defTabSz="914400" rtl="0" eaLnBrk="1" latinLnBrk="0" hangingPunct="1">
+              <a:defRPr sz="1800" kern="1200">
+                <a:solidFill>
+                  <a:schemeClr val="tx1"/>
+                </a:solidFill>
+                <a:latin typeface="+mn-lt"/>
+                <a:ea typeface="+mn-ea"/>
+                <a:cs typeface="+mn-cs"/>
+              </a:defRPr>
+            </a:lvl8pPr>
+            <a:lvl9pPr marL="3657600" algn="l" defTabSz="914400" rtl="0" eaLnBrk="1" latinLnBrk="0" hangingPunct="1">
+              <a:defRPr sz="1800" kern="1200">
+                <a:solidFill>
+                  <a:schemeClr val="tx1"/>
+                </a:solidFill>
+                <a:latin typeface="+mn-lt"/>
+                <a:ea typeface="+mn-ea"/>
+                <a:cs typeface="+mn-cs"/>
+              </a:defRPr>
+            </a:lvl9pPr>
+          </a:lstStyle>
+          <a:p>
+            <a:fld id="{D57F1E4F-1CFF-5643-939E-217C01CDF565}" type="slidenum">
+              <a:rPr lang="en-US" b="1" smtClean="0">
+                <a:latin typeface="Segoe UI Emoji" panose="020B0502040204020203" pitchFamily="34" charset="0"/>
+                <a:ea typeface="Segoe UI Emoji" panose="020B0502040204020203" pitchFamily="34" charset="0"/>
+              </a:rPr>
+              <a:pPr/>
+              <a:t>16</a:t>
+            </a:fld>
+            <a:endParaRPr lang="en-US" b="1" dirty="0">
+              <a:latin typeface="Segoe UI Emoji" panose="020B0502040204020203" pitchFamily="34" charset="0"/>
+              <a:ea typeface="Segoe UI Emoji" panose="020B0502040204020203" pitchFamily="34" charset="0"/>
+            </a:endParaRPr>
+          </a:p>
+        </p:txBody>
+      </p:sp>
+      <p:pic>
+        <p:nvPicPr>
+          <p:cNvPr id="10" name="그래픽 9" descr="수영">
+            <a:extLst>
+              <a:ext uri="{FF2B5EF4-FFF2-40B4-BE49-F238E27FC236}">
+                <a16:creationId xmlns:a16="http://schemas.microsoft.com/office/drawing/2014/main" id="{E6599ACA-B608-7B9B-1C99-777614039616}"/>
+              </a:ext>
+            </a:extLst>
+          </p:cNvPr>
+          <p:cNvPicPr>
+            <a:picLocks noChangeAspect="1"/>
+          </p:cNvPicPr>
+          <p:nvPr/>
+        </p:nvPicPr>
+        <p:blipFill>
+          <a:blip r:embed="rId2">
+            <a:extLst>
+              <a:ext uri="{96DAC541-7B7A-43D3-8B79-37D633B846F1}">
+                <asvg:svgBlip xmlns:asvg="http://schemas.microsoft.com/office/drawing/2016/SVG/main" r:embed="rId3"/>
+              </a:ext>
+            </a:extLst>
+          </a:blip>
+          <a:stretch>
+            <a:fillRect/>
+          </a:stretch>
+        </p:blipFill>
+        <p:spPr>
+          <a:xfrm>
+            <a:off x="10685980" y="373930"/>
+            <a:ext cx="914400" cy="914400"/>
+          </a:xfrm>
+          <a:prstGeom prst="rect">
+            <a:avLst/>
+          </a:prstGeom>
+        </p:spPr>
+      </p:pic>
+      <p:sp>
+        <p:nvSpPr>
+          <p:cNvPr id="5" name="TextBox 4">
+            <a:extLst>
+              <a:ext uri="{FF2B5EF4-FFF2-40B4-BE49-F238E27FC236}">
+                <a16:creationId xmlns:a16="http://schemas.microsoft.com/office/drawing/2014/main" id="{5435A25B-E1DD-CBD7-9DCB-F3B98CAB6187}"/>
+              </a:ext>
+            </a:extLst>
+          </p:cNvPr>
+          <p:cNvSpPr txBox="1"/>
+          <p:nvPr/>
+        </p:nvSpPr>
+        <p:spPr>
+          <a:xfrm>
+            <a:off x="2551629" y="1801242"/>
+            <a:ext cx="6877051" cy="2554545"/>
+          </a:xfrm>
+          <a:prstGeom prst="rect">
+            <a:avLst/>
+          </a:prstGeom>
+          <a:solidFill>
+            <a:schemeClr val="tx1"/>
+          </a:solidFill>
+        </p:spPr>
+        <p:txBody>
+          <a:bodyPr wrap="square">
+            <a:spAutoFit/>
+          </a:bodyPr>
+          <a:lstStyle/>
+          <a:p>
+            <a:r>
+              <a:rPr lang="ko-KR" altLang="en-US" sz="1600" dirty="0">
+                <a:solidFill>
+                  <a:schemeClr val="bg1"/>
+                </a:solidFill>
+                <a:latin typeface="D2Coding" panose="020B0609020101020101" pitchFamily="49" charset="-127"/>
+                <a:ea typeface="D2Coding" panose="020B0609020101020101" pitchFamily="49" charset="-127"/>
+              </a:rPr>
+              <a:t>C:\Users\조상구&gt;wsl --</a:t>
+            </a:r>
+            <a:r>
+              <a:rPr lang="ko-KR" altLang="en-US" sz="1600" dirty="0" err="1">
+                <a:solidFill>
+                  <a:schemeClr val="bg1"/>
+                </a:solidFill>
+                <a:latin typeface="D2Coding" panose="020B0609020101020101" pitchFamily="49" charset="-127"/>
+                <a:ea typeface="D2Coding" panose="020B0609020101020101" pitchFamily="49" charset="-127"/>
+              </a:rPr>
+              <a:t>version</a:t>
+            </a:r>
+            <a:endParaRPr lang="ko-KR" altLang="en-US" sz="1600" dirty="0">
+              <a:solidFill>
+                <a:schemeClr val="bg1"/>
+              </a:solidFill>
+              <a:latin typeface="D2Coding" panose="020B0609020101020101" pitchFamily="49" charset="-127"/>
+              <a:ea typeface="D2Coding" panose="020B0609020101020101" pitchFamily="49" charset="-127"/>
+            </a:endParaRPr>
+          </a:p>
+          <a:p>
+            <a:r>
+              <a:rPr lang="ko-KR" altLang="en-US" sz="1600" dirty="0">
+                <a:solidFill>
+                  <a:schemeClr val="bg1"/>
+                </a:solidFill>
+                <a:latin typeface="D2Coding" panose="020B0609020101020101" pitchFamily="49" charset="-127"/>
+                <a:ea typeface="D2Coding" panose="020B0609020101020101" pitchFamily="49" charset="-127"/>
+              </a:rPr>
+              <a:t>WSL 버전: 2.7.11.0</a:t>
+            </a:r>
+          </a:p>
+          <a:p>
+            <a:r>
+              <a:rPr lang="ko-KR" altLang="en-US" sz="1600" dirty="0">
+                <a:solidFill>
+                  <a:schemeClr val="bg1"/>
+                </a:solidFill>
+                <a:latin typeface="D2Coding" panose="020B0609020101020101" pitchFamily="49" charset="-127"/>
+                <a:ea typeface="D2Coding" panose="020B0609020101020101" pitchFamily="49" charset="-127"/>
+              </a:rPr>
+              <a:t>커널 버전: 6.18.33.2-2</a:t>
+            </a:r>
+          </a:p>
+          <a:p>
+            <a:r>
+              <a:rPr lang="ko-KR" altLang="en-US" sz="1600" dirty="0" err="1">
+                <a:solidFill>
+                  <a:schemeClr val="bg1"/>
+                </a:solidFill>
+                <a:latin typeface="D2Coding" panose="020B0609020101020101" pitchFamily="49" charset="-127"/>
+                <a:ea typeface="D2Coding" panose="020B0609020101020101" pitchFamily="49" charset="-127"/>
+              </a:rPr>
+              <a:t>WSLg</a:t>
+            </a:r>
+            <a:r>
+              <a:rPr lang="ko-KR" altLang="en-US" sz="1600" dirty="0">
+                <a:solidFill>
+                  <a:schemeClr val="bg1"/>
+                </a:solidFill>
+                <a:latin typeface="D2Coding" panose="020B0609020101020101" pitchFamily="49" charset="-127"/>
+                <a:ea typeface="D2Coding" panose="020B0609020101020101" pitchFamily="49" charset="-127"/>
+              </a:rPr>
+              <a:t> 버전: 1.0.73.2</a:t>
+            </a:r>
+          </a:p>
+          <a:p>
+            <a:r>
+              <a:rPr lang="ko-KR" altLang="en-US" sz="1600" dirty="0">
+                <a:solidFill>
+                  <a:schemeClr val="bg1"/>
+                </a:solidFill>
+                <a:latin typeface="D2Coding" panose="020B0609020101020101" pitchFamily="49" charset="-127"/>
+                <a:ea typeface="D2Coding" panose="020B0609020101020101" pitchFamily="49" charset="-127"/>
+              </a:rPr>
+              <a:t>MSRDC 버전: 1.2.7214</a:t>
+            </a:r>
+          </a:p>
+          <a:p>
+            <a:r>
+              <a:rPr lang="ko-KR" altLang="en-US" sz="1600" dirty="0">
+                <a:solidFill>
+                  <a:schemeClr val="bg1"/>
+                </a:solidFill>
+                <a:latin typeface="D2Coding" panose="020B0609020101020101" pitchFamily="49" charset="-127"/>
+                <a:ea typeface="D2Coding" panose="020B0609020101020101" pitchFamily="49" charset="-127"/>
+              </a:rPr>
+              <a:t>Direct3D 버전: 1.611.1-81528511</a:t>
+            </a:r>
+          </a:p>
+          <a:p>
+            <a:r>
+              <a:rPr lang="ko-KR" altLang="en-US" sz="1600" dirty="0" err="1">
+                <a:solidFill>
+                  <a:schemeClr val="bg1"/>
+                </a:solidFill>
+                <a:latin typeface="D2Coding" panose="020B0609020101020101" pitchFamily="49" charset="-127"/>
+                <a:ea typeface="D2Coding" panose="020B0609020101020101" pitchFamily="49" charset="-127"/>
+              </a:rPr>
+              <a:t>DXCore</a:t>
+            </a:r>
+            <a:r>
+              <a:rPr lang="ko-KR" altLang="en-US" sz="1600" dirty="0">
+                <a:solidFill>
+                  <a:schemeClr val="bg1"/>
+                </a:solidFill>
+                <a:latin typeface="D2Coding" panose="020B0609020101020101" pitchFamily="49" charset="-127"/>
+                <a:ea typeface="D2Coding" panose="020B0609020101020101" pitchFamily="49" charset="-127"/>
+              </a:rPr>
+              <a:t> 버전: 10.0.26100.1-240331-1435.ge-release</a:t>
+            </a:r>
+          </a:p>
+          <a:p>
+            <a:r>
+              <a:rPr lang="ko-KR" altLang="en-US" sz="1600" dirty="0">
+                <a:solidFill>
+                  <a:schemeClr val="bg1"/>
+                </a:solidFill>
+                <a:latin typeface="D2Coding" panose="020B0609020101020101" pitchFamily="49" charset="-127"/>
+                <a:ea typeface="D2Coding" panose="020B0609020101020101" pitchFamily="49" charset="-127"/>
+              </a:rPr>
+              <a:t>Windows 버전: 10.0.26200.9168</a:t>
+            </a:r>
+          </a:p>
+          <a:p>
+            <a:endParaRPr lang="ko-KR" altLang="en-US" sz="1600" dirty="0">
+              <a:solidFill>
+                <a:schemeClr val="bg1"/>
+              </a:solidFill>
+              <a:latin typeface="D2Coding" panose="020B0609020101020101" pitchFamily="49" charset="-127"/>
+              <a:ea typeface="D2Coding" panose="020B0609020101020101" pitchFamily="49" charset="-127"/>
+            </a:endParaRPr>
+          </a:p>
+          <a:p>
+            <a:r>
+              <a:rPr lang="ko-KR" altLang="en-US" sz="1600" dirty="0">
+                <a:solidFill>
+                  <a:schemeClr val="bg1"/>
+                </a:solidFill>
+                <a:latin typeface="D2Coding" panose="020B0609020101020101" pitchFamily="49" charset="-127"/>
+                <a:ea typeface="D2Coding" panose="020B0609020101020101" pitchFamily="49" charset="-127"/>
+              </a:rPr>
+              <a:t>C:\Users\조상구&gt;</a:t>
+            </a:r>
+          </a:p>
+        </p:txBody>
+      </p:sp>
+      <p:sp>
+        <p:nvSpPr>
+          <p:cNvPr id="6" name="Rectangle 1">
+            <a:extLst>
+              <a:ext uri="{FF2B5EF4-FFF2-40B4-BE49-F238E27FC236}">
+                <a16:creationId xmlns:a16="http://schemas.microsoft.com/office/drawing/2014/main" id="{8EF6CBDF-3A34-69BE-7A02-A4BDA8C4535B}"/>
+              </a:ext>
+            </a:extLst>
+          </p:cNvPr>
+          <p:cNvSpPr>
+            <a:spLocks noChangeArrowheads="1"/>
+          </p:cNvSpPr>
+          <p:nvPr/>
+        </p:nvSpPr>
+        <p:spPr bwMode="auto">
+          <a:xfrm>
+            <a:off x="475645" y="1217365"/>
+            <a:ext cx="11353281" cy="465320"/>
+          </a:xfrm>
+          <a:prstGeom prst="rect">
+            <a:avLst/>
+          </a:prstGeom>
+          <a:noFill/>
+          <a:ln>
+            <a:noFill/>
+          </a:ln>
+          <a:effectLst/>
+          <a:extLst>
+            <a:ext uri="{909E8E84-426E-40DD-AFC4-6F175D3DCCD1}">
+              <a14:hiddenFill xmlns:a14="http://schemas.microsoft.com/office/drawing/2010/main">
+                <a:solidFill>
+                  <a:schemeClr val="accent1"/>
+                </a:solidFill>
+              </a14:hiddenFill>
+            </a:ext>
+            <a:ext uri="{91240B29-F687-4F45-9708-019B960494DF}">
+              <a14:hiddenLine xmlns:a14="http://schemas.microsoft.com/office/drawing/2010/main" w="9525">
+                <a:solidFill>
+                  <a:schemeClr val="tx1"/>
+                </a:solidFill>
+                <a:miter lim="800000"/>
+                <a:headEnd/>
+                <a:tailEnd/>
+              </a14:hiddenLine>
+            </a:ext>
+            <a:ext uri="{AF507438-7753-43E0-B8FC-AC1667EBCBE1}">
+              <a14:hiddenEffects xmlns:a14="http://schemas.microsoft.com/office/drawing/2010/main">
+                <a:effectLst>
+                  <a:outerShdw dist="35921" dir="2700000" algn="ctr" rotWithShape="0">
+                    <a:schemeClr val="bg2"/>
+                  </a:outerShdw>
+                </a:effectLst>
+              </a14:hiddenEffects>
+            </a:ext>
+          </a:extLst>
+        </p:spPr>
+        <p:txBody>
+          <a:bodyPr vert="horz" wrap="square" lIns="91440" tIns="45720" rIns="91440" bIns="45720" numCol="1" anchor="ctr" anchorCtr="0" compatLnSpc="1">
+            <a:prstTxWarp prst="textNoShape">
+              <a:avLst/>
+            </a:prstTxWarp>
+            <a:spAutoFit/>
+          </a:bodyPr>
+          <a:lstStyle/>
+          <a:p>
+            <a:pPr marL="285750" lvl="0" indent="-285750" eaLnBrk="0" fontAlgn="base" hangingPunct="0">
+              <a:lnSpc>
+                <a:spcPct val="150000"/>
+              </a:lnSpc>
+              <a:spcBef>
+                <a:spcPct val="0"/>
+              </a:spcBef>
+              <a:spcAft>
+                <a:spcPct val="0"/>
+              </a:spcAft>
+              <a:buFont typeface="Wingdings" panose="05000000000000000000" pitchFamily="2" charset="2"/>
+              <a:buChar char="v"/>
+            </a:pPr>
+            <a:r>
+              <a:rPr lang="en-US" altLang="ko-KR" dirty="0">
+                <a:latin typeface="D2Coding" panose="020B0609020101020101" pitchFamily="49" charset="-127"/>
+                <a:ea typeface="D2Coding" panose="020B0609020101020101" pitchFamily="49" charset="-127"/>
+              </a:rPr>
+              <a:t>WSL(Windows Subsystem for Linux) </a:t>
+            </a:r>
+            <a:r>
+              <a:rPr lang="ko-KR" altLang="en-US" dirty="0">
+                <a:latin typeface="D2Coding" panose="020B0609020101020101" pitchFamily="49" charset="-127"/>
+                <a:ea typeface="D2Coding" panose="020B0609020101020101" pitchFamily="49" charset="-127"/>
+              </a:rPr>
+              <a:t>설치</a:t>
+            </a:r>
+            <a:endParaRPr lang="en-US" altLang="ko-KR" dirty="0">
+              <a:latin typeface="D2Coding" panose="020B0609020101020101" pitchFamily="49" charset="-127"/>
+              <a:ea typeface="D2Coding" panose="020B0609020101020101" pitchFamily="49" charset="-127"/>
+            </a:endParaRPr>
+          </a:p>
+        </p:txBody>
+      </p:sp>
+      <p:sp>
+        <p:nvSpPr>
+          <p:cNvPr id="11" name="Rectangle 1">
+            <a:extLst>
+              <a:ext uri="{FF2B5EF4-FFF2-40B4-BE49-F238E27FC236}">
+                <a16:creationId xmlns:a16="http://schemas.microsoft.com/office/drawing/2014/main" id="{33188051-64FB-BF0F-AFBB-814E0FCB094E}"/>
+              </a:ext>
+            </a:extLst>
+          </p:cNvPr>
+          <p:cNvSpPr>
+            <a:spLocks noChangeArrowheads="1"/>
+          </p:cNvSpPr>
+          <p:nvPr/>
+        </p:nvSpPr>
+        <p:spPr bwMode="auto">
+          <a:xfrm>
+            <a:off x="581025" y="4610284"/>
+            <a:ext cx="11353281" cy="880819"/>
+          </a:xfrm>
+          <a:prstGeom prst="rect">
+            <a:avLst/>
+          </a:prstGeom>
+          <a:noFill/>
+          <a:ln>
+            <a:noFill/>
+          </a:ln>
+          <a:effectLst/>
+          <a:extLst>
+            <a:ext uri="{909E8E84-426E-40DD-AFC4-6F175D3DCCD1}">
+              <a14:hiddenFill xmlns:a14="http://schemas.microsoft.com/office/drawing/2010/main">
+                <a:solidFill>
+                  <a:schemeClr val="accent1"/>
+                </a:solidFill>
+              </a14:hiddenFill>
+            </a:ext>
+            <a:ext uri="{91240B29-F687-4F45-9708-019B960494DF}">
+              <a14:hiddenLine xmlns:a14="http://schemas.microsoft.com/office/drawing/2010/main" w="9525">
+                <a:solidFill>
+                  <a:schemeClr val="tx1"/>
+                </a:solidFill>
+                <a:miter lim="800000"/>
+                <a:headEnd/>
+                <a:tailEnd/>
+              </a14:hiddenLine>
+            </a:ext>
+            <a:ext uri="{AF507438-7753-43E0-B8FC-AC1667EBCBE1}">
+              <a14:hiddenEffects xmlns:a14="http://schemas.microsoft.com/office/drawing/2010/main">
+                <a:effectLst>
+                  <a:outerShdw dist="35921" dir="2700000" algn="ctr" rotWithShape="0">
+                    <a:schemeClr val="bg2"/>
+                  </a:outerShdw>
+                </a:effectLst>
+              </a14:hiddenEffects>
+            </a:ext>
+          </a:extLst>
+        </p:spPr>
+        <p:txBody>
+          <a:bodyPr vert="horz" wrap="square" lIns="91440" tIns="45720" rIns="91440" bIns="45720" numCol="1" anchor="ctr" anchorCtr="0" compatLnSpc="1">
+            <a:prstTxWarp prst="textNoShape">
+              <a:avLst/>
+            </a:prstTxWarp>
+            <a:spAutoFit/>
+          </a:bodyPr>
+          <a:lstStyle/>
+          <a:p>
+            <a:pPr marL="285750" lvl="0" indent="-285750" eaLnBrk="0" fontAlgn="base" hangingPunct="0">
+              <a:lnSpc>
+                <a:spcPct val="150000"/>
+              </a:lnSpc>
+              <a:spcBef>
+                <a:spcPct val="0"/>
+              </a:spcBef>
+              <a:spcAft>
+                <a:spcPct val="0"/>
+              </a:spcAft>
+              <a:buFont typeface="Wingdings" panose="05000000000000000000" pitchFamily="2" charset="2"/>
+              <a:buChar char="v"/>
+            </a:pPr>
+            <a:r>
+              <a:rPr lang="en-US" altLang="ko-KR" dirty="0">
+                <a:latin typeface="D2Coding" panose="020B0609020101020101" pitchFamily="49" charset="-127"/>
+                <a:ea typeface="D2Coding" panose="020B0609020101020101" pitchFamily="49" charset="-127"/>
+              </a:rPr>
+              <a:t>Docker </a:t>
+            </a:r>
+            <a:r>
+              <a:rPr lang="ko-KR" altLang="en-US" dirty="0">
+                <a:latin typeface="D2Coding" panose="020B0609020101020101" pitchFamily="49" charset="-127"/>
+                <a:ea typeface="D2Coding" panose="020B0609020101020101" pitchFamily="49" charset="-127"/>
+              </a:rPr>
+              <a:t>설치</a:t>
+            </a:r>
+            <a:endParaRPr lang="en-US" altLang="ko-KR" dirty="0">
+              <a:latin typeface="D2Coding" panose="020B0609020101020101" pitchFamily="49" charset="-127"/>
+              <a:ea typeface="D2Coding" panose="020B0609020101020101" pitchFamily="49" charset="-127"/>
+            </a:endParaRPr>
+          </a:p>
+          <a:p>
+            <a:pPr marL="742950" lvl="1" indent="-285750" eaLnBrk="0" fontAlgn="base" hangingPunct="0">
+              <a:lnSpc>
+                <a:spcPct val="150000"/>
+              </a:lnSpc>
+              <a:spcBef>
+                <a:spcPct val="0"/>
+              </a:spcBef>
+              <a:spcAft>
+                <a:spcPct val="0"/>
+              </a:spcAft>
+              <a:buFont typeface="Wingdings" panose="05000000000000000000" pitchFamily="2" charset="2"/>
+              <a:buChar char="v"/>
+            </a:pPr>
+            <a:r>
+              <a:rPr lang="en-US" altLang="ko-KR" dirty="0">
+                <a:latin typeface="D2Coding" panose="020B0609020101020101" pitchFamily="49" charset="-127"/>
+                <a:ea typeface="D2Coding" panose="020B0609020101020101" pitchFamily="49" charset="-127"/>
+              </a:rPr>
+              <a:t>WSL 2</a:t>
+            </a:r>
+            <a:r>
+              <a:rPr lang="ko-KR" altLang="en-US" dirty="0">
+                <a:latin typeface="D2Coding" panose="020B0609020101020101" pitchFamily="49" charset="-127"/>
+                <a:ea typeface="D2Coding" panose="020B0609020101020101" pitchFamily="49" charset="-127"/>
+              </a:rPr>
+              <a:t>를 먼저 설치하고</a:t>
+            </a:r>
+            <a:r>
+              <a:rPr lang="en-US" altLang="ko-KR" dirty="0">
+                <a:latin typeface="D2Coding" panose="020B0609020101020101" pitchFamily="49" charset="-127"/>
+                <a:ea typeface="D2Coding" panose="020B0609020101020101" pitchFamily="49" charset="-127"/>
+              </a:rPr>
+              <a:t>, </a:t>
+            </a:r>
+            <a:r>
+              <a:rPr lang="ko-KR" altLang="en-US" dirty="0">
+                <a:latin typeface="D2Coding" panose="020B0609020101020101" pitchFamily="49" charset="-127"/>
+                <a:ea typeface="D2Coding" panose="020B0609020101020101" pitchFamily="49" charset="-127"/>
+              </a:rPr>
+              <a:t>그 위에 </a:t>
+            </a:r>
+            <a:r>
+              <a:rPr lang="en-US" altLang="ko-KR" dirty="0">
+                <a:latin typeface="D2Coding" panose="020B0609020101020101" pitchFamily="49" charset="-127"/>
+                <a:ea typeface="D2Coding" panose="020B0609020101020101" pitchFamily="49" charset="-127"/>
+              </a:rPr>
+              <a:t>Docker Desktop</a:t>
+            </a:r>
+            <a:r>
+              <a:rPr lang="ko-KR" altLang="en-US" dirty="0">
+                <a:latin typeface="D2Coding" panose="020B0609020101020101" pitchFamily="49" charset="-127"/>
+                <a:ea typeface="D2Coding" panose="020B0609020101020101" pitchFamily="49" charset="-127"/>
+              </a:rPr>
+              <a:t>을 얹어서 연동</a:t>
+            </a:r>
+            <a:endParaRPr lang="ko-KR" altLang="ko-KR" dirty="0">
+              <a:latin typeface="D2Coding" panose="020B0609020101020101" pitchFamily="49" charset="-127"/>
+              <a:ea typeface="D2Coding" panose="020B0609020101020101" pitchFamily="49" charset="-127"/>
+            </a:endParaRPr>
+          </a:p>
+        </p:txBody>
+      </p:sp>
+    </p:spTree>
+    <p:extLst>
+      <p:ext uri="{BB962C8B-B14F-4D97-AF65-F5344CB8AC3E}">
+        <p14:creationId xmlns:p14="http://schemas.microsoft.com/office/powerpoint/2010/main" val="382537488"/>
+      </p:ext>
+    </p:extLst>
+  </p:cSld>
+  <p:clrMapOvr>
+    <a:masterClrMapping/>
+  </p:clrMapOvr>
+</p:sld>
+</file>
+
+<file path=ppt/slides/slide17.xml><?xml version="1.0" encoding="utf-8"?>
+<p:sld xmlns:a="http://schemas.openxmlformats.org/drawingml/2006/main" xmlns:r="http://schemas.openxmlformats.org/officeDocument/2006/relationships" xmlns:p="http://schemas.openxmlformats.org/presentationml/2006/main">
+  <p:cSld>
+    <p:spTree>
+      <p:nvGrpSpPr>
+        <p:cNvPr id="1" name="">
+          <a:extLst>
+            <a:ext uri="{FF2B5EF4-FFF2-40B4-BE49-F238E27FC236}">
+              <a16:creationId xmlns:a16="http://schemas.microsoft.com/office/drawing/2014/main" id="{97BE6001-3FEC-77DB-8683-7FD5DBF9A6FF}"/>
+            </a:ext>
+          </a:extLst>
+        </p:cNvPr>
+        <p:cNvGrpSpPr/>
+        <p:nvPr/>
+      </p:nvGrpSpPr>
+      <p:grpSpPr>
+        <a:xfrm>
+          <a:off x="0" y="0"/>
+          <a:ext cx="0" cy="0"/>
+          <a:chOff x="0" y="0"/>
+          <a:chExt cx="0" cy="0"/>
+        </a:xfrm>
+      </p:grpSpPr>
+      <p:sp>
+        <p:nvSpPr>
+          <p:cNvPr id="3" name="제목 1">
+            <a:extLst>
+              <a:ext uri="{FF2B5EF4-FFF2-40B4-BE49-F238E27FC236}">
+                <a16:creationId xmlns:a16="http://schemas.microsoft.com/office/drawing/2014/main" id="{58E00CBC-B28C-2C6A-126F-3004A7725CC3}"/>
+              </a:ext>
+            </a:extLst>
+          </p:cNvPr>
+          <p:cNvSpPr txBox="1">
+            <a:spLocks/>
+          </p:cNvSpPr>
+          <p:nvPr/>
+        </p:nvSpPr>
+        <p:spPr>
+          <a:xfrm>
+            <a:off x="475645" y="481983"/>
+            <a:ext cx="10353762" cy="766439"/>
+          </a:xfrm>
+          <a:prstGeom prst="rect">
+            <a:avLst/>
+          </a:prstGeom>
+        </p:spPr>
+        <p:txBody>
+          <a:bodyPr vert="horz" lIns="91440" tIns="45720" rIns="91440" bIns="45720" rtlCol="0" anchor="ctr">
+            <a:normAutofit/>
+          </a:bodyPr>
+          <a:lstStyle>
+            <a:lvl1pPr algn="ctr" defTabSz="914400" rtl="0" eaLnBrk="1" latinLnBrk="1" hangingPunct="1">
+              <a:lnSpc>
+                <a:spcPct val="90000"/>
+              </a:lnSpc>
+              <a:spcBef>
+                <a:spcPct val="0"/>
+              </a:spcBef>
+              <a:buNone/>
+              <a:defRPr sz="3200" kern="1200" cap="all" baseline="0">
+                <a:solidFill>
+                  <a:schemeClr val="tx1"/>
+                </a:solidFill>
+                <a:effectLst/>
+                <a:latin typeface="Batang" panose="02030600000101010101" pitchFamily="18" charset="-127"/>
+                <a:ea typeface="Batang" panose="02030600000101010101" pitchFamily="18" charset="-127"/>
+                <a:cs typeface="+mj-cs"/>
+              </a:defRPr>
+            </a:lvl1pPr>
+          </a:lstStyle>
+          <a:p>
+            <a:pPr algn="l"/>
+            <a:r>
+              <a:rPr lang="en-US" altLang="ko-KR" sz="2800" cap="none" dirty="0">
+                <a:solidFill>
+                  <a:schemeClr val="bg2">
+                    <a:lumMod val="25000"/>
+                  </a:schemeClr>
+                </a:solidFill>
+                <a:latin typeface="D2Coding" panose="020B0609020101020101" pitchFamily="49" charset="-127"/>
+                <a:ea typeface="D2Coding" panose="020B0609020101020101" pitchFamily="49" charset="-127"/>
+                <a:cs typeface="Segoe UI Light" panose="020B0502040204020203" pitchFamily="34" charset="0"/>
+              </a:rPr>
+              <a:t>docker</a:t>
+            </a:r>
+            <a:r>
+              <a:rPr lang="ko-KR" altLang="en-US" sz="2800" cap="none" dirty="0">
+                <a:solidFill>
+                  <a:schemeClr val="bg2">
+                    <a:lumMod val="25000"/>
+                  </a:schemeClr>
+                </a:solidFill>
+                <a:latin typeface="D2Coding" panose="020B0609020101020101" pitchFamily="49" charset="-127"/>
+                <a:ea typeface="D2Coding" panose="020B0609020101020101" pitchFamily="49" charset="-127"/>
+                <a:cs typeface="Segoe UI Light" panose="020B0502040204020203" pitchFamily="34" charset="0"/>
+              </a:rPr>
+              <a:t> </a:t>
+            </a:r>
+            <a:r>
+              <a:rPr lang="en-US" altLang="ko-KR" sz="2800" cap="none" dirty="0">
+                <a:solidFill>
+                  <a:schemeClr val="bg2">
+                    <a:lumMod val="25000"/>
+                  </a:schemeClr>
+                </a:solidFill>
+                <a:latin typeface="D2Coding" panose="020B0609020101020101" pitchFamily="49" charset="-127"/>
+                <a:ea typeface="D2Coding" panose="020B0609020101020101" pitchFamily="49" charset="-127"/>
+                <a:cs typeface="Segoe UI Light" panose="020B0502040204020203" pitchFamily="34" charset="0"/>
+              </a:rPr>
+              <a:t>desktop</a:t>
+            </a:r>
+            <a:r>
+              <a:rPr lang="ko-KR" altLang="en-US" sz="2800" cap="none" dirty="0">
+                <a:solidFill>
+                  <a:schemeClr val="bg2">
+                    <a:lumMod val="25000"/>
+                  </a:schemeClr>
+                </a:solidFill>
+                <a:latin typeface="D2Coding" panose="020B0609020101020101" pitchFamily="49" charset="-127"/>
+                <a:ea typeface="D2Coding" panose="020B0609020101020101" pitchFamily="49" charset="-127"/>
+                <a:cs typeface="Segoe UI Light" panose="020B0502040204020203" pitchFamily="34" charset="0"/>
+              </a:rPr>
+              <a:t> 설치</a:t>
+            </a:r>
+          </a:p>
+        </p:txBody>
+      </p:sp>
+      <p:sp>
+        <p:nvSpPr>
+          <p:cNvPr id="8" name="TextBox 7">
+            <a:extLst>
+              <a:ext uri="{FF2B5EF4-FFF2-40B4-BE49-F238E27FC236}">
+                <a16:creationId xmlns:a16="http://schemas.microsoft.com/office/drawing/2014/main" id="{9AA1FDCF-EFFF-AD30-2847-C6A182B18169}"/>
+              </a:ext>
+            </a:extLst>
+          </p:cNvPr>
+          <p:cNvSpPr txBox="1"/>
+          <p:nvPr/>
+        </p:nvSpPr>
+        <p:spPr>
+          <a:xfrm>
+            <a:off x="744020" y="3244334"/>
+            <a:ext cx="184731" cy="369332"/>
+          </a:xfrm>
+          <a:prstGeom prst="rect">
+            <a:avLst/>
+          </a:prstGeom>
+          <a:noFill/>
+        </p:spPr>
+        <p:txBody>
+          <a:bodyPr wrap="none" rtlCol="0">
+            <a:spAutoFit/>
+          </a:bodyPr>
+          <a:lstStyle/>
+          <a:p>
+            <a:endParaRPr lang="ko-KR" altLang="en-US" dirty="0">
+              <a:solidFill>
+                <a:schemeClr val="accent5"/>
+              </a:solidFill>
+              <a:latin typeface="D2Coding" panose="020B0609020101020101" pitchFamily="49" charset="-127"/>
+              <a:ea typeface="D2Coding" panose="020B0609020101020101" pitchFamily="49" charset="-127"/>
+            </a:endParaRPr>
+          </a:p>
+        </p:txBody>
+      </p:sp>
+      <p:sp>
+        <p:nvSpPr>
+          <p:cNvPr id="2" name="슬라이드 번호 개체 틀 3">
+            <a:extLst>
+              <a:ext uri="{FF2B5EF4-FFF2-40B4-BE49-F238E27FC236}">
+                <a16:creationId xmlns:a16="http://schemas.microsoft.com/office/drawing/2014/main" id="{EFFEE19D-4E72-8DEE-AD86-EFC39E64A8C1}"/>
+              </a:ext>
+            </a:extLst>
+          </p:cNvPr>
+          <p:cNvSpPr txBox="1">
+            <a:spLocks/>
+          </p:cNvSpPr>
+          <p:nvPr/>
+        </p:nvSpPr>
+        <p:spPr>
+          <a:xfrm>
+            <a:off x="11180761" y="299420"/>
+            <a:ext cx="753545" cy="365125"/>
+          </a:xfrm>
+          <a:prstGeom prst="rect">
+            <a:avLst/>
+          </a:prstGeom>
+        </p:spPr>
+        <p:txBody>
+          <a:bodyPr vert="horz" lIns="91440" tIns="45720" rIns="91440" bIns="45720" rtlCol="0" anchor="ctr"/>
+          <a:lstStyle>
+            <a:defPPr rtl="0">
+              <a:defRPr lang="ko-KR"/>
+            </a:defPPr>
+            <a:lvl1pPr marL="0" algn="r" defTabSz="914400" rtl="0" eaLnBrk="1" latinLnBrk="0" hangingPunct="1">
+              <a:defRPr sz="1200" kern="1200" baseline="0">
+                <a:solidFill>
+                  <a:schemeClr val="tx1">
+                    <a:lumMod val="65000"/>
+                    <a:lumOff val="35000"/>
+                  </a:schemeClr>
+                </a:solidFill>
+                <a:latin typeface="맑은 고딕" panose="020B0503020000020004" pitchFamily="50" charset="-127"/>
+                <a:ea typeface="맑은 고딕" panose="020B0503020000020004" pitchFamily="50" charset="-127"/>
+                <a:cs typeface="+mn-cs"/>
+              </a:defRPr>
+            </a:lvl1pPr>
+            <a:lvl2pPr marL="457200" algn="l" defTabSz="914400" rtl="0" eaLnBrk="1" latinLnBrk="0" hangingPunct="1">
+              <a:defRPr sz="1800" kern="1200">
+                <a:solidFill>
+                  <a:schemeClr val="tx1"/>
+                </a:solidFill>
+                <a:latin typeface="+mn-lt"/>
+                <a:ea typeface="+mn-ea"/>
+                <a:cs typeface="+mn-cs"/>
+              </a:defRPr>
+            </a:lvl2pPr>
+            <a:lvl3pPr marL="914400" algn="l" defTabSz="914400" rtl="0" eaLnBrk="1" latinLnBrk="0" hangingPunct="1">
+              <a:defRPr sz="1800" kern="1200">
+                <a:solidFill>
+                  <a:schemeClr val="tx1"/>
+                </a:solidFill>
+                <a:latin typeface="+mn-lt"/>
+                <a:ea typeface="+mn-ea"/>
+                <a:cs typeface="+mn-cs"/>
+              </a:defRPr>
+            </a:lvl3pPr>
+            <a:lvl4pPr marL="1371600" algn="l" defTabSz="914400" rtl="0" eaLnBrk="1" latinLnBrk="0" hangingPunct="1">
+              <a:defRPr sz="1800" kern="1200">
+                <a:solidFill>
+                  <a:schemeClr val="tx1"/>
+                </a:solidFill>
+                <a:latin typeface="+mn-lt"/>
+                <a:ea typeface="+mn-ea"/>
+                <a:cs typeface="+mn-cs"/>
+              </a:defRPr>
+            </a:lvl4pPr>
+            <a:lvl5pPr marL="1828800" algn="l" defTabSz="914400" rtl="0" eaLnBrk="1" latinLnBrk="0" hangingPunct="1">
+              <a:defRPr sz="1800" kern="1200">
+                <a:solidFill>
+                  <a:schemeClr val="tx1"/>
+                </a:solidFill>
+                <a:latin typeface="+mn-lt"/>
+                <a:ea typeface="+mn-ea"/>
+                <a:cs typeface="+mn-cs"/>
+              </a:defRPr>
+            </a:lvl5pPr>
+            <a:lvl6pPr marL="2286000" algn="l" defTabSz="914400" rtl="0" eaLnBrk="1" latinLnBrk="0" hangingPunct="1">
+              <a:defRPr sz="1800" kern="1200">
+                <a:solidFill>
+                  <a:schemeClr val="tx1"/>
+                </a:solidFill>
+                <a:latin typeface="+mn-lt"/>
+                <a:ea typeface="+mn-ea"/>
+                <a:cs typeface="+mn-cs"/>
+              </a:defRPr>
+            </a:lvl6pPr>
+            <a:lvl7pPr marL="2743200" algn="l" defTabSz="914400" rtl="0" eaLnBrk="1" latinLnBrk="0" hangingPunct="1">
+              <a:defRPr sz="1800" kern="1200">
+                <a:solidFill>
+                  <a:schemeClr val="tx1"/>
+                </a:solidFill>
+                <a:latin typeface="+mn-lt"/>
+                <a:ea typeface="+mn-ea"/>
+                <a:cs typeface="+mn-cs"/>
+              </a:defRPr>
+            </a:lvl7pPr>
+            <a:lvl8pPr marL="3200400" algn="l" defTabSz="914400" rtl="0" eaLnBrk="1" latinLnBrk="0" hangingPunct="1">
+              <a:defRPr sz="1800" kern="1200">
+                <a:solidFill>
+                  <a:schemeClr val="tx1"/>
+                </a:solidFill>
+                <a:latin typeface="+mn-lt"/>
+                <a:ea typeface="+mn-ea"/>
+                <a:cs typeface="+mn-cs"/>
+              </a:defRPr>
+            </a:lvl8pPr>
+            <a:lvl9pPr marL="3657600" algn="l" defTabSz="914400" rtl="0" eaLnBrk="1" latinLnBrk="0" hangingPunct="1">
+              <a:defRPr sz="1800" kern="1200">
+                <a:solidFill>
+                  <a:schemeClr val="tx1"/>
+                </a:solidFill>
+                <a:latin typeface="+mn-lt"/>
+                <a:ea typeface="+mn-ea"/>
+                <a:cs typeface="+mn-cs"/>
+              </a:defRPr>
+            </a:lvl9pPr>
+          </a:lstStyle>
+          <a:p>
+            <a:fld id="{D57F1E4F-1CFF-5643-939E-217C01CDF565}" type="slidenum">
+              <a:rPr lang="en-US" b="1" smtClean="0">
+                <a:latin typeface="Segoe UI Emoji" panose="020B0502040204020203" pitchFamily="34" charset="0"/>
+                <a:ea typeface="Segoe UI Emoji" panose="020B0502040204020203" pitchFamily="34" charset="0"/>
+              </a:rPr>
+              <a:pPr/>
+              <a:t>17</a:t>
+            </a:fld>
+            <a:endParaRPr lang="en-US" b="1" dirty="0">
+              <a:latin typeface="Segoe UI Emoji" panose="020B0502040204020203" pitchFamily="34" charset="0"/>
+              <a:ea typeface="Segoe UI Emoji" panose="020B0502040204020203" pitchFamily="34" charset="0"/>
+            </a:endParaRPr>
+          </a:p>
+        </p:txBody>
+      </p:sp>
+      <p:pic>
+        <p:nvPicPr>
+          <p:cNvPr id="10" name="그래픽 9" descr="수영">
+            <a:extLst>
+              <a:ext uri="{FF2B5EF4-FFF2-40B4-BE49-F238E27FC236}">
+                <a16:creationId xmlns:a16="http://schemas.microsoft.com/office/drawing/2014/main" id="{A8BDD442-F296-7A5A-E1FE-F8268414B2E9}"/>
+              </a:ext>
+            </a:extLst>
+          </p:cNvPr>
+          <p:cNvPicPr>
+            <a:picLocks noChangeAspect="1"/>
+          </p:cNvPicPr>
+          <p:nvPr/>
+        </p:nvPicPr>
+        <p:blipFill>
+          <a:blip r:embed="rId2">
+            <a:extLst>
+              <a:ext uri="{96DAC541-7B7A-43D3-8B79-37D633B846F1}">
+                <asvg:svgBlip xmlns:asvg="http://schemas.microsoft.com/office/drawing/2016/SVG/main" r:embed="rId3"/>
+              </a:ext>
+            </a:extLst>
+          </a:blip>
+          <a:stretch>
+            <a:fillRect/>
+          </a:stretch>
+        </p:blipFill>
+        <p:spPr>
+          <a:xfrm>
+            <a:off x="10685980" y="373930"/>
+            <a:ext cx="914400" cy="914400"/>
+          </a:xfrm>
+          <a:prstGeom prst="rect">
+            <a:avLst/>
+          </a:prstGeom>
+        </p:spPr>
+      </p:pic>
+      <p:pic>
+        <p:nvPicPr>
+          <p:cNvPr id="13" name="그림 12">
+            <a:extLst>
+              <a:ext uri="{FF2B5EF4-FFF2-40B4-BE49-F238E27FC236}">
+                <a16:creationId xmlns:a16="http://schemas.microsoft.com/office/drawing/2014/main" id="{382B21F8-E3B2-3124-A7A1-C89690B27CD4}"/>
+              </a:ext>
+            </a:extLst>
+          </p:cNvPr>
+          <p:cNvPicPr>
+            <a:picLocks noChangeAspect="1"/>
+          </p:cNvPicPr>
+          <p:nvPr/>
+        </p:nvPicPr>
+        <p:blipFill>
+          <a:blip r:embed="rId4"/>
+          <a:stretch>
+            <a:fillRect/>
+          </a:stretch>
+        </p:blipFill>
+        <p:spPr>
+          <a:xfrm>
+            <a:off x="1176491" y="1356475"/>
+            <a:ext cx="7668814" cy="5071656"/>
+          </a:xfrm>
+          <a:prstGeom prst="rect">
+            <a:avLst/>
+          </a:prstGeom>
+        </p:spPr>
+      </p:pic>
+      <p:sp>
+        <p:nvSpPr>
+          <p:cNvPr id="4" name="설명선: 굽은 선 3">
+            <a:extLst>
+              <a:ext uri="{FF2B5EF4-FFF2-40B4-BE49-F238E27FC236}">
+                <a16:creationId xmlns:a16="http://schemas.microsoft.com/office/drawing/2014/main" id="{A00BA074-3502-A522-021F-D1C1E6C7374A}"/>
+              </a:ext>
+            </a:extLst>
+          </p:cNvPr>
+          <p:cNvSpPr/>
+          <p:nvPr/>
+        </p:nvSpPr>
+        <p:spPr>
+          <a:xfrm>
+            <a:off x="7946380" y="3112532"/>
+            <a:ext cx="3901023" cy="766439"/>
+          </a:xfrm>
+          <a:prstGeom prst="borderCallout2">
+            <a:avLst>
+              <a:gd name="adj1" fmla="val 18750"/>
+              <a:gd name="adj2" fmla="val -8333"/>
+              <a:gd name="adj3" fmla="val 18750"/>
+              <a:gd name="adj4" fmla="val -16667"/>
+              <a:gd name="adj5" fmla="val -42942"/>
+              <a:gd name="adj6" fmla="val -33726"/>
+            </a:avLst>
+          </a:prstGeom>
+          <a:solidFill>
+            <a:schemeClr val="bg1">
+              <a:lumMod val="65000"/>
+            </a:schemeClr>
+          </a:solidFill>
+          <a:ln>
+            <a:solidFill>
+              <a:schemeClr val="tx1"/>
+            </a:solidFill>
+            <a:headEnd type="none" w="med" len="med"/>
+            <a:tailEnd type="arrow" w="med" len="med"/>
+          </a:ln>
+        </p:spPr>
+        <p:style>
+          <a:lnRef idx="2">
+            <a:schemeClr val="accent1">
+              <a:shade val="15000"/>
+            </a:schemeClr>
+          </a:lnRef>
+          <a:fillRef idx="1">
+            <a:schemeClr val="accent1"/>
+          </a:fillRef>
+          <a:effectRef idx="0">
+            <a:schemeClr val="accent1"/>
+          </a:effectRef>
+          <a:fontRef idx="minor">
+            <a:schemeClr val="lt1"/>
+          </a:fontRef>
+        </p:style>
+        <p:txBody>
+          <a:bodyPr rtlCol="0" anchor="ctr"/>
+          <a:lstStyle/>
+          <a:p>
+            <a:r>
+              <a:rPr lang="en-US" altLang="ko-KR" dirty="0">
+                <a:solidFill>
+                  <a:schemeClr val="tx1"/>
+                </a:solidFill>
+                <a:latin typeface="D2Coding" panose="020B0609020101020101" pitchFamily="49" charset="-127"/>
+                <a:ea typeface="D2Coding" panose="020B0609020101020101" pitchFamily="49" charset="-127"/>
+              </a:rPr>
+              <a:t>n8n</a:t>
+            </a:r>
+            <a:r>
+              <a:rPr lang="ko-KR" altLang="en-US" dirty="0">
+                <a:solidFill>
+                  <a:schemeClr val="tx1"/>
+                </a:solidFill>
+                <a:latin typeface="D2Coding" panose="020B0609020101020101" pitchFamily="49" charset="-127"/>
+                <a:ea typeface="D2Coding" panose="020B0609020101020101" pitchFamily="49" charset="-127"/>
+              </a:rPr>
+              <a:t> 이미지 다운받고 </a:t>
+            </a:r>
+            <a:r>
+              <a:rPr lang="en-US" altLang="ko-KR" dirty="0">
+                <a:solidFill>
+                  <a:schemeClr val="tx1"/>
+                </a:solidFill>
+                <a:latin typeface="D2Coding" panose="020B0609020101020101" pitchFamily="49" charset="-127"/>
+                <a:ea typeface="D2Coding" panose="020B0609020101020101" pitchFamily="49" charset="-127"/>
+              </a:rPr>
+              <a:t>container </a:t>
+            </a:r>
+            <a:r>
+              <a:rPr lang="ko-KR" altLang="en-US" dirty="0">
+                <a:solidFill>
+                  <a:schemeClr val="tx1"/>
+                </a:solidFill>
+                <a:latin typeface="D2Coding" panose="020B0609020101020101" pitchFamily="49" charset="-127"/>
+                <a:ea typeface="D2Coding" panose="020B0609020101020101" pitchFamily="49" charset="-127"/>
+              </a:rPr>
+              <a:t>실행</a:t>
+            </a:r>
+            <a:r>
+              <a:rPr lang="en-US" altLang="ko-KR" dirty="0">
+                <a:solidFill>
+                  <a:schemeClr val="tx1"/>
+                </a:solidFill>
+                <a:latin typeface="D2Coding" panose="020B0609020101020101" pitchFamily="49" charset="-127"/>
+                <a:ea typeface="D2Coding" panose="020B0609020101020101" pitchFamily="49" charset="-127"/>
+              </a:rPr>
+              <a:t>/</a:t>
+            </a:r>
+            <a:r>
+              <a:rPr lang="ko-KR" altLang="en-US" dirty="0">
+                <a:solidFill>
+                  <a:schemeClr val="tx1"/>
+                </a:solidFill>
+                <a:latin typeface="D2Coding" panose="020B0609020101020101" pitchFamily="49" charset="-127"/>
+                <a:ea typeface="D2Coding" panose="020B0609020101020101" pitchFamily="49" charset="-127"/>
+              </a:rPr>
+              <a:t>중단</a:t>
+            </a:r>
+          </a:p>
+        </p:txBody>
+      </p:sp>
+    </p:spTree>
+    <p:extLst>
+      <p:ext uri="{BB962C8B-B14F-4D97-AF65-F5344CB8AC3E}">
+        <p14:creationId xmlns:p14="http://schemas.microsoft.com/office/powerpoint/2010/main" val="3084230051"/>
+      </p:ext>
+    </p:extLst>
+  </p:cSld>
+  <p:clrMapOvr>
+    <a:masterClrMapping/>
+  </p:clrMapOvr>
+</p:sld>
+</file>
+
 <file path=ppt/slides/slide2.xml><?xml version="1.0" encoding="utf-8"?>
 <p:sld xmlns:a="http://schemas.openxmlformats.org/drawingml/2006/main" xmlns:r="http://schemas.openxmlformats.org/officeDocument/2006/relationships" xmlns:p="http://schemas.openxmlformats.org/presentationml/2006/main">
   <p:cSld>
@@ -3433,6 +8545,60 @@
       </p:grpSpPr>
       <p:sp>
         <p:nvSpPr>
+          <p:cNvPr id="4" name="직사각형 3">
+            <a:extLst>
+              <a:ext uri="{FF2B5EF4-FFF2-40B4-BE49-F238E27FC236}">
+                <a16:creationId xmlns:a16="http://schemas.microsoft.com/office/drawing/2014/main" id="{44D502D8-2161-F2CC-62B6-823679B5CD6C}"/>
+              </a:ext>
+            </a:extLst>
+          </p:cNvPr>
+          <p:cNvSpPr/>
+          <p:nvPr/>
+        </p:nvSpPr>
+        <p:spPr>
+          <a:xfrm>
+            <a:off x="628650" y="5019675"/>
+            <a:ext cx="10200757" cy="561975"/>
+          </a:xfrm>
+          <a:prstGeom prst="rect">
+            <a:avLst/>
+          </a:prstGeom>
+          <a:solidFill>
+            <a:schemeClr val="bg1">
+              <a:lumMod val="85000"/>
+            </a:schemeClr>
+          </a:solidFill>
+          <a:ln>
+            <a:noFill/>
+          </a:ln>
+        </p:spPr>
+        <p:style>
+          <a:lnRef idx="2">
+            <a:schemeClr val="accent1">
+              <a:shade val="15000"/>
+            </a:schemeClr>
+          </a:lnRef>
+          <a:fillRef idx="1">
+            <a:schemeClr val="accent1"/>
+          </a:fillRef>
+          <a:effectRef idx="0">
+            <a:schemeClr val="accent1"/>
+          </a:effectRef>
+          <a:fontRef idx="minor">
+            <a:schemeClr val="lt1"/>
+          </a:fontRef>
+        </p:style>
+        <p:txBody>
+          <a:bodyPr rtlCol="0" anchor="ctr"/>
+          <a:lstStyle/>
+          <a:p>
+            <a:pPr algn="ctr"/>
+            <a:endParaRPr lang="ko-KR" altLang="en-US"/>
+          </a:p>
+        </p:txBody>
+      </p:sp>
+      <p:sp>
+        <p:nvSpPr>
           <p:cNvPr id="3" name="제목 1">
             <a:extLst>
               <a:ext uri="{FF2B5EF4-FFF2-40B4-BE49-F238E27FC236}">
@@ -3777,6 +8943,433 @@
 </file>
 
 <file path=ppt/slides/slide4.xml><?xml version="1.0" encoding="utf-8"?>
+<p:sld xmlns:a="http://schemas.openxmlformats.org/drawingml/2006/main" xmlns:r="http://schemas.openxmlformats.org/officeDocument/2006/relationships" xmlns:p="http://schemas.openxmlformats.org/presentationml/2006/main">
+  <p:cSld>
+    <p:spTree>
+      <p:nvGrpSpPr>
+        <p:cNvPr id="1" name="">
+          <a:extLst>
+            <a:ext uri="{FF2B5EF4-FFF2-40B4-BE49-F238E27FC236}">
+              <a16:creationId xmlns:a16="http://schemas.microsoft.com/office/drawing/2014/main" id="{BC94D940-69A6-74AE-2745-A192282253C9}"/>
+            </a:ext>
+          </a:extLst>
+        </p:cNvPr>
+        <p:cNvGrpSpPr/>
+        <p:nvPr/>
+      </p:nvGrpSpPr>
+      <p:grpSpPr>
+        <a:xfrm>
+          <a:off x="0" y="0"/>
+          <a:ext cx="0" cy="0"/>
+          <a:chOff x="0" y="0"/>
+          <a:chExt cx="0" cy="0"/>
+        </a:xfrm>
+      </p:grpSpPr>
+      <p:sp>
+        <p:nvSpPr>
+          <p:cNvPr id="2" name="제목 1">
+            <a:extLst>
+              <a:ext uri="{FF2B5EF4-FFF2-40B4-BE49-F238E27FC236}">
+                <a16:creationId xmlns:a16="http://schemas.microsoft.com/office/drawing/2014/main" id="{79193DBC-52DB-BF95-C9AE-3B5D294F46EA}"/>
+              </a:ext>
+            </a:extLst>
+          </p:cNvPr>
+          <p:cNvSpPr>
+            <a:spLocks noGrp="1"/>
+          </p:cNvSpPr>
+          <p:nvPr>
+            <p:ph type="ctrTitle"/>
+          </p:nvPr>
+        </p:nvSpPr>
+        <p:spPr>
+          <a:xfrm>
+            <a:off x="838199" y="1164324"/>
+            <a:ext cx="10934701" cy="2387600"/>
+          </a:xfrm>
+        </p:spPr>
+        <p:txBody>
+          <a:bodyPr rtlCol="0" anchor="ctr" anchorCtr="0">
+            <a:normAutofit/>
+          </a:bodyPr>
+          <a:lstStyle/>
+          <a:p>
+            <a:r>
+              <a:rPr lang="en-US" altLang="ko-KR" sz="5400" dirty="0">
+                <a:solidFill>
+                  <a:schemeClr val="bg1"/>
+                </a:solidFill>
+                <a:latin typeface="D2Coding" panose="020B0609020101020101" pitchFamily="49" charset="-127"/>
+                <a:ea typeface="D2Coding" panose="020B0609020101020101" pitchFamily="49" charset="-127"/>
+              </a:rPr>
+              <a:t>GitHub Actions Exercise </a:t>
+            </a:r>
+            <a:br>
+              <a:rPr lang="en-US" altLang="ko-KR" sz="5400" dirty="0">
+                <a:solidFill>
+                  <a:schemeClr val="bg1"/>
+                </a:solidFill>
+                <a:latin typeface="D2Coding" panose="020B0609020101020101" pitchFamily="49" charset="-127"/>
+                <a:ea typeface="D2Coding" panose="020B0609020101020101" pitchFamily="49" charset="-127"/>
+              </a:rPr>
+            </a:br>
+            <a:r>
+              <a:rPr lang="en-US" altLang="ko-KR" sz="3600" dirty="0">
+                <a:solidFill>
+                  <a:schemeClr val="bg1"/>
+                </a:solidFill>
+                <a:latin typeface="D2Coding" panose="020B0609020101020101" pitchFamily="49" charset="-127"/>
+                <a:ea typeface="D2Coding" panose="020B0609020101020101" pitchFamily="49" charset="-127"/>
+              </a:rPr>
+              <a:t>(python + </a:t>
+            </a:r>
+            <a:r>
+              <a:rPr lang="en-US" altLang="ko-KR" sz="3600" dirty="0" err="1">
+                <a:solidFill>
+                  <a:schemeClr val="bg1"/>
+                </a:solidFill>
+                <a:latin typeface="D2Coding" panose="020B0609020101020101" pitchFamily="49" charset="-127"/>
+                <a:ea typeface="D2Coding" panose="020B0609020101020101" pitchFamily="49" charset="-127"/>
+              </a:rPr>
+              <a:t>gradio</a:t>
+            </a:r>
+            <a:r>
+              <a:rPr lang="ko-KR" altLang="en-US" sz="3600" dirty="0">
+                <a:solidFill>
+                  <a:schemeClr val="bg1"/>
+                </a:solidFill>
+                <a:latin typeface="D2Coding" panose="020B0609020101020101" pitchFamily="49" charset="-127"/>
+                <a:ea typeface="D2Coding" panose="020B0609020101020101" pitchFamily="49" charset="-127"/>
+              </a:rPr>
+              <a:t> </a:t>
+            </a:r>
+            <a:r>
+              <a:rPr lang="en-US" altLang="ko-KR" sz="3600" dirty="0">
+                <a:solidFill>
+                  <a:schemeClr val="bg1"/>
+                </a:solidFill>
+                <a:latin typeface="D2Coding" panose="020B0609020101020101" pitchFamily="49" charset="-127"/>
+                <a:ea typeface="D2Coding" panose="020B0609020101020101" pitchFamily="49" charset="-127"/>
+              </a:rPr>
+              <a:t>+ </a:t>
+            </a:r>
+            <a:r>
+              <a:rPr lang="en-US" altLang="ko-KR" sz="3600" dirty="0" err="1">
+                <a:solidFill>
+                  <a:schemeClr val="bg1"/>
+                </a:solidFill>
+                <a:latin typeface="D2Coding" panose="020B0609020101020101" pitchFamily="49" charset="-127"/>
+                <a:ea typeface="D2Coding" panose="020B0609020101020101" pitchFamily="49" charset="-127"/>
+              </a:rPr>
+              <a:t>Huggingface</a:t>
+            </a:r>
+            <a:r>
+              <a:rPr lang="ko-KR" altLang="en-US" sz="3600" dirty="0">
+                <a:solidFill>
+                  <a:schemeClr val="bg1"/>
+                </a:solidFill>
+                <a:latin typeface="D2Coding" panose="020B0609020101020101" pitchFamily="49" charset="-127"/>
+                <a:ea typeface="D2Coding" panose="020B0609020101020101" pitchFamily="49" charset="-127"/>
+              </a:rPr>
+              <a:t> </a:t>
+            </a:r>
+            <a:r>
+              <a:rPr lang="en-US" altLang="ko-KR" sz="3600" dirty="0" err="1">
+                <a:solidFill>
+                  <a:schemeClr val="bg1"/>
+                </a:solidFill>
+                <a:latin typeface="D2Coding" panose="020B0609020101020101" pitchFamily="49" charset="-127"/>
+                <a:ea typeface="D2Coding" panose="020B0609020101020101" pitchFamily="49" charset="-127"/>
+              </a:rPr>
+              <a:t>sapce</a:t>
+            </a:r>
+            <a:r>
+              <a:rPr lang="en-US" altLang="ko-KR" sz="3600" dirty="0">
+                <a:solidFill>
+                  <a:schemeClr val="bg1"/>
+                </a:solidFill>
+                <a:latin typeface="D2Coding" panose="020B0609020101020101" pitchFamily="49" charset="-127"/>
+                <a:ea typeface="D2Coding" panose="020B0609020101020101" pitchFamily="49" charset="-127"/>
+              </a:rPr>
+              <a:t>)</a:t>
+            </a:r>
+            <a:br>
+              <a:rPr lang="en-US" altLang="ko-KR" sz="5400" dirty="0">
+                <a:latin typeface="D2Coding" panose="020B0609020101020101" pitchFamily="49" charset="-127"/>
+                <a:ea typeface="D2Coding" panose="020B0609020101020101" pitchFamily="49" charset="-127"/>
+              </a:rPr>
+            </a:br>
+            <a:endParaRPr lang="ko-KR" altLang="en-US" sz="5400" dirty="0">
+              <a:solidFill>
+                <a:schemeClr val="bg1"/>
+              </a:solidFill>
+              <a:latin typeface="D2Coding" panose="020B0609020101020101" pitchFamily="49" charset="-127"/>
+              <a:ea typeface="D2Coding" panose="020B0609020101020101" pitchFamily="49" charset="-127"/>
+            </a:endParaRPr>
+          </a:p>
+        </p:txBody>
+      </p:sp>
+      <p:sp>
+        <p:nvSpPr>
+          <p:cNvPr id="5" name="부제목 2">
+            <a:extLst>
+              <a:ext uri="{FF2B5EF4-FFF2-40B4-BE49-F238E27FC236}">
+                <a16:creationId xmlns:a16="http://schemas.microsoft.com/office/drawing/2014/main" id="{59DA375E-6466-65EA-0528-D944F2783957}"/>
+              </a:ext>
+            </a:extLst>
+          </p:cNvPr>
+          <p:cNvSpPr txBox="1">
+            <a:spLocks/>
+          </p:cNvSpPr>
+          <p:nvPr/>
+        </p:nvSpPr>
+        <p:spPr>
+          <a:xfrm>
+            <a:off x="855620" y="4555883"/>
+            <a:ext cx="9582736" cy="1137793"/>
+          </a:xfrm>
+          <a:prstGeom prst="rect">
+            <a:avLst/>
+          </a:prstGeom>
+        </p:spPr>
+        <p:txBody>
+          <a:bodyPr vert="horz" lIns="91440" tIns="45720" rIns="91440" bIns="45720" rtlCol="0">
+            <a:normAutofit fontScale="85000" lnSpcReduction="20000"/>
+          </a:bodyPr>
+          <a:lstStyle>
+            <a:lvl1pPr marL="0" indent="0" algn="l" defTabSz="914400" rtl="0" eaLnBrk="1" latinLnBrk="1" hangingPunct="1">
+              <a:lnSpc>
+                <a:spcPct val="150000"/>
+              </a:lnSpc>
+              <a:spcBef>
+                <a:spcPts val="1000"/>
+              </a:spcBef>
+              <a:spcAft>
+                <a:spcPts val="1200"/>
+              </a:spcAft>
+              <a:buFontTx/>
+              <a:buNone/>
+              <a:defRPr lang="en-US" sz="1200" kern="1200" dirty="0">
+                <a:solidFill>
+                  <a:schemeClr val="tx1"/>
+                </a:solidFill>
+                <a:latin typeface="맑은 고딕" panose="020B0503020000020004" pitchFamily="50" charset="-127"/>
+                <a:ea typeface="맑은 고딕" panose="020B0503020000020004" pitchFamily="50" charset="-127"/>
+                <a:cs typeface="+mn-cs"/>
+              </a:defRPr>
+            </a:lvl1pPr>
+            <a:lvl2pPr marL="228600" indent="-228600" algn="l" defTabSz="914400" rtl="0" eaLnBrk="1" latinLnBrk="1" hangingPunct="1">
+              <a:lnSpc>
+                <a:spcPct val="150000"/>
+              </a:lnSpc>
+              <a:spcBef>
+                <a:spcPts val="1000"/>
+              </a:spcBef>
+              <a:spcAft>
+                <a:spcPts val="1200"/>
+              </a:spcAft>
+              <a:buFont typeface="Arial" panose="020B0604020202020204" pitchFamily="34" charset="0"/>
+              <a:buChar char="•"/>
+              <a:defRPr lang="en-US" sz="1200" kern="1200" dirty="0">
+                <a:solidFill>
+                  <a:schemeClr val="tx1"/>
+                </a:solidFill>
+                <a:latin typeface="맑은 고딕" panose="020B0503020000020004" pitchFamily="50" charset="-127"/>
+                <a:ea typeface="맑은 고딕" panose="020B0503020000020004" pitchFamily="50" charset="-127"/>
+                <a:cs typeface="+mn-cs"/>
+              </a:defRPr>
+            </a:lvl2pPr>
+            <a:lvl3pPr marL="685800" indent="-228600" algn="l" defTabSz="914400" rtl="0" eaLnBrk="1" latinLnBrk="1" hangingPunct="1">
+              <a:lnSpc>
+                <a:spcPct val="150000"/>
+              </a:lnSpc>
+              <a:spcBef>
+                <a:spcPts val="1000"/>
+              </a:spcBef>
+              <a:spcAft>
+                <a:spcPts val="1200"/>
+              </a:spcAft>
+              <a:buFont typeface="Arial" panose="020B0604020202020204" pitchFamily="34" charset="0"/>
+              <a:buChar char="•"/>
+              <a:defRPr lang="en-US" sz="1200" kern="1200" dirty="0">
+                <a:solidFill>
+                  <a:schemeClr val="tx1"/>
+                </a:solidFill>
+                <a:latin typeface="맑은 고딕" panose="020B0503020000020004" pitchFamily="50" charset="-127"/>
+                <a:ea typeface="맑은 고딕" panose="020B0503020000020004" pitchFamily="50" charset="-127"/>
+                <a:cs typeface="+mn-cs"/>
+              </a:defRPr>
+            </a:lvl3pPr>
+            <a:lvl4pPr marL="1143000" indent="-228600" algn="l" defTabSz="914400" rtl="0" eaLnBrk="1" latinLnBrk="1" hangingPunct="1">
+              <a:lnSpc>
+                <a:spcPct val="150000"/>
+              </a:lnSpc>
+              <a:spcBef>
+                <a:spcPts val="1000"/>
+              </a:spcBef>
+              <a:spcAft>
+                <a:spcPts val="1200"/>
+              </a:spcAft>
+              <a:buFont typeface="Arial" panose="020B0604020202020204" pitchFamily="34" charset="0"/>
+              <a:buChar char="•"/>
+              <a:defRPr lang="en-US" sz="1200" kern="1200" dirty="0" smtClean="0">
+                <a:solidFill>
+                  <a:schemeClr val="tx1"/>
+                </a:solidFill>
+                <a:latin typeface="맑은 고딕" panose="020B0503020000020004" pitchFamily="50" charset="-127"/>
+                <a:ea typeface="맑은 고딕" panose="020B0503020000020004" pitchFamily="50" charset="-127"/>
+                <a:cs typeface="+mn-cs"/>
+              </a:defRPr>
+            </a:lvl4pPr>
+            <a:lvl5pPr marL="1600200" indent="-228600" algn="l" defTabSz="914400" rtl="0" eaLnBrk="1" latinLnBrk="1" hangingPunct="1">
+              <a:lnSpc>
+                <a:spcPct val="150000"/>
+              </a:lnSpc>
+              <a:spcBef>
+                <a:spcPts val="1000"/>
+              </a:spcBef>
+              <a:spcAft>
+                <a:spcPts val="1200"/>
+              </a:spcAft>
+              <a:buFont typeface="Arial" panose="020B0604020202020204" pitchFamily="34" charset="0"/>
+              <a:buChar char="•"/>
+              <a:defRPr lang="en-US" sz="1200" kern="1200" dirty="0" smtClean="0">
+                <a:solidFill>
+                  <a:schemeClr val="tx1"/>
+                </a:solidFill>
+                <a:latin typeface="맑은 고딕" panose="020B0503020000020004" pitchFamily="50" charset="-127"/>
+                <a:ea typeface="맑은 고딕" panose="020B0503020000020004" pitchFamily="50" charset="-127"/>
+                <a:cs typeface="+mn-cs"/>
+              </a:defRPr>
+            </a:lvl5pPr>
+            <a:lvl6pPr marL="2057400" indent="-228600" algn="l" defTabSz="914400" rtl="0" eaLnBrk="1" latinLnBrk="1" hangingPunct="1">
+              <a:lnSpc>
+                <a:spcPct val="150000"/>
+              </a:lnSpc>
+              <a:spcBef>
+                <a:spcPts val="1000"/>
+              </a:spcBef>
+              <a:spcAft>
+                <a:spcPts val="1200"/>
+              </a:spcAft>
+              <a:buFont typeface="Arial" panose="020B0604020202020204" pitchFamily="34" charset="0"/>
+              <a:buChar char="•"/>
+              <a:defRPr lang="en-US" sz="1200" kern="1200" dirty="0" smtClean="0">
+                <a:solidFill>
+                  <a:schemeClr val="tx1"/>
+                </a:solidFill>
+                <a:latin typeface="+mn-lt"/>
+                <a:ea typeface="+mn-ea"/>
+                <a:cs typeface="+mn-cs"/>
+              </a:defRPr>
+            </a:lvl6pPr>
+            <a:lvl7pPr marL="2514600" indent="-228600" algn="l" defTabSz="914400" rtl="0" eaLnBrk="1" latinLnBrk="1" hangingPunct="1">
+              <a:lnSpc>
+                <a:spcPct val="150000"/>
+              </a:lnSpc>
+              <a:spcBef>
+                <a:spcPts val="1000"/>
+              </a:spcBef>
+              <a:spcAft>
+                <a:spcPts val="1200"/>
+              </a:spcAft>
+              <a:buFont typeface="Arial" panose="020B0604020202020204" pitchFamily="34" charset="0"/>
+              <a:buChar char="•"/>
+              <a:defRPr lang="en-US" sz="1200" kern="1200" dirty="0" smtClean="0">
+                <a:solidFill>
+                  <a:schemeClr val="tx1"/>
+                </a:solidFill>
+                <a:latin typeface="+mn-lt"/>
+                <a:ea typeface="+mn-ea"/>
+                <a:cs typeface="+mn-cs"/>
+              </a:defRPr>
+            </a:lvl7pPr>
+            <a:lvl8pPr marL="2971800" indent="-228600" algn="l" defTabSz="914400" rtl="0" eaLnBrk="1" latinLnBrk="1" hangingPunct="1">
+              <a:lnSpc>
+                <a:spcPct val="150000"/>
+              </a:lnSpc>
+              <a:spcBef>
+                <a:spcPts val="1000"/>
+              </a:spcBef>
+              <a:spcAft>
+                <a:spcPts val="1200"/>
+              </a:spcAft>
+              <a:buFont typeface="Arial" panose="020B0604020202020204" pitchFamily="34" charset="0"/>
+              <a:buChar char="•"/>
+              <a:defRPr lang="en-US" sz="1200" kern="1200" dirty="0" smtClean="0">
+                <a:solidFill>
+                  <a:schemeClr val="tx1"/>
+                </a:solidFill>
+                <a:latin typeface="+mn-lt"/>
+                <a:ea typeface="+mn-ea"/>
+                <a:cs typeface="+mn-cs"/>
+              </a:defRPr>
+            </a:lvl8pPr>
+            <a:lvl9pPr marL="3429000" indent="-228600" algn="l" defTabSz="914400" rtl="0" eaLnBrk="1" latinLnBrk="1" hangingPunct="1">
+              <a:lnSpc>
+                <a:spcPct val="90000"/>
+              </a:lnSpc>
+              <a:spcBef>
+                <a:spcPct val="30000"/>
+              </a:spcBef>
+              <a:buFont typeface="Arial" panose="020B0604020202020204" pitchFamily="34" charset="0"/>
+              <a:buNone/>
+              <a:defRPr sz="1200" kern="1200">
+                <a:solidFill>
+                  <a:schemeClr val="tx1"/>
+                </a:solidFill>
+                <a:latin typeface="+mn-lt"/>
+                <a:ea typeface="+mn-ea"/>
+                <a:cs typeface="+mn-cs"/>
+              </a:defRPr>
+            </a:lvl9pPr>
+          </a:lstStyle>
+          <a:p>
+            <a:r>
+              <a:rPr lang="en-US" altLang="ko-KR" sz="2400" dirty="0">
+                <a:solidFill>
+                  <a:schemeClr val="bg1"/>
+                </a:solidFill>
+                <a:latin typeface="D2Coding" panose="020B0609020101020101" pitchFamily="49" charset="-127"/>
+                <a:ea typeface="D2Coding" panose="020B0609020101020101" pitchFamily="49" charset="-127"/>
+              </a:rPr>
+              <a:t>2026 Fall</a:t>
+            </a:r>
+          </a:p>
+          <a:p>
+            <a:r>
+              <a:rPr lang="ko-KR" altLang="en-US" sz="2400" dirty="0" err="1">
+                <a:solidFill>
+                  <a:schemeClr val="bg1"/>
+                </a:solidFill>
+                <a:latin typeface="D2Coding" panose="020B0609020101020101" pitchFamily="49" charset="-127"/>
+                <a:ea typeface="D2Coding" panose="020B0609020101020101" pitchFamily="49" charset="-127"/>
+              </a:rPr>
+              <a:t>조상구교수</a:t>
+            </a:r>
+            <a:endParaRPr lang="en-US" altLang="ko-KR" sz="2400" dirty="0">
+              <a:solidFill>
+                <a:schemeClr val="bg1"/>
+              </a:solidFill>
+              <a:latin typeface="D2Coding" panose="020B0609020101020101" pitchFamily="49" charset="-127"/>
+              <a:ea typeface="D2Coding" panose="020B0609020101020101" pitchFamily="49" charset="-127"/>
+            </a:endParaRPr>
+          </a:p>
+        </p:txBody>
+      </p:sp>
+    </p:spTree>
+    <p:extLst>
+      <p:ext uri="{BB962C8B-B14F-4D97-AF65-F5344CB8AC3E}">
+        <p14:creationId xmlns:p14="http://schemas.microsoft.com/office/powerpoint/2010/main" val="3077243580"/>
+      </p:ext>
+    </p:extLst>
+  </p:cSld>
+  <p:clrMapOvr>
+    <a:masterClrMapping/>
+  </p:clrMapOvr>
+</p:sld>
+</file>
+
+<file path=ppt/slides/slide5.xml><?xml version="1.0" encoding="utf-8"?>
 <p:sld xmlns:a="http://schemas.openxmlformats.org/drawingml/2006/main" xmlns:r="http://schemas.openxmlformats.org/officeDocument/2006/relationships" xmlns:p="http://schemas.openxmlformats.org/presentationml/2006/main">
   <p:cSld>
     <p:spTree>
@@ -4042,7 +9635,7 @@
                 <a:ea typeface="Segoe UI Emoji" panose="020B0502040204020203" pitchFamily="34" charset="0"/>
               </a:rPr>
               <a:pPr/>
-              <a:t>4</a:t>
+              <a:t>5</a:t>
             </a:fld>
             <a:endParaRPr lang="en-US" b="1" dirty="0">
               <a:latin typeface="Segoe UI Emoji" panose="020B0502040204020203" pitchFamily="34" charset="0"/>
@@ -4239,7 +9832,7 @@
 </p:sld>
 </file>
 
-<file path=ppt/slides/slide5.xml><?xml version="1.0" encoding="utf-8"?>
+<file path=ppt/slides/slide6.xml><?xml version="1.0" encoding="utf-8"?>
 <p:sld xmlns:a="http://schemas.openxmlformats.org/drawingml/2006/main" xmlns:r="http://schemas.openxmlformats.org/officeDocument/2006/relationships" xmlns:p="http://schemas.openxmlformats.org/presentationml/2006/main">
   <p:cSld>
     <p:spTree>
@@ -4505,7 +10098,7 @@
                 <a:ea typeface="Segoe UI Emoji" panose="020B0502040204020203" pitchFamily="34" charset="0"/>
               </a:rPr>
               <a:pPr/>
-              <a:t>5</a:t>
+              <a:t>6</a:t>
             </a:fld>
             <a:endParaRPr lang="en-US" b="1" dirty="0">
               <a:latin typeface="Segoe UI Emoji" panose="020B0502040204020203" pitchFamily="34" charset="0"/>
@@ -5636,7 +11229,7 @@
 </p:sld>
 </file>
 
-<file path=ppt/slides/slide6.xml><?xml version="1.0" encoding="utf-8"?>
+<file path=ppt/slides/slide7.xml><?xml version="1.0" encoding="utf-8"?>
 <p:sld xmlns:a="http://schemas.openxmlformats.org/drawingml/2006/main" xmlns:r="http://schemas.openxmlformats.org/officeDocument/2006/relationships" xmlns:p="http://schemas.openxmlformats.org/presentationml/2006/main">
   <p:cSld>
     <p:spTree>
@@ -5902,7 +11495,7 @@
                 <a:ea typeface="Segoe UI Emoji" panose="020B0502040204020203" pitchFamily="34" charset="0"/>
               </a:rPr>
               <a:pPr/>
-              <a:t>6</a:t>
+              <a:t>7</a:t>
             </a:fld>
             <a:endParaRPr lang="en-US" b="1" dirty="0">
               <a:latin typeface="Segoe UI Emoji" panose="020B0502040204020203" pitchFamily="34" charset="0"/>
@@ -6506,7 +12099,7 @@
 </p:sld>
 </file>
 
-<file path=ppt/slides/slide7.xml><?xml version="1.0" encoding="utf-8"?>
+<file path=ppt/slides/slide8.xml><?xml version="1.0" encoding="utf-8"?>
 <p:sld xmlns:a="http://schemas.openxmlformats.org/drawingml/2006/main" xmlns:r="http://schemas.openxmlformats.org/officeDocument/2006/relationships" xmlns:p="http://schemas.openxmlformats.org/presentationml/2006/main">
   <p:cSld>
     <p:spTree>
@@ -6772,7 +12365,7 @@
                 <a:ea typeface="Segoe UI Emoji" panose="020B0502040204020203" pitchFamily="34" charset="0"/>
               </a:rPr>
               <a:pPr/>
-              <a:t>7</a:t>
+              <a:t>8</a:t>
             </a:fld>
             <a:endParaRPr lang="en-US" b="1" dirty="0">
               <a:latin typeface="Segoe UI Emoji" panose="020B0502040204020203" pitchFamily="34" charset="0"/>
@@ -6910,7 +12503,7 @@
 </p:sld>
 </file>
 
-<file path=ppt/slides/slide8.xml><?xml version="1.0" encoding="utf-8"?>
+<file path=ppt/slides/slide9.xml><?xml version="1.0" encoding="utf-8"?>
 <p:sld xmlns:a="http://schemas.openxmlformats.org/drawingml/2006/main" xmlns:r="http://schemas.openxmlformats.org/officeDocument/2006/relationships" xmlns:p="http://schemas.openxmlformats.org/presentationml/2006/main">
   <p:cSld>
     <p:spTree>
@@ -7176,7 +12769,7 @@
                 <a:ea typeface="Segoe UI Emoji" panose="020B0502040204020203" pitchFamily="34" charset="0"/>
               </a:rPr>
               <a:pPr/>
-              <a:t>8</a:t>
+              <a:t>9</a:t>
             </a:fld>
             <a:endParaRPr lang="en-US" b="1" dirty="0">
               <a:latin typeface="Segoe UI Emoji" panose="020B0502040204020203" pitchFamily="34" charset="0"/>
@@ -8168,412 +13761,6 @@
     <p:extLst>
       <p:ext uri="{BB962C8B-B14F-4D97-AF65-F5344CB8AC3E}">
         <p14:creationId xmlns:p14="http://schemas.microsoft.com/office/powerpoint/2010/main" val="413653898"/>
-      </p:ext>
-    </p:extLst>
-  </p:cSld>
-  <p:clrMapOvr>
-    <a:masterClrMapping/>
-  </p:clrMapOvr>
-</p:sld>
-</file>
-
-<file path=ppt/slides/slide9.xml><?xml version="1.0" encoding="utf-8"?>
-<p:sld xmlns:a="http://schemas.openxmlformats.org/drawingml/2006/main" xmlns:r="http://schemas.openxmlformats.org/officeDocument/2006/relationships" xmlns:p="http://schemas.openxmlformats.org/presentationml/2006/main">
-  <p:cSld>
-    <p:spTree>
-      <p:nvGrpSpPr>
-        <p:cNvPr id="1" name="">
-          <a:extLst>
-            <a:ext uri="{FF2B5EF4-FFF2-40B4-BE49-F238E27FC236}">
-              <a16:creationId xmlns:a16="http://schemas.microsoft.com/office/drawing/2014/main" id="{A48B3221-BCC2-E73E-5ECE-FC0D08A21028}"/>
-            </a:ext>
-          </a:extLst>
-        </p:cNvPr>
-        <p:cNvGrpSpPr/>
-        <p:nvPr/>
-      </p:nvGrpSpPr>
-      <p:grpSpPr>
-        <a:xfrm>
-          <a:off x="0" y="0"/>
-          <a:ext cx="0" cy="0"/>
-          <a:chOff x="0" y="0"/>
-          <a:chExt cx="0" cy="0"/>
-        </a:xfrm>
-      </p:grpSpPr>
-      <p:sp>
-        <p:nvSpPr>
-          <p:cNvPr id="3" name="제목 1">
-            <a:extLst>
-              <a:ext uri="{FF2B5EF4-FFF2-40B4-BE49-F238E27FC236}">
-                <a16:creationId xmlns:a16="http://schemas.microsoft.com/office/drawing/2014/main" id="{97E98970-B8B2-8158-00D9-5C45631744D2}"/>
-              </a:ext>
-            </a:extLst>
-          </p:cNvPr>
-          <p:cNvSpPr txBox="1">
-            <a:spLocks/>
-          </p:cNvSpPr>
-          <p:nvPr/>
-        </p:nvSpPr>
-        <p:spPr>
-          <a:xfrm>
-            <a:off x="475645" y="481983"/>
-            <a:ext cx="10353762" cy="766439"/>
-          </a:xfrm>
-          <a:prstGeom prst="rect">
-            <a:avLst/>
-          </a:prstGeom>
-        </p:spPr>
-        <p:txBody>
-          <a:bodyPr vert="horz" lIns="91440" tIns="45720" rIns="91440" bIns="45720" rtlCol="0" anchor="ctr">
-            <a:normAutofit/>
-          </a:bodyPr>
-          <a:lstStyle>
-            <a:lvl1pPr algn="ctr" defTabSz="914400" rtl="0" eaLnBrk="1" latinLnBrk="1" hangingPunct="1">
-              <a:lnSpc>
-                <a:spcPct val="90000"/>
-              </a:lnSpc>
-              <a:spcBef>
-                <a:spcPct val="0"/>
-              </a:spcBef>
-              <a:buNone/>
-              <a:defRPr sz="3200" kern="1200" cap="all" baseline="0">
-                <a:solidFill>
-                  <a:schemeClr val="tx1"/>
-                </a:solidFill>
-                <a:effectLst/>
-                <a:latin typeface="Batang" panose="02030600000101010101" pitchFamily="18" charset="-127"/>
-                <a:ea typeface="Batang" panose="02030600000101010101" pitchFamily="18" charset="-127"/>
-                <a:cs typeface="+mj-cs"/>
-              </a:defRPr>
-            </a:lvl1pPr>
-          </a:lstStyle>
-          <a:p>
-            <a:pPr algn="l"/>
-            <a:r>
-              <a:rPr lang="en-US" altLang="ko-KR" sz="2800" cap="none" dirty="0">
-                <a:solidFill>
-                  <a:schemeClr val="bg2">
-                    <a:lumMod val="25000"/>
-                  </a:schemeClr>
-                </a:solidFill>
-                <a:latin typeface="D2Coding" panose="020B0609020101020101" pitchFamily="49" charset="-127"/>
-                <a:ea typeface="D2Coding" panose="020B0609020101020101" pitchFamily="49" charset="-127"/>
-                <a:cs typeface="Segoe UI Light" panose="020B0502040204020203" pitchFamily="34" charset="0"/>
-              </a:rPr>
-              <a:t>Deployment</a:t>
-            </a:r>
-            <a:r>
-              <a:rPr lang="ko-KR" altLang="en-US" sz="2800" cap="none" dirty="0">
-                <a:solidFill>
-                  <a:schemeClr val="bg2">
-                    <a:lumMod val="25000"/>
-                  </a:schemeClr>
-                </a:solidFill>
-                <a:latin typeface="D2Coding" panose="020B0609020101020101" pitchFamily="49" charset="-127"/>
-                <a:ea typeface="D2Coding" panose="020B0609020101020101" pitchFamily="49" charset="-127"/>
-                <a:cs typeface="Segoe UI Light" panose="020B0502040204020203" pitchFamily="34" charset="0"/>
-              </a:rPr>
-              <a:t> </a:t>
-            </a:r>
-            <a:r>
-              <a:rPr lang="en-US" altLang="ko-KR" sz="2800" cap="none" dirty="0">
-                <a:solidFill>
-                  <a:schemeClr val="bg2">
-                    <a:lumMod val="25000"/>
-                  </a:schemeClr>
-                </a:solidFill>
-                <a:latin typeface="D2Coding" panose="020B0609020101020101" pitchFamily="49" charset="-127"/>
-                <a:ea typeface="D2Coding" panose="020B0609020101020101" pitchFamily="49" charset="-127"/>
-                <a:cs typeface="Segoe UI Light" panose="020B0502040204020203" pitchFamily="34" charset="0"/>
-              </a:rPr>
-              <a:t>UI(</a:t>
-            </a:r>
-            <a:r>
-              <a:rPr lang="en-US" altLang="ko-KR" sz="2800" cap="none" dirty="0" err="1">
-                <a:solidFill>
-                  <a:schemeClr val="bg2">
-                    <a:lumMod val="25000"/>
-                  </a:schemeClr>
-                </a:solidFill>
-                <a:latin typeface="D2Coding" panose="020B0609020101020101" pitchFamily="49" charset="-127"/>
-                <a:ea typeface="D2Coding" panose="020B0609020101020101" pitchFamily="49" charset="-127"/>
-                <a:cs typeface="Segoe UI Light" panose="020B0502040204020203" pitchFamily="34" charset="0"/>
-              </a:rPr>
-              <a:t>gradio</a:t>
-            </a:r>
-            <a:r>
-              <a:rPr lang="en-US" altLang="ko-KR" sz="2800" cap="none" dirty="0">
-                <a:solidFill>
-                  <a:schemeClr val="bg2">
-                    <a:lumMod val="25000"/>
-                  </a:schemeClr>
-                </a:solidFill>
-                <a:latin typeface="D2Coding" panose="020B0609020101020101" pitchFamily="49" charset="-127"/>
-                <a:ea typeface="D2Coding" panose="020B0609020101020101" pitchFamily="49" charset="-127"/>
-                <a:cs typeface="Segoe UI Light" panose="020B0502040204020203" pitchFamily="34" charset="0"/>
-              </a:rPr>
-              <a:t>)</a:t>
-            </a:r>
-            <a:endParaRPr lang="ko-KR" altLang="en-US" sz="2800" cap="none" dirty="0">
-              <a:solidFill>
-                <a:schemeClr val="bg2">
-                  <a:lumMod val="25000"/>
-                </a:schemeClr>
-              </a:solidFill>
-              <a:latin typeface="D2Coding" panose="020B0609020101020101" pitchFamily="49" charset="-127"/>
-              <a:ea typeface="D2Coding" panose="020B0609020101020101" pitchFamily="49" charset="-127"/>
-              <a:cs typeface="Segoe UI Light" panose="020B0502040204020203" pitchFamily="34" charset="0"/>
-            </a:endParaRPr>
-          </a:p>
-        </p:txBody>
-      </p:sp>
-      <p:sp>
-        <p:nvSpPr>
-          <p:cNvPr id="8" name="TextBox 7">
-            <a:extLst>
-              <a:ext uri="{FF2B5EF4-FFF2-40B4-BE49-F238E27FC236}">
-                <a16:creationId xmlns:a16="http://schemas.microsoft.com/office/drawing/2014/main" id="{543A0A8B-DCEE-4734-094C-DBA1FD8F4C84}"/>
-              </a:ext>
-            </a:extLst>
-          </p:cNvPr>
-          <p:cNvSpPr txBox="1"/>
-          <p:nvPr/>
-        </p:nvSpPr>
-        <p:spPr>
-          <a:xfrm>
-            <a:off x="744020" y="3244334"/>
-            <a:ext cx="184731" cy="369332"/>
-          </a:xfrm>
-          <a:prstGeom prst="rect">
-            <a:avLst/>
-          </a:prstGeom>
-          <a:noFill/>
-        </p:spPr>
-        <p:txBody>
-          <a:bodyPr wrap="none" rtlCol="0">
-            <a:spAutoFit/>
-          </a:bodyPr>
-          <a:lstStyle/>
-          <a:p>
-            <a:endParaRPr lang="ko-KR" altLang="en-US" dirty="0">
-              <a:solidFill>
-                <a:schemeClr val="accent5"/>
-              </a:solidFill>
-              <a:latin typeface="D2Coding" panose="020B0609020101020101" pitchFamily="49" charset="-127"/>
-              <a:ea typeface="D2Coding" panose="020B0609020101020101" pitchFamily="49" charset="-127"/>
-            </a:endParaRPr>
-          </a:p>
-        </p:txBody>
-      </p:sp>
-      <p:sp>
-        <p:nvSpPr>
-          <p:cNvPr id="2" name="슬라이드 번호 개체 틀 3">
-            <a:extLst>
-              <a:ext uri="{FF2B5EF4-FFF2-40B4-BE49-F238E27FC236}">
-                <a16:creationId xmlns:a16="http://schemas.microsoft.com/office/drawing/2014/main" id="{03848BC8-1ABE-0BD9-D867-BEF02A368B64}"/>
-              </a:ext>
-            </a:extLst>
-          </p:cNvPr>
-          <p:cNvSpPr txBox="1">
-            <a:spLocks/>
-          </p:cNvSpPr>
-          <p:nvPr/>
-        </p:nvSpPr>
-        <p:spPr>
-          <a:xfrm>
-            <a:off x="11180761" y="299420"/>
-            <a:ext cx="753545" cy="365125"/>
-          </a:xfrm>
-          <a:prstGeom prst="rect">
-            <a:avLst/>
-          </a:prstGeom>
-        </p:spPr>
-        <p:txBody>
-          <a:bodyPr vert="horz" lIns="91440" tIns="45720" rIns="91440" bIns="45720" rtlCol="0" anchor="ctr"/>
-          <a:lstStyle>
-            <a:defPPr rtl="0">
-              <a:defRPr lang="ko-KR"/>
-            </a:defPPr>
-            <a:lvl1pPr marL="0" algn="r" defTabSz="914400" rtl="0" eaLnBrk="1" latinLnBrk="0" hangingPunct="1">
-              <a:defRPr sz="1200" kern="1200" baseline="0">
-                <a:solidFill>
-                  <a:schemeClr val="tx1">
-                    <a:lumMod val="65000"/>
-                    <a:lumOff val="35000"/>
-                  </a:schemeClr>
-                </a:solidFill>
-                <a:latin typeface="맑은 고딕" panose="020B0503020000020004" pitchFamily="50" charset="-127"/>
-                <a:ea typeface="맑은 고딕" panose="020B0503020000020004" pitchFamily="50" charset="-127"/>
-                <a:cs typeface="+mn-cs"/>
-              </a:defRPr>
-            </a:lvl1pPr>
-            <a:lvl2pPr marL="457200" algn="l" defTabSz="914400" rtl="0" eaLnBrk="1" latinLnBrk="0" hangingPunct="1">
-              <a:defRPr sz="1800" kern="1200">
-                <a:solidFill>
-                  <a:schemeClr val="tx1"/>
-                </a:solidFill>
-                <a:latin typeface="+mn-lt"/>
-                <a:ea typeface="+mn-ea"/>
-                <a:cs typeface="+mn-cs"/>
-              </a:defRPr>
-            </a:lvl2pPr>
-            <a:lvl3pPr marL="914400" algn="l" defTabSz="914400" rtl="0" eaLnBrk="1" latinLnBrk="0" hangingPunct="1">
-              <a:defRPr sz="1800" kern="1200">
-                <a:solidFill>
-                  <a:schemeClr val="tx1"/>
-                </a:solidFill>
-                <a:latin typeface="+mn-lt"/>
-                <a:ea typeface="+mn-ea"/>
-                <a:cs typeface="+mn-cs"/>
-              </a:defRPr>
-            </a:lvl3pPr>
-            <a:lvl4pPr marL="1371600" algn="l" defTabSz="914400" rtl="0" eaLnBrk="1" latinLnBrk="0" hangingPunct="1">
-              <a:defRPr sz="1800" kern="1200">
-                <a:solidFill>
-                  <a:schemeClr val="tx1"/>
-                </a:solidFill>
-                <a:latin typeface="+mn-lt"/>
-                <a:ea typeface="+mn-ea"/>
-                <a:cs typeface="+mn-cs"/>
-              </a:defRPr>
-            </a:lvl4pPr>
-            <a:lvl5pPr marL="1828800" algn="l" defTabSz="914400" rtl="0" eaLnBrk="1" latinLnBrk="0" hangingPunct="1">
-              <a:defRPr sz="1800" kern="1200">
-                <a:solidFill>
-                  <a:schemeClr val="tx1"/>
-                </a:solidFill>
-                <a:latin typeface="+mn-lt"/>
-                <a:ea typeface="+mn-ea"/>
-                <a:cs typeface="+mn-cs"/>
-              </a:defRPr>
-            </a:lvl5pPr>
-            <a:lvl6pPr marL="2286000" algn="l" defTabSz="914400" rtl="0" eaLnBrk="1" latinLnBrk="0" hangingPunct="1">
-              <a:defRPr sz="1800" kern="1200">
-                <a:solidFill>
-                  <a:schemeClr val="tx1"/>
-                </a:solidFill>
-                <a:latin typeface="+mn-lt"/>
-                <a:ea typeface="+mn-ea"/>
-                <a:cs typeface="+mn-cs"/>
-              </a:defRPr>
-            </a:lvl6pPr>
-            <a:lvl7pPr marL="2743200" algn="l" defTabSz="914400" rtl="0" eaLnBrk="1" latinLnBrk="0" hangingPunct="1">
-              <a:defRPr sz="1800" kern="1200">
-                <a:solidFill>
-                  <a:schemeClr val="tx1"/>
-                </a:solidFill>
-                <a:latin typeface="+mn-lt"/>
-                <a:ea typeface="+mn-ea"/>
-                <a:cs typeface="+mn-cs"/>
-              </a:defRPr>
-            </a:lvl7pPr>
-            <a:lvl8pPr marL="3200400" algn="l" defTabSz="914400" rtl="0" eaLnBrk="1" latinLnBrk="0" hangingPunct="1">
-              <a:defRPr sz="1800" kern="1200">
-                <a:solidFill>
-                  <a:schemeClr val="tx1"/>
-                </a:solidFill>
-                <a:latin typeface="+mn-lt"/>
-                <a:ea typeface="+mn-ea"/>
-                <a:cs typeface="+mn-cs"/>
-              </a:defRPr>
-            </a:lvl8pPr>
-            <a:lvl9pPr marL="3657600" algn="l" defTabSz="914400" rtl="0" eaLnBrk="1" latinLnBrk="0" hangingPunct="1">
-              <a:defRPr sz="1800" kern="1200">
-                <a:solidFill>
-                  <a:schemeClr val="tx1"/>
-                </a:solidFill>
-                <a:latin typeface="+mn-lt"/>
-                <a:ea typeface="+mn-ea"/>
-                <a:cs typeface="+mn-cs"/>
-              </a:defRPr>
-            </a:lvl9pPr>
-          </a:lstStyle>
-          <a:p>
-            <a:fld id="{D57F1E4F-1CFF-5643-939E-217C01CDF565}" type="slidenum">
-              <a:rPr lang="en-US" b="1" smtClean="0">
-                <a:latin typeface="Segoe UI Emoji" panose="020B0502040204020203" pitchFamily="34" charset="0"/>
-                <a:ea typeface="Segoe UI Emoji" panose="020B0502040204020203" pitchFamily="34" charset="0"/>
-              </a:rPr>
-              <a:pPr/>
-              <a:t>9</a:t>
-            </a:fld>
-            <a:endParaRPr lang="en-US" b="1" dirty="0">
-              <a:latin typeface="Segoe UI Emoji" panose="020B0502040204020203" pitchFamily="34" charset="0"/>
-              <a:ea typeface="Segoe UI Emoji" panose="020B0502040204020203" pitchFamily="34" charset="0"/>
-            </a:endParaRPr>
-          </a:p>
-        </p:txBody>
-      </p:sp>
-      <p:pic>
-        <p:nvPicPr>
-          <p:cNvPr id="9" name="그림 8">
-            <a:extLst>
-              <a:ext uri="{FF2B5EF4-FFF2-40B4-BE49-F238E27FC236}">
-                <a16:creationId xmlns:a16="http://schemas.microsoft.com/office/drawing/2014/main" id="{277C49C9-1C30-EB3E-F23D-FDA9073C7FCD}"/>
-              </a:ext>
-            </a:extLst>
-          </p:cNvPr>
-          <p:cNvPicPr>
-            <a:picLocks noChangeAspect="1"/>
-          </p:cNvPicPr>
-          <p:nvPr/>
-        </p:nvPicPr>
-        <p:blipFill>
-          <a:blip r:embed="rId2"/>
-          <a:stretch>
-            <a:fillRect/>
-          </a:stretch>
-        </p:blipFill>
-        <p:spPr>
-          <a:xfrm>
-            <a:off x="2039929" y="1529510"/>
-            <a:ext cx="7521592" cy="4732430"/>
-          </a:xfrm>
-          <a:prstGeom prst="rect">
-            <a:avLst/>
-          </a:prstGeom>
-        </p:spPr>
-      </p:pic>
-      <p:pic>
-        <p:nvPicPr>
-          <p:cNvPr id="4" name="그래픽 3" descr="수영">
-            <a:extLst>
-              <a:ext uri="{FF2B5EF4-FFF2-40B4-BE49-F238E27FC236}">
-                <a16:creationId xmlns:a16="http://schemas.microsoft.com/office/drawing/2014/main" id="{453B4CE4-3E16-22A3-4EC3-2511DC714DEB}"/>
-              </a:ext>
-            </a:extLst>
-          </p:cNvPr>
-          <p:cNvPicPr>
-            <a:picLocks noChangeAspect="1"/>
-          </p:cNvPicPr>
-          <p:nvPr/>
-        </p:nvPicPr>
-        <p:blipFill>
-          <a:blip r:embed="rId3">
-            <a:extLst>
-              <a:ext uri="{96DAC541-7B7A-43D3-8B79-37D633B846F1}">
-                <asvg:svgBlip xmlns:asvg="http://schemas.microsoft.com/office/drawing/2016/SVG/main" r:embed="rId4"/>
-              </a:ext>
-            </a:extLst>
-          </a:blip>
-          <a:stretch>
-            <a:fillRect/>
-          </a:stretch>
-        </p:blipFill>
-        <p:spPr>
-          <a:xfrm>
-            <a:off x="10685980" y="373930"/>
-            <a:ext cx="914400" cy="914400"/>
-          </a:xfrm>
-          <a:prstGeom prst="rect">
-            <a:avLst/>
-          </a:prstGeom>
-        </p:spPr>
-      </p:pic>
-    </p:spTree>
-    <p:extLst>
-      <p:ext uri="{BB962C8B-B14F-4D97-AF65-F5344CB8AC3E}">
-        <p14:creationId xmlns:p14="http://schemas.microsoft.com/office/powerpoint/2010/main" val="1018683190"/>
       </p:ext>
     </p:extLst>
   </p:cSld>
